--- a/docs/NafasNazorat_taqdimot.pptx
+++ b/docs/NafasNazorat_taqdimot.pptx
@@ -17,9 +17,10 @@
     <p:sldId id="265" r:id="rId11"/>
     <p:sldId id="266" r:id="rId12"/>
     <p:sldId id="267" r:id="rId13"/>
+    <p:sldId id="268" r:id="rId14"/>
   </p:sldIdLst>
   <p:notesMasterIdLst>
-    <p:notesMasterId r:id="rId14"/>
+    <p:notesMasterId r:id="rId15"/>
   </p:notesMasterIdLst>
   <p:sldSz cx="12192000" cy="6858000"/>
   <p:notesSz cx="6858000" cy="12192000"/>
@@ -118,48 +119,49 @@
   <p:extLst>
     <p:ext uri="{521415D9-36F7-43E2-AB2F-B90AF26B5E84}">
       <p14:sectionLst xmlns:p14="http://schemas.microsoft.com/office/powerpoint/2010/main">
-        <p14:section name="Kirish" id="{0d0d969b-d3ae-3bb7-bd57-ccd49ffb1f8b}">
+        <p14:section name="Kirish" id="{e90fb2c3-9407-f33a-a7e0-45a47b63b235}">
           <p14:sldIdLst>
             <p14:sldId id="256"/>
           </p14:sldIdLst>
         </p14:section>
-        <p14:section name="Muammo" id="{a9c09ee1-7726-3d16-0f32-5d51243aa9d5}">
+        <p14:section name="Muammo" id="{209f4509-1a2e-b2ca-e0b7-33a458524f35}">
           <p14:sldIdLst>
             <p14:sldId id="257"/>
           </p14:sldIdLst>
         </p14:section>
-        <p14:section name="Yechim" id="{1d2e0fcd-952f-bdd9-6df3-c7c66d22c03b}">
+        <p14:section name="Yechim" id="{c25d6612-9116-682b-c613-b90981055d3b}">
           <p14:sldIdLst>
             <p14:sldId id="258"/>
             <p14:sldId id="259"/>
           </p14:sldIdLst>
         </p14:section>
-        <p14:section name="Xavf modeli" id="{9c64bc2c-1e77-eab5-e0d0-2a78c0f0421b}">
+        <p14:section name="Xavf modeli" id="{b107507e-224e-b2d9-f040-658c366a0712}">
           <p14:sldIdLst>
             <p14:sldId id="260"/>
             <p14:sldId id="261"/>
             <p14:sldId id="262"/>
           </p14:sldIdLst>
         </p14:section>
-        <p14:section name="Keyingi bosqichlar" id="{fed1239f-e19c-0fb1-8668-50e8ad8bdac0}">
+        <p14:section name="Keyingi bosqichlar" id="{fd3c45fe-a058-7f71-470b-e7f3f8aa9845}">
           <p14:sldIdLst>
             <p14:sldId id="263"/>
             <p14:sldId id="264"/>
           </p14:sldIdLst>
         </p14:section>
-        <p14:section name="Dalillar" id="{795b3105-6e04-0660-4405-d673525a9043}">
+        <p14:section name="Dalillar" id="{b50a0cb1-c7c1-e50c-0c89-c7f7b4e25fdb}">
           <p14:sldIdLst>
             <p14:sldId id="265"/>
-          </p14:sldIdLst>
-        </p14:section>
-        <p14:section name="Maʼlumotlar" id="{5fa60f68-ce50-7a6d-abb1-3d73a6c70fe2}">
-          <p14:sldIdLst>
             <p14:sldId id="266"/>
           </p14:sldIdLst>
         </p14:section>
-        <p14:section name="Yakun" id="{849f218d-b336-8bfc-89f2-d6a27b6ed371}">
+        <p14:section name="Maʼlumotlar" id="{40afc81f-c137-b51c-9a68-7fa8b2886404}">
           <p14:sldIdLst>
             <p14:sldId id="267"/>
+          </p14:sldIdLst>
+        </p14:section>
+        <p14:section name="Yakun" id="{e2364801-0a78-2b2f-3ba0-3198e530d240}">
+          <p14:sldIdLst>
+            <p14:sldId id="268"/>
           </p14:sldIdLst>
         </p14:section>
       </p14:sectionLst>
@@ -169,6 +171,338 @@
     </p:ext>
   </p:extLst>
 </p:presentation>
+</file>
+
+<file path=ppt/charts/chart1.xml><?xml version="1.0" encoding="utf-8"?>
+<c:chartSpace xmlns:c="http://schemas.openxmlformats.org/drawingml/2006/chart" xmlns:a="http://schemas.openxmlformats.org/drawingml/2006/main" xmlns:r="http://schemas.openxmlformats.org/officeDocument/2006/relationships">
+  <c:date1904 val="0"/>
+  <c:roundedCorners val="1"/>
+  <c:chart>
+    <c:autoTitleDeleted val="1"/>
+    <c:plotArea>
+      <c:layout/>
+      <c:barChart>
+        <c:barDir val="col"/>
+        <c:grouping val="clustered"/>
+        <c:varyColors val="0"/>
+        <c:ser>
+          <c:idx val="0"/>
+          <c:order val="0"/>
+          <c:tx>
+            <c:strRef>
+              <c:f>Sheet1!$B$1</c:f>
+              <c:strCache>
+                <c:ptCount val="1"/>
+                <c:pt idx="0">
+                  <c:v>Ilgari tashxis qoʻyilgan</c:v>
+                </c:pt>
+              </c:strCache>
+            </c:strRef>
+          </c:tx>
+          <c:spPr>
+            <a:solidFill>
+              <a:srgbClr val="94A3B8"/>
+            </a:solidFill>
+            <a:effectLst/>
+          </c:spPr>
+          <c:invertIfNegative val="0"/>
+          <c:dLbls>
+            <c:numFmt formatCode="0.0" sourceLinked="0"/>
+            <c:txPr>
+              <a:bodyPr/>
+              <a:lstStyle/>
+              <a:p>
+                <a:pPr>
+                  <a:defRPr b="0" i="0" strike="noStrike" sz="1000" u="none">
+                    <a:solidFill>
+                      <a:srgbClr val="0F172A"/>
+                    </a:solidFill>
+                    <a:latin typeface="+mn-lt"/>
+                  </a:defRPr>
+                </a:pPr>
+              </a:p>
+            </c:txPr>
+            <c:showLegendKey val="0"/>
+            <c:showVal val="1"/>
+            <c:showCatName val="0"/>
+            <c:showSerName val="0"/>
+            <c:showPercent val="0"/>
+            <c:showBubbleSize val="0"/>
+            <c:showLeaderLines val="0"/>
+          </c:dLbls>
+          <c:cat>
+            <c:multiLvlStrRef>
+              <c:f>Sheet1!$A$2:$A$4</c:f>
+              <c:multiLvlStrCache>
+                <c:ptCount val="3"/>
+                <c:lvl>
+                  <c:pt idx="0">
+                    <c:v>Kiyev</c:v>
+                  </c:pt>
+                  <c:pt idx="1">
+                    <c:v>Olmaota</c:v>
+                  </c:pt>
+                  <c:pt idx="2">
+                    <c:v>Boku</c:v>
+                  </c:pt>
+                </c:lvl>
+              </c:multiLvlStrCache>
+            </c:multiLvlStrRef>
+          </c:cat>
+          <c:val>
+            <c:numRef>
+              <c:f>Sheet1!$B$2:$B$4</c:f>
+              <c:numCache>
+                <c:formatCode>General</c:formatCode>
+                <c:ptCount val="3"/>
+                <c:pt idx="0">
+                  <c:v>10.4</c:v>
+                </c:pt>
+                <c:pt idx="1">
+                  <c:v>13.8</c:v>
+                </c:pt>
+                <c:pt idx="2">
+                  <c:v>4.3</c:v>
+                </c:pt>
+              </c:numCache>
+            </c:numRef>
+          </c:val>
+        </c:ser>
+        <c:ser>
+          <c:idx val="1"/>
+          <c:order val="1"/>
+          <c:tx>
+            <c:strRef>
+              <c:f>Sheet1!$C$1</c:f>
+              <c:strCache>
+                <c:ptCount val="1"/>
+                <c:pt idx="0">
+                  <c:v>Spirometriya topgan</c:v>
+                </c:pt>
+              </c:strCache>
+            </c:strRef>
+          </c:tx>
+          <c:spPr>
+            <a:solidFill>
+              <a:srgbClr val="0B6E7F"/>
+            </a:solidFill>
+            <a:effectLst/>
+          </c:spPr>
+          <c:invertIfNegative val="0"/>
+          <c:dLbls>
+            <c:numFmt formatCode="0.0" sourceLinked="0"/>
+            <c:txPr>
+              <a:bodyPr/>
+              <a:lstStyle/>
+              <a:p>
+                <a:pPr>
+                  <a:defRPr b="0" i="0" strike="noStrike" sz="1000" u="none">
+                    <a:solidFill>
+                      <a:srgbClr val="0F172A"/>
+                    </a:solidFill>
+                    <a:latin typeface="+mn-lt"/>
+                  </a:defRPr>
+                </a:pPr>
+              </a:p>
+            </c:txPr>
+            <c:showLegendKey val="0"/>
+            <c:showVal val="1"/>
+            <c:showCatName val="0"/>
+            <c:showSerName val="0"/>
+            <c:showPercent val="0"/>
+            <c:showBubbleSize val="0"/>
+            <c:showLeaderLines val="0"/>
+          </c:dLbls>
+          <c:cat>
+            <c:multiLvlStrRef>
+              <c:f>Sheet1!$A$2:$A$4</c:f>
+              <c:multiLvlStrCache>
+                <c:ptCount val="3"/>
+                <c:lvl>
+                  <c:pt idx="0">
+                    <c:v>Kiyev</c:v>
+                  </c:pt>
+                  <c:pt idx="1">
+                    <c:v>Olmaota</c:v>
+                  </c:pt>
+                  <c:pt idx="2">
+                    <c:v>Boku</c:v>
+                  </c:pt>
+                </c:lvl>
+              </c:multiLvlStrCache>
+            </c:multiLvlStrRef>
+          </c:cat>
+          <c:val>
+            <c:numRef>
+              <c:f>Sheet1!$C$2:$C$4</c:f>
+              <c:numCache>
+                <c:formatCode>General</c:formatCode>
+                <c:ptCount val="3"/>
+                <c:pt idx="0">
+                  <c:v>31.9</c:v>
+                </c:pt>
+                <c:pt idx="1">
+                  <c:v>66.7</c:v>
+                </c:pt>
+                <c:pt idx="2">
+                  <c:v>37.5</c:v>
+                </c:pt>
+              </c:numCache>
+            </c:numRef>
+          </c:val>
+        </c:ser>
+        <c:dLbls>
+          <c:numFmt formatCode="0.0" sourceLinked="0"/>
+          <c:txPr>
+            <a:bodyPr/>
+            <a:lstStyle/>
+            <a:p>
+              <a:pPr>
+                <a:defRPr b="0" i="0" strike="noStrike" sz="1000" u="none">
+                  <a:solidFill>
+                    <a:srgbClr val="0F172A"/>
+                  </a:solidFill>
+                  <a:latin typeface="+mn-lt"/>
+                </a:defRPr>
+              </a:pPr>
+            </a:p>
+          </c:txPr>
+          <c:showLegendKey val="0"/>
+          <c:showVal val="1"/>
+          <c:showCatName val="0"/>
+          <c:showSerName val="0"/>
+          <c:showPercent val="0"/>
+          <c:showBubbleSize val="0"/>
+          <c:showLeaderLines val="0"/>
+        </c:dLbls>
+        <c:gapWidth val="65"/>
+        <c:overlap val="0"/>
+        <c:axId val="2094734554"/>
+        <c:axId val="2094734552"/>
+        <c:axId val="2094734556"/>
+      </c:barChart>
+      <c:catAx>
+        <c:axId val="2094734554"/>
+        <c:scaling>
+          <c:orientation val="minMax"/>
+        </c:scaling>
+        <c:delete val="0"/>
+        <c:axPos val="b"/>
+        <c:numFmt formatCode="General" sourceLinked="1"/>
+        <c:majorTickMark val="out"/>
+        <c:minorTickMark val="none"/>
+        <c:tickLblPos val="low"/>
+        <c:spPr>
+          <a:ln w="12700" cap="flat">
+            <a:noFill/>
+            <a:prstDash val="solid"/>
+            <a:round/>
+          </a:ln>
+        </c:spPr>
+        <c:txPr>
+          <a:bodyPr/>
+          <a:lstStyle/>
+          <a:p>
+            <a:pPr>
+              <a:defRPr sz="1100" b="0" i="0" u="none" strike="noStrike">
+                <a:solidFill>
+                  <a:srgbClr val="334155"/>
+                </a:solidFill>
+                <a:latin typeface="+mn-lt"/>
+              </a:defRPr>
+            </a:pPr>
+            <a:endParaRPr lang="en-US"/>
+          </a:p>
+        </c:txPr>
+        <c:crossAx val="2094734552"/>
+        <c:crosses val="autoZero"/>
+        <c:auto val="1"/>
+        <c:lblAlgn val="ctr"/>
+        <c:noMultiLvlLbl val="1"/>
+      </c:catAx>
+      <c:valAx>
+        <c:axId val="2094734552"/>
+        <c:scaling>
+          <c:orientation val="minMax"/>
+          <c:max val="80"/>
+          <c:min val="0"/>
+        </c:scaling>
+        <c:delete val="1"/>
+        <c:axPos val="l"/>
+        <c:numFmt formatCode="General" sourceLinked="0"/>
+        <c:majorTickMark val="out"/>
+        <c:minorTickMark val="none"/>
+        <c:tickLblPos val="nextTo"/>
+        <c:spPr>
+          <a:ln w="12700" cap="flat">
+            <a:solidFill>
+              <a:srgbClr val="888888"/>
+            </a:solidFill>
+            <a:prstDash val="solid"/>
+            <a:round/>
+          </a:ln>
+        </c:spPr>
+        <c:txPr>
+          <a:bodyPr/>
+          <a:lstStyle/>
+          <a:p>
+            <a:pPr>
+              <a:defRPr sz="1200" b="0" i="0" u="none" strike="noStrike">
+                <a:solidFill>
+                  <a:srgbClr val="000000"/>
+                </a:solidFill>
+                <a:latin typeface="Arial"/>
+              </a:defRPr>
+            </a:pPr>
+            <a:endParaRPr lang="en-US"/>
+          </a:p>
+        </c:txPr>
+        <c:crossAx val="2094734554"/>
+        <c:crosses val="autoZero"/>
+        <c:crossBetween val="between"/>
+      </c:valAx>
+      <c:spPr>
+        <a:noFill/>
+        <a:ln>
+          <a:noFill/>
+        </a:ln>
+        <a:effectLst/>
+      </c:spPr>
+    </c:plotArea>
+    <c:legend>
+      <c:legendPos val="r"/>
+      <c:overlay val="0"/>
+      <c:txPr>
+        <a:bodyPr/>
+        <a:lstStyle/>
+        <a:p>
+          <a:pPr>
+            <a:defRPr sz="1000">
+              <a:solidFill>
+                <a:srgbClr val="334155"/>
+              </a:solidFill>
+              <a:latin typeface="+mn-lt"/>
+              <a:cs typeface="+mn-lt"/>
+            </a:defRPr>
+          </a:pPr>
+          <a:endParaRPr lang="en-US"/>
+        </a:p>
+      </c:txPr>
+    </c:legend>
+    <c:plotVisOnly val="1"/>
+    <c:dispBlanksAs val="span"/>
+  </c:chart>
+  <c:spPr>
+    <a:noFill/>
+    <a:ln>
+      <a:noFill/>
+    </a:ln>
+    <a:effectLst/>
+  </c:spPr>
+  <c:externalData r:id="rId1">
+    <c:autoUpdate val="0"/>
+  </c:externalData>
+</c:chartSpace>
 </file>
 
 <file path=ppt/notesMasters/notesMaster1.xml><?xml version="1.0" encoding="utf-8"?>
@@ -566,7 +900,7 @@
           <a:p>
             <a:r>
               <a:rPr lang="en-US" dirty="0"/>
-              <a:t>Assalomu alaykum. NafasNazorat — oilaviy shifokor va hamshira uchun raqamli yordamchi: oʻpkaning surunkali obstruktiv kasalligi — OSOKni spirometr boʻlmasa ham erta aniqlash, bemorni kerakli joyga yoʻllash va spirometriya natijasini toʻgʻri talqin qilish. Prototip hozir jonli: nafas.plagiatx.uz. 10 daqiqada muammo, yechim, xavf modeli, keyingi ikki bosqich va dalillarni koʻrsataman.</a:t>
+              <a:t>[0:00–0:20 · 20 soniya] Assalomu alaykum. NafasNazorat — oilaviy shifokor va hamshira uchun raqamli yordamchi: oʻpkaning surunkali obstruktiv kasalligi — OSOKni spirometr boʻlmasa ham erta aniqlash, bemorni kerakli joyga yoʻllash va spirometriya natijasini toʻgʻri talqin qilish. Prototip hozir jonli: nafas.plagiatx.uz. 10 daqiqada muammo, yechim, xavf modeli, keyingi ikki bosqich va dalillarni koʻrsataman.</a:t>
             </a:r>
             <a:endParaRPr lang="en-US" dirty="0"/>
           </a:p>
@@ -654,7 +988,7 @@
           <a:p>
             <a:r>
               <a:rPr lang="en-US" dirty="0"/>
-              <a:t>Har bir bosqich jahon tadqiqotlariga tayanadi. Birinchi bosqich uchun: Buyuk Britaniyadagi TargetCOPD — 75 mingga yaqin bemorda faol izlash yangi tashxislarni 4 barobar oshirgan. CORE — Kiyev, Olmaota va Bokuda spirometriya 3–7 foiz OSOKni topgan, deyarli hammasi ilk bor. Ikkinchi bosqich uchun: Air Next Bluetooth spirometri stol spirometri bilan 0,94 dan yuqori moslik; RADICALS — oddiy qoʻl qurilmasi umumiy amaliyotda yarmidan koʻpini topadi, lekin tasdiq uchun toʻliq spirometriya kerak — biz aynan shuni qilamiz. Uchinchi bosqich uchun: SpiroSmart va SpiroSonic — telefon mikrofoni 3–10 foiz xato bilan. GOLD 2025 ham simptomi va xavf omili bor odamlarni faol izlashni tavsiya qiladi.</a:t>
+              <a:t>[6:40–7:30 · 50 soniya] Har bir bosqich jahon tadqiqotlariga tayanadi. Birinchi bosqich: Buyuk Britaniyadagi TargetCOPD — 75 mingga yaqin bemorda faol izlash yangi tashxislarni 4 barobar oshirgan; GOLD 2025 ham simptomi va xavf omili bor odamlarni faol izlashni tavsiya qiladi. Ikkinchi bosqich: meta-tahlil koʻrsatadiki, faqat savolnomaning aniqligi 65 foiz atrofida, qoʻl spirometri qoʻshilsa sezgirlik 80, oʻziga xoslik 84 foizga chiqadi — shuning uchun bizda savolnoma saralaydi, qurilma tasdiqlaydi. Air Next Bluetooth spirometri stol spirometri bilan 0,94 dan yuqori moslik koʻrsatgan. Uchinchi bosqich: SpiroSmart va SpiroSonic — telefon mikrofoni 3–10 foiz xato bilan oʻlchaydi. Xulosa: savolnoma saralaydi, qurilma tasdiqlaydi, shifokor qaror qiladi.</a:t>
             </a:r>
             <a:endParaRPr lang="en-US" dirty="0"/>
           </a:p>
@@ -742,7 +1076,7 @@
           <a:p>
             <a:r>
               <a:rPr lang="en-US" dirty="0"/>
-              <a:t>Maʼlumotlar bazasi oltita jadvaldan iborat. Shaxsiy maʼlumot — ism, tugʻilgan sana, telefon — faqat bitta jadvalda, bemorlar jadvalida. Baholashlar, spirometriya va yoʻllanmalar bemorga psevdonim ID orqali bogʻlanadi, har natija model versiyasi bilan saqlanadi — model yangilansa ham eski natija oʻzgarmaydi. Audit jurnali kim, qachon, qaysi maydonni oʻzgartirganini yozadi, lekin qiymatni emas. Parollar scrypt bilan xeshlanadi. Har kuni soat 02:30 da zaxira nusxa olinadi, oxirgi 14 tasi saqlanadi. Tadqiqot eksporti faqat rozilik bergan bemorlar boʻyicha va anonim. Pilotdan oldin server Oʻzbekistonga koʻchiriladi — Shaxsga doir maʼlumotlar toʻgʻrisidagi qonunning 27¹-moddasi shuni talab qiladi; tizim Docker konteynerida, koʻchirish oson.</a:t>
+              <a:t>[7:30–8:15 · 45 soniya] Model xalqaro tavsiyalarga asoslangan, lekin ogʻirliklari hozircha vaqtinchalik — ularni oʻzbek aholisida tasdiqlaymiz. Dizayn oddiy: birlamchi boʻgʻinga kelgan 40 yoshdan katta bemorlar rozilik bilan savolnomadan oʻtadi. Oʻrta va yuqori xavflilarning hammasi, past xavflilardan esa tasodifiy tanlov spirometriyadan oʻtadi — shunda faqat yuqori xavflilarni tekshirishdan kelib chiqadigan xato boʻlmaydi. Sezgirlik, oʻziga xoslik va AUC ni hisoblaymiz, ogʻirliklarni kalibrlaymiz va yangi versiya chiqaramiz. Tizim har baholashni javoblar va model versiyasi bilan saqlagani uchun yangi modelni oʻsha bemorlarda darhol solishtirish mumkin.</a:t>
             </a:r>
             <a:endParaRPr lang="en-US" dirty="0"/>
           </a:p>
@@ -830,7 +1164,7 @@
           <a:p>
             <a:r>
               <a:rPr lang="en-US" dirty="0"/>
-              <a:t>Xulosa: birinchi bosqich toʻliq ishlaydi — 19 ballik xavf modeli va uning ochiq izohi, spirometriya talqini, bemorlar paneli, rollar, audit va anonim eksport; 82 ta avtomatik test, HTTPS va kunlik zaxira. Demoni hozir parolsiz koʻrish mumkin. Bizga uchta narsa kerak: pilot punktlar — oilaviy poliklinika va QVPlar; pulmonolog — model ogʻirliklarini va CAT tarjimasini klinik tasdiqlash uchun; va grant — portativ spirometrlar va validatsiya tadqiqoti uchun. Eʼtiboringiz uchun rahmat, savollarga tayyorman.</a:t>
+              <a:t>[8:15–9:05 · 50 soniya] Maʼlumotlar bazasi oltita jadvaldan iborat. Shaxsiy maʼlumot — ism, tugʻilgan sana, telefon — faqat bitta jadvalda, bemorlar jadvalida. Baholashlar, spirometriya va yoʻllanmalar bemorga psevdonim ID orqali bogʻlanadi, har natija model versiyasi bilan saqlanadi — model yangilansa ham eski natija oʻzgarmaydi. Audit jurnali kim, qachon, qaysi maydonni oʻzgartirganini yozadi, lekin qiymatni emas. Parollar scrypt bilan xeshlanadi. Har kuni soat 02:30 da zaxira nusxa olinadi, oxirgi 14 tasi saqlanadi. Tadqiqot eksporti faqat rozilik bergan bemorlar boʻyicha va anonim. Pilotdan oldin server Oʻzbekistonga koʻchiriladi — Shaxsga doir maʼlumotlar toʻgʻrisidagi qonunning 27¹-moddasi shuni talab qiladi; tizim Docker konteynerida, koʻchirish oson.</a:t>
             </a:r>
             <a:endParaRPr lang="en-US" dirty="0"/>
           </a:p>
@@ -854,6 +1188,94 @@
             <a:fld id="{F7021451-1387-4CA6-816F-3879F97B5CBC}" type="slidenum">
               <a:rPr lang="en-US"/>
               <a:t>12</a:t>
+            </a:fld>
+            <a:endParaRPr lang="en-US"/>
+          </a:p>
+        </p:txBody>
+      </p:sp>
+    </p:spTree>
+    <p:extLst>
+      <p:ext uri="{BB962C8B-B14F-4D97-AF65-F5344CB8AC3E}">
+        <p14:creationId xmlns:p14="http://schemas.microsoft.com/office/powerpoint/2010/main" val="1024086991"/>
+      </p:ext>
+    </p:extLst>
+  </p:cSld>
+  <p:clrMapOvr>
+    <a:masterClrMapping/>
+  </p:clrMapOvr>
+</p:notes>
+</file>
+
+<file path=ppt/notesSlides/notesSlide13.xml><?xml version="1.0" encoding="utf-8"?>
+<p:notes xmlns:a="http://schemas.openxmlformats.org/drawingml/2006/main" xmlns:r="http://schemas.openxmlformats.org/officeDocument/2006/relationships" xmlns:p="http://schemas.openxmlformats.org/presentationml/2006/main">
+  <p:cSld>
+    <p:spTree>
+      <p:nvGrpSpPr>
+        <p:cNvPr id="1" name=""/>
+        <p:cNvGrpSpPr/>
+        <p:nvPr/>
+      </p:nvGrpSpPr>
+      <p:grpSpPr>
+        <a:xfrm>
+          <a:off x="0" y="0"/>
+          <a:ext cx="0" cy="0"/>
+          <a:chOff x="0" y="0"/>
+          <a:chExt cx="0" cy="0"/>
+        </a:xfrm>
+      </p:grpSpPr>
+      <p:sp>
+        <p:nvSpPr>
+          <p:cNvPr id="2" name="Slide Image Placeholder 1"/>
+          <p:cNvSpPr>
+            <a:spLocks noGrp="1" noRot="1" noChangeAspect="1"/>
+          </p:cNvSpPr>
+          <p:nvPr>
+            <p:ph type="sldImg"/>
+          </p:nvPr>
+        </p:nvSpPr>
+        <p:spPr/>
+      </p:sp>
+      <p:sp>
+        <p:nvSpPr>
+          <p:cNvPr id="3" name="Notes Placeholder 2"/>
+          <p:cNvSpPr>
+            <a:spLocks noGrp="1"/>
+          </p:cNvSpPr>
+          <p:nvPr>
+            <p:ph type="body" idx="1"/>
+          </p:nvPr>
+        </p:nvSpPr>
+        <p:spPr/>
+        <p:txBody>
+          <a:bodyPr/>
+          <a:lstStyle/>
+          <a:p>
+            <a:r>
+              <a:rPr lang="en-US" dirty="0"/>
+              <a:t>[9:05–9:45 · 40 soniya] Xulosa: birinchi bosqich toʻliq ishlaydi — 19 ballik xavf modeli va uning ochiq izohi, spirometriya talqini, bemorlar paneli, rollar, audit va anonim eksport; 82 ta avtomatik test, HTTPS va kunlik zaxira. Demoni hozir parolsiz koʻrish mumkin. Bizga uchta narsa kerak: pilot punktlar — oilaviy poliklinika va QVPlar; pulmonolog — model ogʻirliklarini va CAT tarjimasini klinik tasdiqlash uchun; va grant — portativ spirometrlar va validatsiya tadqiqoti uchun. Eʼtiboringiz uchun rahmat, savollarga tayyorman.</a:t>
+            </a:r>
+            <a:endParaRPr lang="en-US" dirty="0"/>
+          </a:p>
+        </p:txBody>
+      </p:sp>
+      <p:sp>
+        <p:nvSpPr>
+          <p:cNvPr id="4" name="Slide Number Placeholder 3"/>
+          <p:cNvSpPr>
+            <a:spLocks noGrp="1"/>
+          </p:cNvSpPr>
+          <p:nvPr>
+            <p:ph type="sldNum" sz="quarter" idx="10"/>
+          </p:nvPr>
+        </p:nvSpPr>
+        <p:spPr/>
+        <p:txBody>
+          <a:bodyPr/>
+          <a:lstStyle/>
+          <a:p>
+            <a:fld id="{F7021451-1387-4CA6-816F-3879F97B5CBC}" type="slidenum">
+              <a:rPr lang="en-US"/>
+              <a:t>13</a:t>
             </a:fld>
             <a:endParaRPr lang="en-US"/>
           </a:p>
@@ -918,7 +1340,7 @@
           <a:p>
             <a:r>
               <a:rPr lang="en-US" dirty="0"/>
-              <a:t>OSOK bugun dunyoda oʻlim sabablari orasida 3-oʻrinda: JSST maʼlumotiga koʻra 2023-yilda 3,4 million kishi vafot etgan. Dunyoda 30–79 yoshdagi qariyb 392 million kishida OSOK bor, ularning 80 foizi kam va oʻrta daromadli davlatlarda. Eng muhimi — holatlarning 50 dan 98 foizigacha tashxissiz qoladi. Birlamchi boʻgʻinda toʻrtta toʻsiq bor: spirometr kam, oʻlchashga tayyorlangan kadr kam, xavf omillari keng — tamaki, tandir tutuni, paxta va qurilish changi — va talqin murakkab. Oʻzbekistonda aholi miqyosidagi spirometrik tadqiqot topilmadi; qoʻshni MDH davlatlarida CORE tadqiqoti 3–7 foizni koʻrsatgan va deyarli barcha bemorlar birinchi marta aniqlangan.</a:t>
+              <a:t>[0:20–1:20 · 60 soniya] OSOK dunyoda oʻlim sabablari orasida 3-oʻrinda: 2023-yilda 3,4 million kishi vafot etgan. 392 million kishida bor, 80 foizi biz kabi kam va oʻrta daromadli davlatlarda. Eng xavflisi — u yashirin: holatlarning yarmidan 98 foizigacha tashxissiz. Grafikka qarang: qoʻshni Kiyev, Olmaota va Bokuda spirometriya ilgari tashxis qoʻyilganidan 3–9 barobar koʻp OSOK topgan — deyarli barchasi ilk bor. Sabab — birlamchi boʻgʻindagi toʻrtta toʻsiq: spirometr kam, kadr tayyor emas, xavf omillari keng — tamaki, tandir tutuni, paxta va qurilish changi — va talqin murakkab. Oʻzbekistonda bunday aholi tadqiqoti hali yoʻq — pilotimiz birinchi mahalliy maʼlumotni beradi.</a:t>
             </a:r>
             <a:endParaRPr lang="en-US" dirty="0"/>
           </a:p>
@@ -1006,7 +1428,7 @@
           <a:p>
             <a:r>
               <a:rPr lang="en-US" dirty="0"/>
-              <a:t>Yechim uch bosqichli. Birinchi bosqich hozir ishlaydi: qurilmasiz — savolnoma, 19 ballik xavf modeli va spirometriya talqini. Ikkinchi bosqichda bitta arzon portativ spirometr butun punktga xizmat qiladi: oʻlchov Bluetooth orqali toʻgʻridan-toʻgʻri bemor kartasiga tushadi. Uchinchi bosqich — bemorning oʻz telefoni: oʻzini baholash, eslatmalar va mikrofon orqali nafas testi; bu ilmiy tadqiqot sifatida. Hammasi bitta xavf modeli, bitta bemor kartasi va bitta maʼlumotlar bazasiga tayanadi.</a:t>
+              <a:t>[1:20–2:05 · 45 soniya] Yechim uch bosqichli. Birinchi bosqich hozir ishlaydi: qurilmasiz — savolnoma, 19 ballik xavf modeli va spirometriya talqini. Ikkinchi bosqichda bitta arzon portativ spirometr butun punktga xizmat qiladi: oʻlchov Bluetooth orqali toʻgʻridan-toʻgʻri bemor kartasiga tushadi. Uchinchi bosqich — bemorning oʻz telefoni: oʻzini baholash, eslatmalar va mikrofon orqali nafas testi; bu ilmiy tadqiqot sifatida. Hammasi bitta xavf modeli, bitta bemor kartasi va bitta maʼlumotlar bazasiga tayanadi.</a:t>
             </a:r>
             <a:endParaRPr lang="en-US" dirty="0"/>
           </a:p>
@@ -1094,7 +1516,7 @@
           <a:p>
             <a:r>
               <a:rPr lang="en-US" dirty="0"/>
-              <a:t>Shifokor yoki hamshira planshet yoki telefonda besh qadamni bosib oʻtadi: bemor maʼlumoti va rozilik, xavf omillari, simptomlar, standart mMRC va CAT shkalalari. Natijada xavf darajasi, uning sababi, tavsiya va keyingi koʻrik sanasi chiqadi. Bemorlar panelida kim yuqori xavfda, kimning koʻrik muddati oʻtgan va kim yoʻllanma kutayotgani darhol koʻrinadi.</a:t>
+              <a:t>[2:05–2:45 · 40 soniya] Shifokor yoki hamshira planshet yoki telefonda besh qadamni bosib oʻtadi: bemor maʼlumoti va rozilik, xavf omillari, simptomlar, standart mMRC va CAT shkalalari. Natijada xavf darajasi, uning sababi, tavsiya va keyingi koʻrik sanasi chiqadi. Bemorlar panelida kim yuqori xavfda, kimning koʻrik muddati oʻtgan va kim yoʻllanma kutayotgani darhol koʻrinadi.</a:t>
             </a:r>
             <a:endParaRPr lang="en-US" dirty="0"/>
           </a:p>
@@ -1182,7 +1604,7 @@
           <a:p>
             <a:r>
               <a:rPr lang="en-US" dirty="0"/>
-              <a:t>Model 7 guruhdagi 9 omildan iborat. Yosh — 3 ballgacha, chekish quti-yilda — 4 ballgacha, tandir yoki oʻchoq tutuni yillari — 2, kasbiy chang yillari — 2, uchta simptom — har biri 1 ball, mMRC — 3 va CAT — 2 ballgacha. Jami 19 ball. 0–4 ball — past: yoʻllanma shart emas, 12 oydan keyin qayta koʻrik. 5–8 — oʻrta: spirometriyaga yoʻllanadi. 9 va undan yuqori — ustuvor spirometriya va pulmonolog. Lekin ball past chiqsa ham ikkita xavfsizlik qoidasi ishlaydi: 40 yoshdan oshgan, xavf omili 10 yildan koʻp va simptomi bor bemor — GOLD boʻyicha yuqori darajaga koʻtariladi; kuchli taʼsir — 20 quti-yil yoki 20 yil — kamida oʻrta daraja. Ogʻirliklar hozircha vaqtinchalik, mahalliy maʼlumotda tasdiqlanadi.</a:t>
+              <a:t>[2:45–3:45 · 60 soniya] Model 7 guruhdagi 9 omildan iborat. Yosh — 3 ballgacha, chekish quti-yilda — 4 ballgacha, tandir yoki oʻchoq tutuni yillari — 2, kasbiy chang yillari — 2, uchta simptom — har biri 1 ball, mMRC — 3 va CAT — 2 ballgacha. Jami 19 ball. 0–4 ball — past: yoʻllanma shart emas, 12 oydan keyin qayta koʻrik. 5–8 — oʻrta: spirometriyaga yoʻllanadi. 9 va undan yuqori — ustuvor spirometriya va pulmonolog. Lekin ball past chiqsa ham ikkita xavfsizlik qoidasi ishlaydi: 40 yoshdan oshgan, xavf omili 10 yildan koʻp va simptomi bor bemor — GOLD boʻyicha yuqori darajaga koʻtariladi; kuchli taʼsir — 20 quti-yil yoki 20 yil — kamida oʻrta daraja. Ogʻirliklar hozircha vaqtinchalik, mahalliy maʼlumotda tasdiqlanadi.</a:t>
             </a:r>
             <a:endParaRPr lang="en-US" dirty="0"/>
           </a:p>
@@ -1270,7 +1692,7 @@
           <a:p>
             <a:r>
               <a:rPr lang="en-US" dirty="0"/>
-              <a:t>Kiritish oddiy: yosh, kuniga necha dona sigaret va necha yil, tandir yoki oʻchoq tutuni yillari, kasbiy chang yillari, uchta simptom, mMRC va CAT. Tizim quti-yilni oʻzi hisoblaydi: kuniga dona koʻpaytirish yil, boʻlinadi 20 ga. Har omil oʻz bandiga tushadi, ballar qoʻshiladi, keyin ikki qoida tekshiriladi. Maʼlumot yoʻq boʻlsa — 0 ball, lekin bu yashirilmaydi. Natijada shifokor 9 omilning har birining hissasini, qoʻllangan qoidani va model versiyasini koʻradi. Rasmdagi bemor: 56 yosh, kasbiy chang 22 yil, surunkali yoʻtal — ball 7, yaʼni oʻrta, lekin qoida boʻyicha yuqori ehtimollik. Toʻliq jadval saytda: metodika sahifasida.</a:t>
+              <a:t>[3:45–4:35 · 50 soniya] Kiritish oddiy: yosh, kuniga necha dona sigaret va necha yil, tandir yoki oʻchoq tutuni yillari, kasbiy chang yillari, uchta simptom, mMRC va CAT. Tizim quti-yilni oʻzi hisoblaydi: kuniga dona koʻpaytirish yil, boʻlinadi 20 ga. Har omil oʻz bandiga tushadi, ballar qoʻshiladi, keyin ikki qoida tekshiriladi. Maʼlumot yoʻq boʻlsa — 0 ball, lekin bu yashirilmaydi. Natijada shifokor 9 omilning har birining hissasini, qoʻllangan qoidani va model versiyasini koʻradi. Rasmdagi bemor: 56 yosh, kasbiy chang 22 yil, surunkali yoʻtal — ball 7, yaʼni oʻrta, lekin qoida boʻyicha yuqori ehtimollik. Toʻliq jadval saytda: metodika sahifasida.</a:t>
             </a:r>
             <a:endParaRPr lang="en-US" dirty="0"/>
           </a:p>
@@ -1358,7 +1780,7 @@
           <a:p>
             <a:r>
               <a:rPr lang="en-US" dirty="0"/>
-              <a:t>Spirometriya qilingan boʻlsa, natija qoʻlda kiritiladi va tizim uni xalqaro standart boʻyicha talqin qiladi: FEV1/FVC 0,70 mezoni va GLI-2012 tenglamalari asosidagi normaning pastki chegarasi — LLN, GOLD darajasi, foiz va z-skor. Maʼlumot yetishmasa taxmin qilmaydi, ogohlantiradi. Har natijada eslatma bor: bu xulosa emas, qarorni shifokor qabul qiladi. Misolda: 62 yosh, 172 sm erkak — FEV1/FVC 0,54, obstruksiya, GOLD 2.</a:t>
+              <a:t>[4:35–5:10 · 35 soniya] Spirometriya qilingan boʻlsa, natija qoʻlda kiritiladi va tizim uni xalqaro standart boʻyicha talqin qiladi: FEV1/FVC 0,70 mezoni va GLI-2012 tenglamalari asosidagi normaning pastki chegarasi — LLN, GOLD darajasi, foiz va z-skor. Maʼlumot yetishmasa taxmin qilmaydi, ogohlantiradi. Har natijada eslatma bor: bu xulosa emas, qarorni shifokor qabul qiladi. Misolda: 62 yosh, 172 sm erkak — FEV1/FVC 0,54, obstruksiya, GOLD 2.</a:t>
             </a:r>
             <a:endParaRPr lang="en-US" dirty="0"/>
           </a:p>
@@ -1446,7 +1868,7 @@
           <a:p>
             <a:r>
               <a:rPr lang="en-US" dirty="0"/>
-              <a:t>Ikkinchi bosqich — portativ spirometr. Bemor qurilmaga puflaydi, FEV1, FVC va oqim–hajm egri chizigʻi Bluetooth yoki USB orqali toʻgʻridan-toʻgʻri NafasNazoratga tushadi. Qoʻlda kiritish xatosi yoʻqoladi, tizim urinishlar sifatini tekshiradi, talqin qiladi va bitta tugma bilan bemor kartasiga saqlaydi. Bitta qurilma butun punktga yetadi, chunki savolnoma kimga spirometriya kerakligini oldindan saralaydi. Dalil: Air Next Bluetooth spirometri 200 bemor va 50 sogʻlom kishida stol spirometri bilan 0,94 dan yuqori moslik koʻrsatgan. Ekrandagi interfeys — konsept dizayn, qiymatlar demo bemordan.</a:t>
+              <a:t>[5:10–5:55 · 45 soniya] Ikkinchi bosqich — portativ spirometr. Bemor qurilmaga puflaydi, FEV1, FVC va oqim–hajm egri chizigʻi Bluetooth yoki USB orqali toʻgʻridan-toʻgʻri NafasNazoratga tushadi. Qoʻlda kiritish xatosi yoʻqoladi, tizim urinishlar sifatini tekshiradi, talqin qiladi va bitta tugma bilan bemor kartasiga saqlaydi. Bitta qurilma butun punktga yetadi, chunki savolnoma kimga spirometriya kerakligini oldindan saralaydi. Dalil: Air Next Bluetooth spirometri 200 bemor va 50 sogʻlom kishida stol spirometri bilan 0,94 dan yuqori moslik koʻrsatgan. Ekrandagi interfeys — konsept dizayn, qiymatlar demo bemordan.</a:t>
             </a:r>
             <a:endParaRPr lang="en-US" dirty="0"/>
           </a:p>
@@ -1534,7 +1956,7 @@
           <a:p>
             <a:r>
               <a:rPr lang="en-US" dirty="0"/>
-              <a:t>Uchinchi bosqich — bemor uchun telefon ilovasi. Birinchidan, bemor CAT va mMRC savollariga oʻzi javob beradi, savollarni oʻzbek tilida ovozli tinglash mumkin. Ikkinchidan, ilmiy tadqiqot rejimida mikrofon orqali nafas testi: telefonga kuchli puflash ovozidan oʻpka funksiyasi baholanadi. Uchinchidan, natija va eslatma: spirometriya vaqti keldi, natija shifokorga yuboriladi. Ilmiy asos: SpiroSmart tadqiqotida oʻrtacha xato 5 foiz atrofida, SpiroSonic — sogʻlomlarda 3 foizdan kam, bemor bolalarda 5–10 foiz. Shuning uchun bu tashxis emas, skrining va kuzatuv vositasi; mahalliy aholida spirometr bilan juft oʻlchab tasdiqlaymiz.</a:t>
+              <a:t>[5:55–6:40 · 45 soniya] Uchinchi bosqich — bemor uchun telefon ilovasi. Birinchidan, bemor CAT va mMRC savollariga oʻzi javob beradi, savollarni oʻzbek tilida ovozli tinglash mumkin. Ikkinchidan, ilmiy tadqiqot rejimida mikrofon orqali nafas testi: telefonga kuchli puflash ovozidan oʻpka funksiyasi baholanadi. Uchinchidan, natija va eslatma: spirometriya vaqti keldi, natija shifokorga yuboriladi. Ilmiy asos: SpiroSmart tadqiqotida oʻrtacha xato 5 foiz atrofida, SpiroSonic — sogʻlomlarda 3 foizdan kam, bemor bolalarda 5–10 foiz. Shuning uchun bu tashxis emas, skrining va kuzatuv vositasi; mahalliy aholida spirometr bilan juft oʻlchab tasdiqlaymiz.</a:t>
             </a:r>
             <a:endParaRPr lang="en-US" dirty="0"/>
           </a:p>
@@ -2479,31 +2901,9 @@
           <a:chExt cx="0" cy="0"/>
         </a:xfrm>
       </p:grpSpPr>
-      <p:sp>
-        <p:nvSpPr>
-          <p:cNvPr id="2" name="logo"/>
-          <p:cNvSpPr/>
-          <p:nvPr/>
-        </p:nvSpPr>
-        <p:spPr>
-          <a:xfrm>
-            <a:off x="548640" y="685800"/>
-            <a:ext cx="566928" cy="566928"/>
-          </a:xfrm>
-          <a:prstGeom prst="roundRect">
-            <a:avLst>
-              <a:gd name="adj" fmla="val 24000"/>
-            </a:avLst>
-          </a:prstGeom>
-          <a:solidFill>
-            <a:schemeClr val="accent1"/>
-          </a:solidFill>
-          <a:ln/>
-        </p:spPr>
-      </p:sp>
       <p:pic>
         <p:nvPicPr>
-          <p:cNvPr id="3" name="Image 0" descr="preencoded.png">    </p:cNvPr>
+          <p:cNvPr id="2" name="Image 0" descr="preencoded.png">    </p:cNvPr>
           <p:cNvPicPr>
             <a:picLocks noChangeAspect="1"/>
           </p:cNvPicPr>
@@ -2517,6 +2917,52 @@
         </p:blipFill>
         <p:spPr>
           <a:xfrm>
+            <a:off x="0" y="4480560"/>
+            <a:ext cx="12191695" cy="2377440"/>
+          </a:xfrm>
+          <a:prstGeom prst="rect">
+            <a:avLst/>
+          </a:prstGeom>
+        </p:spPr>
+      </p:pic>
+      <p:sp>
+        <p:nvSpPr>
+          <p:cNvPr id="3" name="logo"/>
+          <p:cNvSpPr/>
+          <p:nvPr/>
+        </p:nvSpPr>
+        <p:spPr>
+          <a:xfrm>
+            <a:off x="548640" y="685800"/>
+            <a:ext cx="566928" cy="566928"/>
+          </a:xfrm>
+          <a:prstGeom prst="roundRect">
+            <a:avLst>
+              <a:gd name="adj" fmla="val 24000"/>
+            </a:avLst>
+          </a:prstGeom>
+          <a:solidFill>
+            <a:schemeClr val="accent1"/>
+          </a:solidFill>
+          <a:ln/>
+        </p:spPr>
+      </p:sp>
+      <p:pic>
+        <p:nvPicPr>
+          <p:cNvPr id="4" name="Image 1" descr="preencoded.png">    </p:cNvPr>
+          <p:cNvPicPr>
+            <a:picLocks noChangeAspect="1"/>
+          </p:cNvPicPr>
+          <p:nvPr/>
+        </p:nvPicPr>
+        <p:blipFill>
+          <a:blip r:embed="rId2"/>
+          <a:stretch>
+            <a:fillRect/>
+          </a:stretch>
+        </p:blipFill>
+        <p:spPr>
+          <a:xfrm>
             <a:off x="684703" y="821863"/>
             <a:ext cx="294803" cy="294803"/>
           </a:xfrm>
@@ -2527,7 +2973,7 @@
       </p:pic>
       <p:sp>
         <p:nvSpPr>
-          <p:cNvPr id="4" name="Text 0"/>
+          <p:cNvPr id="5" name="Text 0"/>
           <p:cNvSpPr/>
           <p:nvPr>
             <p:ph idx="100" type="body" hasCustomPrompt="1"/>
@@ -2565,7 +3011,7 @@
       </p:sp>
       <p:sp>
         <p:nvSpPr>
-          <p:cNvPr id="5" name="Text 0"/>
+          <p:cNvPr id="6" name="Text 0"/>
           <p:cNvSpPr/>
           <p:nvPr>
             <p:ph idx="101" type="title" hasCustomPrompt="1"/>
@@ -2603,7 +3049,7 @@
       </p:sp>
       <p:sp>
         <p:nvSpPr>
-          <p:cNvPr id="6" name="Text 0"/>
+          <p:cNvPr id="7" name="Text 0"/>
           <p:cNvSpPr/>
           <p:nvPr>
             <p:ph idx="102" type="body" hasCustomPrompt="1"/>
@@ -2641,7 +3087,7 @@
       </p:sp>
       <p:sp>
         <p:nvSpPr>
-          <p:cNvPr id="7" name="Shape 4"/>
+          <p:cNvPr id="8" name="Shape 4"/>
           <p:cNvSpPr/>
           <p:nvPr/>
         </p:nvSpPr>
@@ -2672,7 +3118,7 @@
       </p:sp>
       <p:sp>
         <p:nvSpPr>
-          <p:cNvPr id="8" name="Text 5"/>
+          <p:cNvPr id="9" name="Text 5"/>
           <p:cNvSpPr txBox="1"/>
           <p:nvPr/>
         </p:nvSpPr>
@@ -2708,7 +3154,7 @@
       </p:sp>
       <p:sp>
         <p:nvSpPr>
-          <p:cNvPr id="9" name="Shape 6"/>
+          <p:cNvPr id="10" name="Shape 6"/>
           <p:cNvSpPr/>
           <p:nvPr/>
         </p:nvSpPr>
@@ -2739,7 +3185,7 @@
       </p:sp>
       <p:sp>
         <p:nvSpPr>
-          <p:cNvPr id="10" name="Text 7"/>
+          <p:cNvPr id="11" name="Text 7"/>
           <p:cNvSpPr txBox="1"/>
           <p:nvPr/>
         </p:nvSpPr>
@@ -2775,7 +3221,7 @@
       </p:sp>
       <p:sp>
         <p:nvSpPr>
-          <p:cNvPr id="11" name="Shape 8"/>
+          <p:cNvPr id="12" name="Shape 8"/>
           <p:cNvSpPr/>
           <p:nvPr/>
         </p:nvSpPr>
@@ -2806,7 +3252,7 @@
       </p:sp>
       <p:sp>
         <p:nvSpPr>
-          <p:cNvPr id="12" name="Text 9"/>
+          <p:cNvPr id="13" name="Text 9"/>
           <p:cNvSpPr txBox="1"/>
           <p:nvPr/>
         </p:nvSpPr>
@@ -2842,7 +3288,7 @@
       </p:sp>
       <p:sp>
         <p:nvSpPr>
-          <p:cNvPr id="13" name="Text 10"/>
+          <p:cNvPr id="14" name="Text 10"/>
           <p:cNvSpPr txBox="1"/>
           <p:nvPr/>
         </p:nvSpPr>
@@ -2878,7 +3324,7 @@
       </p:sp>
       <p:sp>
         <p:nvSpPr>
-          <p:cNvPr id="14" name="Text 11"/>
+          <p:cNvPr id="15" name="Text 11"/>
           <p:cNvSpPr txBox="1"/>
           <p:nvPr/>
         </p:nvSpPr>
@@ -2914,14 +3360,14 @@
       </p:sp>
       <p:pic>
         <p:nvPicPr>
-          <p:cNvPr id="15" name="Image 1" descr="NafasNazorat bosh sahifasi">    </p:cNvPr>
+          <p:cNvPr id="16" name="Image 2" descr="NafasNazorat bosh sahifasi">    </p:cNvPr>
           <p:cNvPicPr>
             <a:picLocks noChangeAspect="1"/>
           </p:cNvPicPr>
           <p:nvPr/>
         </p:nvPicPr>
         <p:blipFill>
-          <a:blip r:embed="rId2"/>
+          <a:blip r:embed="rId3"/>
           <a:stretch>
             <a:fillRect/>
           </a:stretch>
@@ -2941,6 +3387,9 @@
   <p:clrMapOvr>
     <a:masterClrMapping/>
   </p:clrMapOvr>
+  <p:transition spd="med">
+    <p:fade/>
+  </p:transition>
 </p:sld>
 </file>
 
@@ -3327,7 +3776,7 @@
                   <a:schemeClr val="accent1"/>
                 </a:solidFill>
               </a:rPr>
-              <a:t>3,2–6,7%</a:t>
+              <a:t>GOLD 2025</a:t>
             </a:r>
             <a:endParaRPr lang="en-US" sz="3000" dirty="0"/>
           </a:p>
@@ -3363,7 +3812,7 @@
                   <a:schemeClr val="tx1"/>
                 </a:solidFill>
               </a:rPr>
-              <a:t>Spirometriya bilan OSOK (Kiyev, Olmaota, Boku) — deyarli hammasi ilk bor aniqlangan</a:t>
+              <a:t>Simptomi va xavf omili bor odamlarda faol izlash va spirometriya tavsiya etiladi</a:t>
             </a:r>
             <a:endParaRPr lang="en-US" sz="1150" dirty="0"/>
           </a:p>
@@ -3399,7 +3848,7 @@
                   <a:schemeClr val="accent6"/>
                 </a:solidFill>
               </a:rPr>
-              <a:t>CORE · BMC Pulm Med, 2018</a:t>
+              <a:t>Global Initiative for Chronic Obstructive Lung Disease</a:t>
             </a:r>
             <a:endParaRPr lang="en-US" sz="900" dirty="0"/>
           </a:p>
@@ -3457,7 +3906,7 @@
                   <a:schemeClr val="accent1"/>
                 </a:solidFill>
               </a:rPr>
-              <a:t>r &gt; 0,94</a:t>
+              <a:t>65% → 80%</a:t>
             </a:r>
             <a:endParaRPr lang="en-US" sz="3000" dirty="0"/>
           </a:p>
@@ -3493,7 +3942,7 @@
                   <a:schemeClr val="tx1"/>
                 </a:solidFill>
               </a:rPr>
-              <a:t>Bluetooth spirometr vs stol spirometri: 200 bemor + 50 sogʻlom</a:t>
+              <a:t>Sezgirlik: faqat savolnoma (CDQ) → qoʻl spirometri; oʻziga xoslik 65% → 84%</a:t>
             </a:r>
             <a:endParaRPr lang="en-US" sz="1150" dirty="0"/>
           </a:p>
@@ -3529,7 +3978,7 @@
                   <a:schemeClr val="accent6"/>
                 </a:solidFill>
               </a:rPr>
-              <a:t>Air Next · Exarchos va b., Respir Res, 2020</a:t>
+              <a:t>Haroon va b., BMJ Open, 2015 · meta-tahlil</a:t>
             </a:r>
             <a:endParaRPr lang="en-US" sz="900" dirty="0"/>
           </a:p>
@@ -3587,7 +4036,7 @@
                   <a:schemeClr val="accent1"/>
                 </a:solidFill>
               </a:rPr>
-              <a:t>66% / 79%</a:t>
+              <a:t>r &gt; 0,94</a:t>
             </a:r>
             <a:endParaRPr lang="en-US" sz="3000" dirty="0"/>
           </a:p>
@@ -3623,7 +4072,7 @@
                   <a:schemeClr val="tx1"/>
                 </a:solidFill>
               </a:rPr>
-              <a:t>Qoʻl spirometri (COPD-6) umumiy amaliyotda: sezgirlik / oʻziga xoslik</a:t>
+              <a:t>Bluetooth spirometr vs stol spirometri: 200 bemor + 50 sogʻlom</a:t>
             </a:r>
             <a:endParaRPr lang="en-US" sz="1150" dirty="0"/>
           </a:p>
@@ -3659,7 +4108,7 @@
                   <a:schemeClr val="accent6"/>
                 </a:solidFill>
               </a:rPr>
-              <a:t>RADICALS, 2023</a:t>
+              <a:t>Air Next · Exarchos va b., Respir Res, 2020</a:t>
             </a:r>
             <a:endParaRPr lang="en-US" sz="900" dirty="0"/>
           </a:p>
@@ -3979,7 +4428,7 @@
                   <a:schemeClr val="accent1"/>
                 </a:solidFill>
               </a:rPr>
-              <a:t>GOLD 2025: </a:t>
+              <a:t>Xulosa: </a:t>
             </a:r>
             <a:pPr indent="0" marL="0">
               <a:buNone/>
@@ -3990,7 +4439,7 @@
                   <a:schemeClr val="tx1"/>
                 </a:solidFill>
               </a:rPr>
-              <a:t>simptomi va xavf omili bor odamlarni faol izlash va spirometriya tavsiya etiladi — NafasNazorat buni birlamchi boʻgʻinga olib kiradi.</a:t>
+              <a:t>savolnoma saralaydi → qurilma tasdiqlaydi → shifokor qaror qiladi. NafasNazorat shu zanjirni bitta tizimga yigʻadi.</a:t>
             </a:r>
             <a:endParaRPr lang="en-US" sz="1200" dirty="0"/>
           </a:p>
@@ -4046,6 +4495,9 @@
   <p:clrMapOvr>
     <a:masterClrMapping/>
   </p:clrMapOvr>
+  <p:transition spd="med">
+    <p:fade/>
+  </p:transition>
 </p:sld>
 </file>
 
@@ -4098,7 +4550,7 @@
                   <a:schemeClr val="accent1"/>
                 </a:solidFill>
               </a:rPr>
-              <a:t>MAʼLUMOTLAR BAZASI VA XAVFSIZLIK</a:t>
+              <a:t>ILMIY VALIDATSIYA</a:t>
             </a:r>
             <a:endParaRPr lang="en-US" sz="1100" dirty="0"/>
           </a:p>
@@ -4136,7 +4588,7 @@
                   <a:schemeClr val="tx1"/>
                 </a:solidFill>
               </a:rPr>
-              <a:t>Maʼlumotlar qanday saqlanadi</a:t>
+              <a:t>Pilot: modelni mahalliy aholida tasdiqlash</a:t>
             </a:r>
             <a:endParaRPr lang="en-US" sz="2800" dirty="0"/>
           </a:p>
@@ -4144,22 +4596,22 @@
       </p:sp>
       <p:sp>
         <p:nvSpPr>
-          <p:cNvPr id="5" name="tbl-patients"/>
+          <p:cNvPr id="5" name="pilot-step1"/>
           <p:cNvSpPr/>
           <p:nvPr/>
         </p:nvSpPr>
         <p:spPr>
           <a:xfrm>
-            <a:off x="548640" y="1554480"/>
-            <a:ext cx="6172200" cy="1097280"/>
+            <a:off x="548640" y="1536192"/>
+            <a:ext cx="2513000" cy="1828800"/>
           </a:xfrm>
           <a:prstGeom prst="roundRect">
             <a:avLst>
-              <a:gd name="adj" fmla="val 10000"/>
+              <a:gd name="adj" fmla="val 6000"/>
             </a:avLst>
           </a:prstGeom>
           <a:solidFill>
-            <a:schemeClr val="accent1"/>
+            <a:schemeClr val="bg2"/>
           </a:solidFill>
           <a:ln/>
         </p:spPr>
@@ -4172,8 +4624,8 @@
         </p:nvSpPr>
         <p:spPr>
           <a:xfrm>
-            <a:off x="749808" y="1810512"/>
-            <a:ext cx="566928" cy="566928"/>
+            <a:off x="777240" y="1764792"/>
+            <a:ext cx="502920" cy="502920"/>
           </a:xfrm>
           <a:prstGeom prst="roundRect">
             <a:avLst>
@@ -4181,7 +4633,7 @@
             </a:avLst>
           </a:prstGeom>
           <a:solidFill>
-            <a:schemeClr val="bg1"/>
+            <a:schemeClr val="accent1"/>
           </a:solidFill>
           <a:ln/>
         </p:spPr>
@@ -4202,8 +4654,8 @@
         </p:blipFill>
         <p:spPr>
           <a:xfrm>
-            <a:off x="885871" y="1946575"/>
-            <a:ext cx="294803" cy="294803"/>
+            <a:off x="897941" y="1885493"/>
+            <a:ext cx="261518" cy="261518"/>
           </a:xfrm>
           <a:prstGeom prst="rect">
             <a:avLst/>
@@ -4218,34 +4670,31 @@
         </p:nvSpPr>
         <p:spPr>
           <a:xfrm>
-            <a:off x="1508760" y="1664208"/>
-            <a:ext cx="5029200" cy="292608"/>
-          </a:xfrm>
-          <a:prstGeom prst="rect">
-            <a:avLst/>
-          </a:prstGeom>
-          <a:noFill/>
-          <a:ln/>
-        </p:spPr>
-        <p:txBody>
-          <a:bodyPr wrap="square" lIns="0" tIns="0" rIns="0" bIns="0" rtlCol="0" anchor="t"/>
-          <a:lstStyle/>
-          <a:p>
-            <a:pPr indent="0" marL="0">
-              <a:buNone/>
-            </a:pPr>
-            <a:r>
-              <a:rPr lang="en-US" sz="1500" b="1" dirty="0">
-                <a:solidFill>
-                  <a:schemeClr val="bg1"/>
-                </a:solidFill>
-                <a:latin typeface="Courier New" pitchFamily="34" charset="0"/>
-                <a:ea typeface="Courier New" pitchFamily="34" charset="-122"/>
-                <a:cs typeface="Courier New" pitchFamily="34" charset="-120"/>
-              </a:rPr>
-              <a:t>patients</a:t>
-            </a:r>
-            <a:endParaRPr lang="en-US" sz="1500" dirty="0"/>
+            <a:off x="1417320" y="1865376"/>
+            <a:ext cx="1507160" cy="274320"/>
+          </a:xfrm>
+          <a:prstGeom prst="rect">
+            <a:avLst/>
+          </a:prstGeom>
+          <a:noFill/>
+          <a:ln/>
+        </p:spPr>
+        <p:txBody>
+          <a:bodyPr wrap="square" lIns="0" tIns="0" rIns="0" bIns="0" rtlCol="0" anchor="t"/>
+          <a:lstStyle/>
+          <a:p>
+            <a:pPr indent="0" marL="0">
+              <a:buNone/>
+            </a:pPr>
+            <a:r>
+              <a:rPr lang="en-US" sz="1000" b="1" spc="150" kern="0" dirty="0">
+                <a:solidFill>
+                  <a:schemeClr val="accent1"/>
+                </a:solidFill>
+              </a:rPr>
+              <a:t>1-QADAM</a:t>
+            </a:r>
+            <a:endParaRPr lang="en-US" sz="1000" dirty="0"/>
           </a:p>
         </p:txBody>
       </p:sp>
@@ -4257,8 +4706,44 @@
         </p:nvSpPr>
         <p:spPr>
           <a:xfrm>
-            <a:off x="1508760" y="1965960"/>
-            <a:ext cx="5029200" cy="594360"/>
+            <a:off x="777240" y="2404872"/>
+            <a:ext cx="2238680" cy="347472"/>
+          </a:xfrm>
+          <a:prstGeom prst="rect">
+            <a:avLst/>
+          </a:prstGeom>
+          <a:noFill/>
+          <a:ln/>
+        </p:spPr>
+        <p:txBody>
+          <a:bodyPr wrap="square" lIns="0" tIns="0" rIns="0" bIns="0" rtlCol="0" anchor="t"/>
+          <a:lstStyle/>
+          <a:p>
+            <a:pPr indent="0" marL="0">
+              <a:buNone/>
+            </a:pPr>
+            <a:r>
+              <a:rPr lang="en-US" sz="1350" b="1" dirty="0">
+                <a:solidFill>
+                  <a:schemeClr val="tx1"/>
+                </a:solidFill>
+              </a:rPr>
+              <a:t>≥ 40 yosh bemorlar</a:t>
+            </a:r>
+            <a:endParaRPr lang="en-US" sz="1350" dirty="0"/>
+          </a:p>
+        </p:txBody>
+      </p:sp>
+      <p:sp>
+        <p:nvSpPr>
+          <p:cNvPr id="10" name="Text 6"/>
+          <p:cNvSpPr txBox="1"/>
+          <p:nvPr/>
+        </p:nvSpPr>
+        <p:spPr>
+          <a:xfrm>
+            <a:off x="777240" y="2761488"/>
+            <a:ext cx="2147240" cy="566928"/>
           </a:xfrm>
           <a:prstGeom prst="rect">
             <a:avLst/>
@@ -4276,10 +4761,10 @@
             <a:r>
               <a:rPr lang="en-US" sz="1100" dirty="0">
                 <a:solidFill>
-                  <a:schemeClr val="bg1"/>
-                </a:solidFill>
-              </a:rPr>
-              <a:t>Shaxsiy maʼlumot faqat shu yerda: F.I.Sh., tugʻilgan sana, telefon · psevdonim NN-XXXX-XXXX · tadqiqotga rozilik</a:t>
+                  <a:schemeClr val="accent6"/>
+                </a:solidFill>
+              </a:rPr>
+              <a:t>Birlamchi boʻgʻin, navbatdagi bemorlar, rozilik bilan</a:t>
             </a:r>
             <a:endParaRPr lang="en-US" sz="1100" dirty="0"/>
           </a:p>
@@ -4287,420 +4772,40 @@
       </p:sp>
       <p:sp>
         <p:nvSpPr>
-          <p:cNvPr id="10" name="Shape 6"/>
+          <p:cNvPr id="11" name="Shape 7"/>
           <p:cNvSpPr/>
           <p:nvPr/>
         </p:nvSpPr>
         <p:spPr>
           <a:xfrm>
-            <a:off x="1516380" y="2651760"/>
-            <a:ext cx="0" cy="411480"/>
-          </a:xfrm>
-          <a:prstGeom prst="line">
-            <a:avLst/>
-          </a:prstGeom>
-          <a:noFill/>
-          <a:ln w="19050">
-            <a:solidFill>
-              <a:schemeClr val="accent1"/>
-            </a:solidFill>
-            <a:prstDash val="solid"/>
-          </a:ln>
-        </p:spPr>
-      </p:sp>
-      <p:sp>
-        <p:nvSpPr>
-          <p:cNvPr id="11" name="tbl-assessments"/>
+            <a:off x="3153080" y="2313432"/>
+            <a:ext cx="164592" cy="274320"/>
+          </a:xfrm>
+          <a:prstGeom prst="chevron">
+            <a:avLst/>
+          </a:prstGeom>
+          <a:solidFill>
+            <a:schemeClr val="accent1">
+              <a:alpha val="60000"/>
+            </a:schemeClr>
+          </a:solidFill>
+          <a:ln/>
+        </p:spPr>
+      </p:sp>
+      <p:sp>
+        <p:nvSpPr>
+          <p:cNvPr id="12" name="pilot-step2"/>
           <p:cNvSpPr/>
           <p:nvPr/>
         </p:nvSpPr>
         <p:spPr>
           <a:xfrm>
-            <a:off x="548640" y="3063240"/>
-            <a:ext cx="1935480" cy="1097280"/>
+            <a:off x="3409112" y="1536192"/>
+            <a:ext cx="2513000" cy="1828800"/>
           </a:xfrm>
           <a:prstGeom prst="roundRect">
             <a:avLst>
-              <a:gd name="adj" fmla="val 10000"/>
-            </a:avLst>
-          </a:prstGeom>
-          <a:solidFill>
-            <a:schemeClr val="accent1">
-              <a:alpha val="12000"/>
-            </a:schemeClr>
-          </a:solidFill>
-          <a:ln/>
-        </p:spPr>
-      </p:sp>
-      <p:sp>
-        <p:nvSpPr>
-          <p:cNvPr id="12" name="Text 8"/>
-          <p:cNvSpPr txBox="1"/>
-          <p:nvPr/>
-        </p:nvSpPr>
-        <p:spPr>
-          <a:xfrm>
-            <a:off x="685800" y="3182112"/>
-            <a:ext cx="1661160" cy="274320"/>
-          </a:xfrm>
-          <a:prstGeom prst="rect">
-            <a:avLst/>
-          </a:prstGeom>
-          <a:noFill/>
-          <a:ln/>
-        </p:spPr>
-        <p:txBody>
-          <a:bodyPr wrap="square" lIns="0" tIns="0" rIns="0" bIns="0" rtlCol="0" anchor="t"/>
-          <a:lstStyle/>
-          <a:p>
-            <a:pPr indent="0" marL="0">
-              <a:buNone/>
-            </a:pPr>
-            <a:r>
-              <a:rPr lang="en-US" sz="1150" b="1" dirty="0">
-                <a:solidFill>
-                  <a:schemeClr val="accent1"/>
-                </a:solidFill>
-                <a:latin typeface="Courier New" pitchFamily="34" charset="0"/>
-                <a:ea typeface="Courier New" pitchFamily="34" charset="-122"/>
-                <a:cs typeface="Courier New" pitchFamily="34" charset="-120"/>
-              </a:rPr>
-              <a:t>assessments</a:t>
-            </a:r>
-            <a:endParaRPr lang="en-US" sz="1150" dirty="0"/>
-          </a:p>
-        </p:txBody>
-      </p:sp>
-      <p:sp>
-        <p:nvSpPr>
-          <p:cNvPr id="13" name="Text 9"/>
-          <p:cNvSpPr txBox="1"/>
-          <p:nvPr/>
-        </p:nvSpPr>
-        <p:spPr>
-          <a:xfrm>
-            <a:off x="685800" y="3493008"/>
-            <a:ext cx="1661160" cy="594360"/>
-          </a:xfrm>
-          <a:prstGeom prst="rect">
-            <a:avLst/>
-          </a:prstGeom>
-          <a:noFill/>
-          <a:ln/>
-        </p:spPr>
-        <p:txBody>
-          <a:bodyPr wrap="square" lIns="0" tIns="0" rIns="0" bIns="0" rtlCol="0" anchor="t"/>
-          <a:lstStyle/>
-          <a:p>
-            <a:pPr indent="0" marL="0">
-              <a:buNone/>
-            </a:pPr>
-            <a:r>
-              <a:rPr lang="en-US" sz="1100" dirty="0">
-                <a:solidFill>
-                  <a:schemeClr val="tx1"/>
-                </a:solidFill>
-              </a:rPr>
-              <a:t>javoblar, ball, model versiyasi</a:t>
-            </a:r>
-            <a:endParaRPr lang="en-US" sz="1100" dirty="0"/>
-          </a:p>
-        </p:txBody>
-      </p:sp>
-      <p:sp>
-        <p:nvSpPr>
-          <p:cNvPr id="14" name="Shape 10"/>
-          <p:cNvSpPr/>
-          <p:nvPr/>
-        </p:nvSpPr>
-        <p:spPr>
-          <a:xfrm>
-            <a:off x="3634740" y="2651760"/>
-            <a:ext cx="0" cy="411480"/>
-          </a:xfrm>
-          <a:prstGeom prst="line">
-            <a:avLst/>
-          </a:prstGeom>
-          <a:noFill/>
-          <a:ln w="19050">
-            <a:solidFill>
-              <a:schemeClr val="accent1"/>
-            </a:solidFill>
-            <a:prstDash val="solid"/>
-          </a:ln>
-        </p:spPr>
-      </p:sp>
-      <p:sp>
-        <p:nvSpPr>
-          <p:cNvPr id="15" name="tbl-spirometry_results"/>
-          <p:cNvSpPr/>
-          <p:nvPr/>
-        </p:nvSpPr>
-        <p:spPr>
-          <a:xfrm>
-            <a:off x="2667000" y="3063240"/>
-            <a:ext cx="1935480" cy="1097280"/>
-          </a:xfrm>
-          <a:prstGeom prst="roundRect">
-            <a:avLst>
-              <a:gd name="adj" fmla="val 10000"/>
-            </a:avLst>
-          </a:prstGeom>
-          <a:solidFill>
-            <a:schemeClr val="accent1">
-              <a:alpha val="12000"/>
-            </a:schemeClr>
-          </a:solidFill>
-          <a:ln/>
-        </p:spPr>
-      </p:sp>
-      <p:sp>
-        <p:nvSpPr>
-          <p:cNvPr id="16" name="Text 12"/>
-          <p:cNvSpPr txBox="1"/>
-          <p:nvPr/>
-        </p:nvSpPr>
-        <p:spPr>
-          <a:xfrm>
-            <a:off x="2804160" y="3182112"/>
-            <a:ext cx="1661160" cy="274320"/>
-          </a:xfrm>
-          <a:prstGeom prst="rect">
-            <a:avLst/>
-          </a:prstGeom>
-          <a:noFill/>
-          <a:ln/>
-        </p:spPr>
-        <p:txBody>
-          <a:bodyPr wrap="square" lIns="0" tIns="0" rIns="0" bIns="0" rtlCol="0" anchor="t"/>
-          <a:lstStyle/>
-          <a:p>
-            <a:pPr indent="0" marL="0">
-              <a:buNone/>
-            </a:pPr>
-            <a:r>
-              <a:rPr lang="en-US" sz="1150" b="1" dirty="0">
-                <a:solidFill>
-                  <a:schemeClr val="accent1"/>
-                </a:solidFill>
-                <a:latin typeface="Courier New" pitchFamily="34" charset="0"/>
-                <a:ea typeface="Courier New" pitchFamily="34" charset="-122"/>
-                <a:cs typeface="Courier New" pitchFamily="34" charset="-120"/>
-              </a:rPr>
-              <a:t>spirometry_results</a:t>
-            </a:r>
-            <a:endParaRPr lang="en-US" sz="1150" dirty="0"/>
-          </a:p>
-        </p:txBody>
-      </p:sp>
-      <p:sp>
-        <p:nvSpPr>
-          <p:cNvPr id="17" name="Text 13"/>
-          <p:cNvSpPr txBox="1"/>
-          <p:nvPr/>
-        </p:nvSpPr>
-        <p:spPr>
-          <a:xfrm>
-            <a:off x="2804160" y="3493008"/>
-            <a:ext cx="1661160" cy="594360"/>
-          </a:xfrm>
-          <a:prstGeom prst="rect">
-            <a:avLst/>
-          </a:prstGeom>
-          <a:noFill/>
-          <a:ln/>
-        </p:spPr>
-        <p:txBody>
-          <a:bodyPr wrap="square" lIns="0" tIns="0" rIns="0" bIns="0" rtlCol="0" anchor="t"/>
-          <a:lstStyle/>
-          <a:p>
-            <a:pPr indent="0" marL="0">
-              <a:buNone/>
-            </a:pPr>
-            <a:r>
-              <a:rPr lang="en-US" sz="1100" dirty="0">
-                <a:solidFill>
-                  <a:schemeClr val="tx1"/>
-                </a:solidFill>
-              </a:rPr>
-              <a:t>qiymatlar, GLI-2012, talqin</a:t>
-            </a:r>
-            <a:endParaRPr lang="en-US" sz="1100" dirty="0"/>
-          </a:p>
-        </p:txBody>
-      </p:sp>
-      <p:sp>
-        <p:nvSpPr>
-          <p:cNvPr id="18" name="Shape 14"/>
-          <p:cNvSpPr/>
-          <p:nvPr/>
-        </p:nvSpPr>
-        <p:spPr>
-          <a:xfrm>
-            <a:off x="5753100" y="2651760"/>
-            <a:ext cx="0" cy="411480"/>
-          </a:xfrm>
-          <a:prstGeom prst="line">
-            <a:avLst/>
-          </a:prstGeom>
-          <a:noFill/>
-          <a:ln w="19050">
-            <a:solidFill>
-              <a:schemeClr val="accent1"/>
-            </a:solidFill>
-            <a:prstDash val="solid"/>
-          </a:ln>
-        </p:spPr>
-      </p:sp>
-      <p:sp>
-        <p:nvSpPr>
-          <p:cNvPr id="19" name="tbl-referrals"/>
-          <p:cNvSpPr/>
-          <p:nvPr/>
-        </p:nvSpPr>
-        <p:spPr>
-          <a:xfrm>
-            <a:off x="4785360" y="3063240"/>
-            <a:ext cx="1935480" cy="1097280"/>
-          </a:xfrm>
-          <a:prstGeom prst="roundRect">
-            <a:avLst>
-              <a:gd name="adj" fmla="val 10000"/>
-            </a:avLst>
-          </a:prstGeom>
-          <a:solidFill>
-            <a:schemeClr val="accent1">
-              <a:alpha val="12000"/>
-            </a:schemeClr>
-          </a:solidFill>
-          <a:ln/>
-        </p:spPr>
-      </p:sp>
-      <p:sp>
-        <p:nvSpPr>
-          <p:cNvPr id="20" name="Text 16"/>
-          <p:cNvSpPr txBox="1"/>
-          <p:nvPr/>
-        </p:nvSpPr>
-        <p:spPr>
-          <a:xfrm>
-            <a:off x="4922520" y="3182112"/>
-            <a:ext cx="1661160" cy="274320"/>
-          </a:xfrm>
-          <a:prstGeom prst="rect">
-            <a:avLst/>
-          </a:prstGeom>
-          <a:noFill/>
-          <a:ln/>
-        </p:spPr>
-        <p:txBody>
-          <a:bodyPr wrap="square" lIns="0" tIns="0" rIns="0" bIns="0" rtlCol="0" anchor="t"/>
-          <a:lstStyle/>
-          <a:p>
-            <a:pPr indent="0" marL="0">
-              <a:buNone/>
-            </a:pPr>
-            <a:r>
-              <a:rPr lang="en-US" sz="1150" b="1" dirty="0">
-                <a:solidFill>
-                  <a:schemeClr val="accent1"/>
-                </a:solidFill>
-                <a:latin typeface="Courier New" pitchFamily="34" charset="0"/>
-                <a:ea typeface="Courier New" pitchFamily="34" charset="-122"/>
-                <a:cs typeface="Courier New" pitchFamily="34" charset="-120"/>
-              </a:rPr>
-              <a:t>referrals</a:t>
-            </a:r>
-            <a:endParaRPr lang="en-US" sz="1150" dirty="0"/>
-          </a:p>
-        </p:txBody>
-      </p:sp>
-      <p:sp>
-        <p:nvSpPr>
-          <p:cNvPr id="21" name="Text 17"/>
-          <p:cNvSpPr txBox="1"/>
-          <p:nvPr/>
-        </p:nvSpPr>
-        <p:spPr>
-          <a:xfrm>
-            <a:off x="4922520" y="3493008"/>
-            <a:ext cx="1661160" cy="594360"/>
-          </a:xfrm>
-          <a:prstGeom prst="rect">
-            <a:avLst/>
-          </a:prstGeom>
-          <a:noFill/>
-          <a:ln/>
-        </p:spPr>
-        <p:txBody>
-          <a:bodyPr wrap="square" lIns="0" tIns="0" rIns="0" bIns="0" rtlCol="0" anchor="t"/>
-          <a:lstStyle/>
-          <a:p>
-            <a:pPr indent="0" marL="0">
-              <a:buNone/>
-            </a:pPr>
-            <a:r>
-              <a:rPr lang="en-US" sz="1100" dirty="0">
-                <a:solidFill>
-                  <a:schemeClr val="tx1"/>
-                </a:solidFill>
-              </a:rPr>
-              <a:t>yoʻllanma va uning holati</a:t>
-            </a:r>
-            <a:endParaRPr lang="en-US" sz="1100" dirty="0"/>
-          </a:p>
-        </p:txBody>
-      </p:sp>
-      <p:sp>
-        <p:nvSpPr>
-          <p:cNvPr id="22" name="Text 18"/>
-          <p:cNvSpPr txBox="1"/>
-          <p:nvPr/>
-        </p:nvSpPr>
-        <p:spPr>
-          <a:xfrm>
-            <a:off x="548640" y="4224528"/>
-            <a:ext cx="6172200" cy="256032"/>
-          </a:xfrm>
-          <a:prstGeom prst="rect">
-            <a:avLst/>
-          </a:prstGeom>
-          <a:noFill/>
-          <a:ln/>
-        </p:spPr>
-        <p:txBody>
-          <a:bodyPr wrap="square" lIns="0" tIns="0" rIns="0" bIns="0" rtlCol="0" anchor="t"/>
-          <a:lstStyle/>
-          <a:p>
-            <a:pPr indent="0" marL="0">
-              <a:buNone/>
-            </a:pPr>
-            <a:r>
-              <a:rPr lang="en-US" sz="1000" i="1" dirty="0">
-                <a:solidFill>
-                  <a:schemeClr val="accent6"/>
-                </a:solidFill>
-              </a:rPr>
-              <a:t>Klinik maʼlumot bemorga faqat ichki ID orqali bogʻlanadi</a:t>
-            </a:r>
-            <a:endParaRPr lang="en-US" sz="1000" dirty="0"/>
-          </a:p>
-        </p:txBody>
-      </p:sp>
-      <p:sp>
-        <p:nvSpPr>
-          <p:cNvPr id="23" name="tbl-users"/>
-          <p:cNvSpPr/>
-          <p:nvPr/>
-        </p:nvSpPr>
-        <p:spPr>
-          <a:xfrm>
-            <a:off x="548640" y="4617720"/>
-            <a:ext cx="2994660" cy="1051560"/>
-          </a:xfrm>
-          <a:prstGeom prst="roundRect">
-            <a:avLst>
-              <a:gd name="adj" fmla="val 10435"/>
+              <a:gd name="adj" fmla="val 6000"/>
             </a:avLst>
           </a:prstGeom>
           <a:solidFill>
@@ -4711,200 +4816,14 @@
       </p:sp>
       <p:sp>
         <p:nvSpPr>
-          <p:cNvPr id="24" name="Text 20"/>
-          <p:cNvSpPr txBox="1"/>
-          <p:nvPr/>
-        </p:nvSpPr>
-        <p:spPr>
-          <a:xfrm>
-            <a:off x="713232" y="4736592"/>
-            <a:ext cx="2665476" cy="274320"/>
-          </a:xfrm>
-          <a:prstGeom prst="rect">
-            <a:avLst/>
-          </a:prstGeom>
-          <a:noFill/>
-          <a:ln/>
-        </p:spPr>
-        <p:txBody>
-          <a:bodyPr wrap="square" lIns="0" tIns="0" rIns="0" bIns="0" rtlCol="0" anchor="t"/>
-          <a:lstStyle/>
-          <a:p>
-            <a:pPr indent="0" marL="0">
-              <a:buNone/>
-            </a:pPr>
-            <a:r>
-              <a:rPr lang="en-US" sz="1150" b="1" dirty="0">
-                <a:solidFill>
-                  <a:schemeClr val="tx1"/>
-                </a:solidFill>
-                <a:latin typeface="Courier New" pitchFamily="34" charset="0"/>
-                <a:ea typeface="Courier New" pitchFamily="34" charset="-122"/>
-                <a:cs typeface="Courier New" pitchFamily="34" charset="-120"/>
-              </a:rPr>
-              <a:t>users</a:t>
-            </a:r>
-            <a:endParaRPr lang="en-US" sz="1150" dirty="0"/>
-          </a:p>
-        </p:txBody>
-      </p:sp>
-      <p:sp>
-        <p:nvSpPr>
-          <p:cNvPr id="25" name="Text 21"/>
-          <p:cNvSpPr txBox="1"/>
-          <p:nvPr/>
-        </p:nvSpPr>
-        <p:spPr>
-          <a:xfrm>
-            <a:off x="713232" y="5047488"/>
-            <a:ext cx="2665476" cy="548640"/>
-          </a:xfrm>
-          <a:prstGeom prst="rect">
-            <a:avLst/>
-          </a:prstGeom>
-          <a:noFill/>
-          <a:ln/>
-        </p:spPr>
-        <p:txBody>
-          <a:bodyPr wrap="square" lIns="0" tIns="0" rIns="0" bIns="0" rtlCol="0" anchor="t"/>
-          <a:lstStyle/>
-          <a:p>
-            <a:pPr indent="0" marL="0">
-              <a:buNone/>
-            </a:pPr>
-            <a:r>
-              <a:rPr lang="en-US" sz="1100" dirty="0">
-                <a:solidFill>
-                  <a:schemeClr val="accent6"/>
-                </a:solidFill>
-              </a:rPr>
-              <a:t>rollar: shifokor, admin, tadqiqotchi</a:t>
-            </a:r>
-            <a:endParaRPr lang="en-US" sz="1100" dirty="0"/>
-          </a:p>
-          <a:p>
-            <a:pPr indent="0" marL="0">
-              <a:buNone/>
-            </a:pPr>
-            <a:r>
-              <a:rPr lang="en-US" sz="1100" dirty="0">
-                <a:solidFill>
-                  <a:schemeClr val="accent6"/>
-                </a:solidFill>
-              </a:rPr>
-              <a:t>parol — scrypt xeshi</a:t>
-            </a:r>
-            <a:endParaRPr lang="en-US" sz="1100" dirty="0"/>
-          </a:p>
-        </p:txBody>
-      </p:sp>
-      <p:sp>
-        <p:nvSpPr>
-          <p:cNvPr id="26" name="tbl-audit_events"/>
+          <p:cNvPr id="13" name="Shape 9"/>
           <p:cNvSpPr/>
           <p:nvPr/>
         </p:nvSpPr>
         <p:spPr>
           <a:xfrm>
-            <a:off x="3726180" y="4617720"/>
-            <a:ext cx="2994660" cy="1051560"/>
-          </a:xfrm>
-          <a:prstGeom prst="roundRect">
-            <a:avLst>
-              <a:gd name="adj" fmla="val 10435"/>
-            </a:avLst>
-          </a:prstGeom>
-          <a:solidFill>
-            <a:schemeClr val="bg2"/>
-          </a:solidFill>
-          <a:ln/>
-        </p:spPr>
-      </p:sp>
-      <p:sp>
-        <p:nvSpPr>
-          <p:cNvPr id="27" name="Text 23"/>
-          <p:cNvSpPr txBox="1"/>
-          <p:nvPr/>
-        </p:nvSpPr>
-        <p:spPr>
-          <a:xfrm>
-            <a:off x="3890772" y="4736592"/>
-            <a:ext cx="2665476" cy="274320"/>
-          </a:xfrm>
-          <a:prstGeom prst="rect">
-            <a:avLst/>
-          </a:prstGeom>
-          <a:noFill/>
-          <a:ln/>
-        </p:spPr>
-        <p:txBody>
-          <a:bodyPr wrap="square" lIns="0" tIns="0" rIns="0" bIns="0" rtlCol="0" anchor="t"/>
-          <a:lstStyle/>
-          <a:p>
-            <a:pPr indent="0" marL="0">
-              <a:buNone/>
-            </a:pPr>
-            <a:r>
-              <a:rPr lang="en-US" sz="1150" b="1" dirty="0">
-                <a:solidFill>
-                  <a:schemeClr val="tx1"/>
-                </a:solidFill>
-                <a:latin typeface="Courier New" pitchFamily="34" charset="0"/>
-                <a:ea typeface="Courier New" pitchFamily="34" charset="-122"/>
-                <a:cs typeface="Courier New" pitchFamily="34" charset="-120"/>
-              </a:rPr>
-              <a:t>audit_events</a:t>
-            </a:r>
-            <a:endParaRPr lang="en-US" sz="1150" dirty="0"/>
-          </a:p>
-        </p:txBody>
-      </p:sp>
-      <p:sp>
-        <p:nvSpPr>
-          <p:cNvPr id="28" name="Text 24"/>
-          <p:cNvSpPr txBox="1"/>
-          <p:nvPr/>
-        </p:nvSpPr>
-        <p:spPr>
-          <a:xfrm>
-            <a:off x="3890772" y="5047488"/>
-            <a:ext cx="2665476" cy="548640"/>
-          </a:xfrm>
-          <a:prstGeom prst="rect">
-            <a:avLst/>
-          </a:prstGeom>
-          <a:noFill/>
-          <a:ln/>
-        </p:spPr>
-        <p:txBody>
-          <a:bodyPr wrap="square" lIns="0" tIns="0" rIns="0" bIns="0" rtlCol="0" anchor="t"/>
-          <a:lstStyle/>
-          <a:p>
-            <a:pPr indent="0" marL="0">
-              <a:buNone/>
-            </a:pPr>
-            <a:r>
-              <a:rPr lang="en-US" sz="1100" dirty="0">
-                <a:solidFill>
-                  <a:schemeClr val="accent6"/>
-                </a:solidFill>
-              </a:rPr>
-              <a:t>kim, qachon, qaysi maydon — qiymatsiz</a:t>
-            </a:r>
-            <a:endParaRPr lang="en-US" sz="1100" dirty="0"/>
-          </a:p>
-        </p:txBody>
-      </p:sp>
-      <p:sp>
-        <p:nvSpPr>
-          <p:cNvPr id="29" name="Shape 25"/>
-          <p:cNvSpPr/>
-          <p:nvPr/>
-        </p:nvSpPr>
-        <p:spPr>
-          <a:xfrm>
-            <a:off x="7086600" y="1572768"/>
-            <a:ext cx="475488" cy="475488"/>
+            <a:off x="3637712" y="1764792"/>
+            <a:ext cx="502920" cy="502920"/>
           </a:xfrm>
           <a:prstGeom prst="roundRect">
             <a:avLst>
@@ -4919,7 +4838,7 @@
       </p:sp>
       <p:pic>
         <p:nvPicPr>
-          <p:cNvPr id="30" name="Image 1" descr="preencoded.png">    </p:cNvPr>
+          <p:cNvPr id="14" name="Image 1" descr="preencoded.png">    </p:cNvPr>
           <p:cNvPicPr>
             <a:picLocks noChangeAspect="1"/>
           </p:cNvPicPr>
@@ -4933,8 +4852,8 @@
         </p:blipFill>
         <p:spPr>
           <a:xfrm>
-            <a:off x="7200717" y="1686885"/>
-            <a:ext cx="247254" cy="247254"/>
+            <a:off x="3758413" y="1885493"/>
+            <a:ext cx="261518" cy="261518"/>
           </a:xfrm>
           <a:prstGeom prst="rect">
             <a:avLst/>
@@ -4943,14 +4862,50 @@
       </p:pic>
       <p:sp>
         <p:nvSpPr>
-          <p:cNvPr id="31" name="Text 26"/>
-          <p:cNvSpPr txBox="1"/>
-          <p:nvPr/>
-        </p:nvSpPr>
-        <p:spPr>
-          <a:xfrm>
-            <a:off x="7726680" y="1545336"/>
-            <a:ext cx="3916375" cy="292608"/>
+          <p:cNvPr id="15" name="Text 10"/>
+          <p:cNvSpPr txBox="1"/>
+          <p:nvPr/>
+        </p:nvSpPr>
+        <p:spPr>
+          <a:xfrm>
+            <a:off x="4277792" y="1865376"/>
+            <a:ext cx="1507160" cy="274320"/>
+          </a:xfrm>
+          <a:prstGeom prst="rect">
+            <a:avLst/>
+          </a:prstGeom>
+          <a:noFill/>
+          <a:ln/>
+        </p:spPr>
+        <p:txBody>
+          <a:bodyPr wrap="square" lIns="0" tIns="0" rIns="0" bIns="0" rtlCol="0" anchor="t"/>
+          <a:lstStyle/>
+          <a:p>
+            <a:pPr indent="0" marL="0">
+              <a:buNone/>
+            </a:pPr>
+            <a:r>
+              <a:rPr lang="en-US" sz="1000" b="1" spc="150" kern="0" dirty="0">
+                <a:solidFill>
+                  <a:schemeClr val="accent1"/>
+                </a:solidFill>
+              </a:rPr>
+              <a:t>2-QADAM</a:t>
+            </a:r>
+            <a:endParaRPr lang="en-US" sz="1000" dirty="0"/>
+          </a:p>
+        </p:txBody>
+      </p:sp>
+      <p:sp>
+        <p:nvSpPr>
+          <p:cNvPr id="16" name="Text 11"/>
+          <p:cNvSpPr txBox="1"/>
+          <p:nvPr/>
+        </p:nvSpPr>
+        <p:spPr>
+          <a:xfrm>
+            <a:off x="3637712" y="2404872"/>
+            <a:ext cx="2238680" cy="347472"/>
           </a:xfrm>
           <a:prstGeom prst="rect">
             <a:avLst/>
@@ -4971,7 +4926,7 @@
                   <a:schemeClr val="tx1"/>
                 </a:solidFill>
               </a:rPr>
-              <a:t>SQLite + Docker volume</a:t>
+              <a:t>Savolnoma — hammaga</a:t>
             </a:r>
             <a:endParaRPr lang="en-US" sz="1350" dirty="0"/>
           </a:p>
@@ -4979,14 +4934,14 @@
       </p:sp>
       <p:sp>
         <p:nvSpPr>
-          <p:cNvPr id="32" name="Text 27"/>
-          <p:cNvSpPr txBox="1"/>
-          <p:nvPr/>
-        </p:nvSpPr>
-        <p:spPr>
-          <a:xfrm>
-            <a:off x="7726680" y="1837944"/>
-            <a:ext cx="3916375" cy="457200"/>
+          <p:cNvPr id="17" name="Text 12"/>
+          <p:cNvSpPr txBox="1"/>
+          <p:nvPr/>
+        </p:nvSpPr>
+        <p:spPr>
+          <a:xfrm>
+            <a:off x="3637712" y="2761488"/>
+            <a:ext cx="2147240" cy="566928"/>
           </a:xfrm>
           <a:prstGeom prst="rect">
             <a:avLst/>
@@ -5007,7 +4962,7 @@
                   <a:schemeClr val="accent6"/>
                 </a:solidFill>
               </a:rPr>
-              <a:t>~40–200 MB xotira; PostgreSQL bazasiga koʻchish tayyor</a:t>
+              <a:t>NafasNazorat: 5 daqiqa, 19 ballik model</a:t>
             </a:r>
             <a:endParaRPr lang="en-US" sz="1100" dirty="0"/>
           </a:p>
@@ -5015,14 +4970,58 @@
       </p:sp>
       <p:sp>
         <p:nvSpPr>
-          <p:cNvPr id="33" name="Shape 28"/>
+          <p:cNvPr id="18" name="Shape 13"/>
           <p:cNvSpPr/>
           <p:nvPr/>
         </p:nvSpPr>
         <p:spPr>
           <a:xfrm>
-            <a:off x="7086600" y="2459736"/>
-            <a:ext cx="475488" cy="475488"/>
+            <a:off x="6013552" y="2313432"/>
+            <a:ext cx="164592" cy="274320"/>
+          </a:xfrm>
+          <a:prstGeom prst="chevron">
+            <a:avLst/>
+          </a:prstGeom>
+          <a:solidFill>
+            <a:schemeClr val="accent1">
+              <a:alpha val="60000"/>
+            </a:schemeClr>
+          </a:solidFill>
+          <a:ln/>
+        </p:spPr>
+      </p:sp>
+      <p:sp>
+        <p:nvSpPr>
+          <p:cNvPr id="19" name="pilot-step3"/>
+          <p:cNvSpPr/>
+          <p:nvPr/>
+        </p:nvSpPr>
+        <p:spPr>
+          <a:xfrm>
+            <a:off x="6269584" y="1536192"/>
+            <a:ext cx="2513000" cy="1828800"/>
+          </a:xfrm>
+          <a:prstGeom prst="roundRect">
+            <a:avLst>
+              <a:gd name="adj" fmla="val 6000"/>
+            </a:avLst>
+          </a:prstGeom>
+          <a:solidFill>
+            <a:schemeClr val="bg2"/>
+          </a:solidFill>
+          <a:ln/>
+        </p:spPr>
+      </p:sp>
+      <p:sp>
+        <p:nvSpPr>
+          <p:cNvPr id="20" name="Shape 15"/>
+          <p:cNvSpPr/>
+          <p:nvPr/>
+        </p:nvSpPr>
+        <p:spPr>
+          <a:xfrm>
+            <a:off x="6498184" y="1764792"/>
+            <a:ext cx="502920" cy="502920"/>
           </a:xfrm>
           <a:prstGeom prst="roundRect">
             <a:avLst>
@@ -5037,7 +5036,7 @@
       </p:sp>
       <p:pic>
         <p:nvPicPr>
-          <p:cNvPr id="34" name="Image 2" descr="preencoded.png">    </p:cNvPr>
+          <p:cNvPr id="21" name="Image 2" descr="preencoded.png">    </p:cNvPr>
           <p:cNvPicPr>
             <a:picLocks noChangeAspect="1"/>
           </p:cNvPicPr>
@@ -5051,8 +5050,8 @@
         </p:blipFill>
         <p:spPr>
           <a:xfrm>
-            <a:off x="7200717" y="2573853"/>
-            <a:ext cx="247254" cy="247254"/>
+            <a:off x="6618884" y="1885493"/>
+            <a:ext cx="261518" cy="261518"/>
           </a:xfrm>
           <a:prstGeom prst="rect">
             <a:avLst/>
@@ -5061,14 +5060,50 @@
       </p:pic>
       <p:sp>
         <p:nvSpPr>
-          <p:cNvPr id="35" name="Text 29"/>
-          <p:cNvSpPr txBox="1"/>
-          <p:nvPr/>
-        </p:nvSpPr>
-        <p:spPr>
-          <a:xfrm>
-            <a:off x="7726680" y="2432304"/>
-            <a:ext cx="3916375" cy="292608"/>
+          <p:cNvPr id="22" name="Text 16"/>
+          <p:cNvSpPr txBox="1"/>
+          <p:nvPr/>
+        </p:nvSpPr>
+        <p:spPr>
+          <a:xfrm>
+            <a:off x="7138264" y="1865376"/>
+            <a:ext cx="1507160" cy="274320"/>
+          </a:xfrm>
+          <a:prstGeom prst="rect">
+            <a:avLst/>
+          </a:prstGeom>
+          <a:noFill/>
+          <a:ln/>
+        </p:spPr>
+        <p:txBody>
+          <a:bodyPr wrap="square" lIns="0" tIns="0" rIns="0" bIns="0" rtlCol="0" anchor="t"/>
+          <a:lstStyle/>
+          <a:p>
+            <a:pPr indent="0" marL="0">
+              <a:buNone/>
+            </a:pPr>
+            <a:r>
+              <a:rPr lang="en-US" sz="1000" b="1" spc="150" kern="0" dirty="0">
+                <a:solidFill>
+                  <a:schemeClr val="accent1"/>
+                </a:solidFill>
+              </a:rPr>
+              <a:t>3-QADAM</a:t>
+            </a:r>
+            <a:endParaRPr lang="en-US" sz="1000" dirty="0"/>
+          </a:p>
+        </p:txBody>
+      </p:sp>
+      <p:sp>
+        <p:nvSpPr>
+          <p:cNvPr id="23" name="Text 17"/>
+          <p:cNvSpPr txBox="1"/>
+          <p:nvPr/>
+        </p:nvSpPr>
+        <p:spPr>
+          <a:xfrm>
+            <a:off x="6498184" y="2404872"/>
+            <a:ext cx="2238680" cy="347472"/>
           </a:xfrm>
           <a:prstGeom prst="rect">
             <a:avLst/>
@@ -5089,7 +5124,7 @@
                   <a:schemeClr val="tx1"/>
                 </a:solidFill>
               </a:rPr>
-              <a:t>Har kuni 02:30 zaxira nusxa</a:t>
+              <a:t>Spirometriya</a:t>
             </a:r>
             <a:endParaRPr lang="en-US" sz="1350" dirty="0"/>
           </a:p>
@@ -5097,14 +5132,14 @@
       </p:sp>
       <p:sp>
         <p:nvSpPr>
-          <p:cNvPr id="36" name="Text 30"/>
-          <p:cNvSpPr txBox="1"/>
-          <p:nvPr/>
-        </p:nvSpPr>
-        <p:spPr>
-          <a:xfrm>
-            <a:off x="7726680" y="2724912"/>
-            <a:ext cx="3916375" cy="457200"/>
+          <p:cNvPr id="24" name="Text 18"/>
+          <p:cNvSpPr txBox="1"/>
+          <p:nvPr/>
+        </p:nvSpPr>
+        <p:spPr>
+          <a:xfrm>
+            <a:off x="6498184" y="2761488"/>
+            <a:ext cx="2147240" cy="566928"/>
           </a:xfrm>
           <a:prstGeom prst="rect">
             <a:avLst/>
@@ -5125,7 +5160,7 @@
                   <a:schemeClr val="accent6"/>
                 </a:solidFill>
               </a:rPr>
-              <a:t>Oxirgi 14 nusxa saqlanadi</a:t>
+              <a:t>Oltin standart: barcha oʻrta va yuqori + past xavflilardan tasodifiy tanlov</a:t>
             </a:r>
             <a:endParaRPr lang="en-US" sz="1100" dirty="0"/>
           </a:p>
@@ -5133,14 +5168,58 @@
       </p:sp>
       <p:sp>
         <p:nvSpPr>
-          <p:cNvPr id="37" name="Shape 31"/>
+          <p:cNvPr id="25" name="Shape 19"/>
           <p:cNvSpPr/>
           <p:nvPr/>
         </p:nvSpPr>
         <p:spPr>
           <a:xfrm>
-            <a:off x="7086600" y="3346704"/>
-            <a:ext cx="475488" cy="475488"/>
+            <a:off x="8874023" y="2313432"/>
+            <a:ext cx="164592" cy="274320"/>
+          </a:xfrm>
+          <a:prstGeom prst="chevron">
+            <a:avLst/>
+          </a:prstGeom>
+          <a:solidFill>
+            <a:schemeClr val="accent1">
+              <a:alpha val="60000"/>
+            </a:schemeClr>
+          </a:solidFill>
+          <a:ln/>
+        </p:spPr>
+      </p:sp>
+      <p:sp>
+        <p:nvSpPr>
+          <p:cNvPr id="26" name="pilot-step4"/>
+          <p:cNvSpPr/>
+          <p:nvPr/>
+        </p:nvSpPr>
+        <p:spPr>
+          <a:xfrm>
+            <a:off x="9130055" y="1536192"/>
+            <a:ext cx="2513000" cy="1828800"/>
+          </a:xfrm>
+          <a:prstGeom prst="roundRect">
+            <a:avLst>
+              <a:gd name="adj" fmla="val 6000"/>
+            </a:avLst>
+          </a:prstGeom>
+          <a:solidFill>
+            <a:schemeClr val="accent1"/>
+          </a:solidFill>
+          <a:ln/>
+        </p:spPr>
+      </p:sp>
+      <p:sp>
+        <p:nvSpPr>
+          <p:cNvPr id="27" name="Shape 21"/>
+          <p:cNvSpPr/>
+          <p:nvPr/>
+        </p:nvSpPr>
+        <p:spPr>
+          <a:xfrm>
+            <a:off x="9358655" y="1764792"/>
+            <a:ext cx="502920" cy="502920"/>
           </a:xfrm>
           <a:prstGeom prst="roundRect">
             <a:avLst>
@@ -5148,14 +5227,14 @@
             </a:avLst>
           </a:prstGeom>
           <a:solidFill>
-            <a:schemeClr val="accent1"/>
+            <a:schemeClr val="bg1"/>
           </a:solidFill>
           <a:ln/>
         </p:spPr>
       </p:sp>
       <p:pic>
         <p:nvPicPr>
-          <p:cNvPr id="38" name="Image 3" descr="preencoded.png">    </p:cNvPr>
+          <p:cNvPr id="28" name="Image 3" descr="preencoded.png">    </p:cNvPr>
           <p:cNvPicPr>
             <a:picLocks noChangeAspect="1"/>
           </p:cNvPicPr>
@@ -5169,8 +5248,8 @@
         </p:blipFill>
         <p:spPr>
           <a:xfrm>
-            <a:off x="7200717" y="3460821"/>
-            <a:ext cx="247254" cy="247254"/>
+            <a:off x="9479356" y="1885493"/>
+            <a:ext cx="261518" cy="261518"/>
           </a:xfrm>
           <a:prstGeom prst="rect">
             <a:avLst/>
@@ -5179,14 +5258,50 @@
       </p:pic>
       <p:sp>
         <p:nvSpPr>
-          <p:cNvPr id="39" name="Text 32"/>
-          <p:cNvSpPr txBox="1"/>
-          <p:nvPr/>
-        </p:nvSpPr>
-        <p:spPr>
-          <a:xfrm>
-            <a:off x="7726680" y="3319272"/>
-            <a:ext cx="3916375" cy="292608"/>
+          <p:cNvPr id="29" name="Text 22"/>
+          <p:cNvSpPr txBox="1"/>
+          <p:nvPr/>
+        </p:nvSpPr>
+        <p:spPr>
+          <a:xfrm>
+            <a:off x="9998735" y="1865376"/>
+            <a:ext cx="1507160" cy="274320"/>
+          </a:xfrm>
+          <a:prstGeom prst="rect">
+            <a:avLst/>
+          </a:prstGeom>
+          <a:noFill/>
+          <a:ln/>
+        </p:spPr>
+        <p:txBody>
+          <a:bodyPr wrap="square" lIns="0" tIns="0" rIns="0" bIns="0" rtlCol="0" anchor="t"/>
+          <a:lstStyle/>
+          <a:p>
+            <a:pPr indent="0" marL="0">
+              <a:buNone/>
+            </a:pPr>
+            <a:r>
+              <a:rPr lang="en-US" sz="1000" b="1" spc="150" kern="0" dirty="0">
+                <a:solidFill>
+                  <a:schemeClr val="accent5"/>
+                </a:solidFill>
+              </a:rPr>
+              <a:t>4-QADAM</a:t>
+            </a:r>
+            <a:endParaRPr lang="en-US" sz="1000" dirty="0"/>
+          </a:p>
+        </p:txBody>
+      </p:sp>
+      <p:sp>
+        <p:nvSpPr>
+          <p:cNvPr id="30" name="Text 23"/>
+          <p:cNvSpPr txBox="1"/>
+          <p:nvPr/>
+        </p:nvSpPr>
+        <p:spPr>
+          <a:xfrm>
+            <a:off x="9358655" y="2404872"/>
+            <a:ext cx="2238680" cy="347472"/>
           </a:xfrm>
           <a:prstGeom prst="rect">
             <a:avLst/>
@@ -5204,61 +5319,126 @@
             <a:r>
               <a:rPr lang="en-US" sz="1350" b="1" dirty="0">
                 <a:solidFill>
+                  <a:schemeClr val="bg1"/>
+                </a:solidFill>
+              </a:rPr>
+              <a:t>Kalibrlash</a:t>
+            </a:r>
+            <a:endParaRPr lang="en-US" sz="1350" dirty="0"/>
+          </a:p>
+        </p:txBody>
+      </p:sp>
+      <p:sp>
+        <p:nvSpPr>
+          <p:cNvPr id="31" name="Text 24"/>
+          <p:cNvSpPr txBox="1"/>
+          <p:nvPr/>
+        </p:nvSpPr>
+        <p:spPr>
+          <a:xfrm>
+            <a:off x="9358655" y="2761488"/>
+            <a:ext cx="2147240" cy="566928"/>
+          </a:xfrm>
+          <a:prstGeom prst="rect">
+            <a:avLst/>
+          </a:prstGeom>
+          <a:noFill/>
+          <a:ln/>
+        </p:spPr>
+        <p:txBody>
+          <a:bodyPr wrap="square" lIns="0" tIns="0" rIns="0" bIns="0" rtlCol="0" anchor="t"/>
+          <a:lstStyle/>
+          <a:p>
+            <a:pPr indent="0" marL="0">
+              <a:buNone/>
+            </a:pPr>
+            <a:r>
+              <a:rPr lang="en-US" sz="1100" dirty="0">
+                <a:solidFill>
+                  <a:schemeClr val="bg2"/>
+                </a:solidFill>
+              </a:rPr>
+              <a:t>Sezgirlik, AUC → ogʻirliklar yangilanadi → yangi model versiyasi</a:t>
+            </a:r>
+            <a:endParaRPr lang="en-US" sz="1100" dirty="0"/>
+          </a:p>
+        </p:txBody>
+      </p:sp>
+      <p:sp>
+        <p:nvSpPr>
+          <p:cNvPr id="32" name="Text 25"/>
+          <p:cNvSpPr txBox="1"/>
+          <p:nvPr/>
+        </p:nvSpPr>
+        <p:spPr>
+          <a:xfrm>
+            <a:off x="548640" y="3611880"/>
+            <a:ext cx="5486400" cy="274320"/>
+          </a:xfrm>
+          <a:prstGeom prst="rect">
+            <a:avLst/>
+          </a:prstGeom>
+          <a:noFill/>
+          <a:ln/>
+        </p:spPr>
+        <p:txBody>
+          <a:bodyPr wrap="square" lIns="0" tIns="0" rIns="0" bIns="0" rtlCol="0" anchor="t"/>
+          <a:lstStyle/>
+          <a:p>
+            <a:pPr indent="0" marL="0">
+              <a:buNone/>
+            </a:pPr>
+            <a:r>
+              <a:rPr lang="en-US" sz="1300" b="1" dirty="0">
+                <a:solidFill>
                   <a:schemeClr val="tx1"/>
                 </a:solidFill>
               </a:rPr>
-              <a:t>Tadqiqot — faqat rozilik bilan</a:t>
-            </a:r>
-            <a:endParaRPr lang="en-US" sz="1350" dirty="0"/>
-          </a:p>
-        </p:txBody>
-      </p:sp>
-      <p:sp>
-        <p:nvSpPr>
-          <p:cNvPr id="40" name="Text 33"/>
-          <p:cNvSpPr txBox="1"/>
-          <p:nvPr/>
-        </p:nvSpPr>
-        <p:spPr>
-          <a:xfrm>
-            <a:off x="7726680" y="3611880"/>
-            <a:ext cx="3916375" cy="457200"/>
-          </a:xfrm>
-          <a:prstGeom prst="rect">
-            <a:avLst/>
-          </a:prstGeom>
-          <a:noFill/>
-          <a:ln/>
-        </p:spPr>
-        <p:txBody>
-          <a:bodyPr wrap="square" lIns="0" tIns="0" rIns="0" bIns="0" rtlCol="0" anchor="t"/>
-          <a:lstStyle/>
-          <a:p>
-            <a:pPr indent="0" marL="0">
-              <a:buNone/>
-            </a:pPr>
-            <a:r>
-              <a:rPr lang="en-US" sz="1100" dirty="0">
-                <a:solidFill>
-                  <a:schemeClr val="accent6"/>
-                </a:solidFill>
-              </a:rPr>
-              <a:t>Anonim eksport CSV / JSON: ism va telefonsiz</a:t>
-            </a:r>
-            <a:endParaRPr lang="en-US" sz="1100" dirty="0"/>
-          </a:p>
-        </p:txBody>
-      </p:sp>
-      <p:sp>
-        <p:nvSpPr>
-          <p:cNvPr id="41" name="Shape 34"/>
+              <a:t>Nimani oʻlchaymiz</a:t>
+            </a:r>
+            <a:endParaRPr lang="en-US" sz="1300" dirty="0"/>
+          </a:p>
+        </p:txBody>
+      </p:sp>
+      <p:sp>
+        <p:nvSpPr>
+          <p:cNvPr id="33" name="Shape 26"/>
           <p:cNvSpPr/>
           <p:nvPr/>
         </p:nvSpPr>
         <p:spPr>
           <a:xfrm>
-            <a:off x="7086600" y="4233672"/>
-            <a:ext cx="475488" cy="475488"/>
+            <a:off x="548640" y="3950208"/>
+            <a:ext cx="3545738" cy="1143000"/>
+          </a:xfrm>
+          <a:prstGeom prst="roundRect">
+            <a:avLst>
+              <a:gd name="adj" fmla="val 9600"/>
+            </a:avLst>
+          </a:prstGeom>
+          <a:solidFill>
+            <a:schemeClr val="bg1"/>
+          </a:solidFill>
+          <a:ln w="9525">
+            <a:solidFill>
+              <a:schemeClr val="accent6">
+                <a:alpha val="30000"/>
+              </a:schemeClr>
+            </a:solidFill>
+            <a:prstDash val="solid"/>
+          </a:ln>
+        </p:spPr>
+      </p:sp>
+      <p:sp>
+        <p:nvSpPr>
+          <p:cNvPr id="34" name="Shape 27"/>
+          <p:cNvSpPr/>
+          <p:nvPr/>
+        </p:nvSpPr>
+        <p:spPr>
+          <a:xfrm>
+            <a:off x="731520" y="4151376"/>
+            <a:ext cx="420624" cy="420624"/>
           </a:xfrm>
           <a:prstGeom prst="roundRect">
             <a:avLst>
@@ -5273,7 +5453,7 @@
       </p:sp>
       <p:pic>
         <p:nvPicPr>
-          <p:cNvPr id="42" name="Image 4" descr="preencoded.png">    </p:cNvPr>
+          <p:cNvPr id="35" name="Image 4" descr="preencoded.png">    </p:cNvPr>
           <p:cNvPicPr>
             <a:picLocks noChangeAspect="1"/>
           </p:cNvPicPr>
@@ -5287,8 +5467,8 @@
         </p:blipFill>
         <p:spPr>
           <a:xfrm>
-            <a:off x="7200717" y="4347789"/>
-            <a:ext cx="247254" cy="247254"/>
+            <a:off x="832470" y="4252326"/>
+            <a:ext cx="218724" cy="218724"/>
           </a:xfrm>
           <a:prstGeom prst="rect">
             <a:avLst/>
@@ -5297,14 +5477,14 @@
       </p:pic>
       <p:sp>
         <p:nvSpPr>
-          <p:cNvPr id="43" name="Text 35"/>
-          <p:cNvSpPr txBox="1"/>
-          <p:nvPr/>
-        </p:nvSpPr>
-        <p:spPr>
-          <a:xfrm>
-            <a:off x="7726680" y="4206240"/>
-            <a:ext cx="3916375" cy="292608"/>
+          <p:cNvPr id="36" name="Text 28"/>
+          <p:cNvSpPr txBox="1"/>
+          <p:nvPr/>
+        </p:nvSpPr>
+        <p:spPr>
+          <a:xfrm>
+            <a:off x="1298448" y="4105656"/>
+            <a:ext cx="2631338" cy="292608"/>
           </a:xfrm>
           <a:prstGeom prst="rect">
             <a:avLst/>
@@ -5325,7 +5505,7 @@
                   <a:schemeClr val="tx1"/>
                 </a:solidFill>
               </a:rPr>
-              <a:t>HTTPS · rollar · audit</a:t>
+              <a:t>Klinik aniqlik</a:t>
             </a:r>
             <a:endParaRPr lang="en-US" sz="1350" dirty="0"/>
           </a:p>
@@ -5333,50 +5513,79 @@
       </p:sp>
       <p:sp>
         <p:nvSpPr>
-          <p:cNvPr id="44" name="Text 36"/>
-          <p:cNvSpPr txBox="1"/>
-          <p:nvPr/>
-        </p:nvSpPr>
-        <p:spPr>
-          <a:xfrm>
-            <a:off x="7726680" y="4498848"/>
-            <a:ext cx="3916375" cy="457200"/>
-          </a:xfrm>
-          <a:prstGeom prst="rect">
-            <a:avLst/>
-          </a:prstGeom>
-          <a:noFill/>
-          <a:ln/>
-        </p:spPr>
-        <p:txBody>
-          <a:bodyPr wrap="square" lIns="0" tIns="0" rIns="0" bIns="0" rtlCol="0" anchor="t"/>
-          <a:lstStyle/>
-          <a:p>
-            <a:pPr indent="0" marL="0">
-              <a:buNone/>
-            </a:pPr>
-            <a:r>
-              <a:rPr lang="en-US" sz="1100" dirty="0">
+          <p:cNvPr id="37" name="Text 29"/>
+          <p:cNvSpPr txBox="1"/>
+          <p:nvPr/>
+        </p:nvSpPr>
+        <p:spPr>
+          <a:xfrm>
+            <a:off x="1298448" y="4407408"/>
+            <a:ext cx="2631338" cy="640080"/>
+          </a:xfrm>
+          <a:prstGeom prst="rect">
+            <a:avLst/>
+          </a:prstGeom>
+          <a:noFill/>
+          <a:ln/>
+        </p:spPr>
+        <p:txBody>
+          <a:bodyPr wrap="square" lIns="0" tIns="0" rIns="0" bIns="0" rtlCol="0" anchor="t"/>
+          <a:lstStyle/>
+          <a:p>
+            <a:pPr indent="0" marL="0">
+              <a:buNone/>
+            </a:pPr>
+            <a:r>
+              <a:rPr lang="en-US" sz="1050" dirty="0">
                 <a:solidFill>
                   <a:schemeClr val="accent6"/>
                 </a:solidFill>
               </a:rPr>
-              <a:t>Loglarda shaxsiy maʼlumot yoʻq</a:t>
-            </a:r>
-            <a:endParaRPr lang="en-US" sz="1100" dirty="0"/>
-          </a:p>
-        </p:txBody>
-      </p:sp>
-      <p:sp>
-        <p:nvSpPr>
-          <p:cNvPr id="45" name="Shape 37"/>
+              <a:t>Sezgirlik, oʻziga xoslik, AUC — bronxodilatatordan keyingi spirometriyaga nisbatan</a:t>
+            </a:r>
+            <a:endParaRPr lang="en-US" sz="1050" dirty="0"/>
+          </a:p>
+        </p:txBody>
+      </p:sp>
+      <p:sp>
+        <p:nvSpPr>
+          <p:cNvPr id="38" name="Shape 30"/>
           <p:cNvSpPr/>
           <p:nvPr/>
         </p:nvSpPr>
         <p:spPr>
           <a:xfrm>
-            <a:off x="7086600" y="5120640"/>
-            <a:ext cx="475488" cy="475488"/>
+            <a:off x="4322978" y="3950208"/>
+            <a:ext cx="3545738" cy="1143000"/>
+          </a:xfrm>
+          <a:prstGeom prst="roundRect">
+            <a:avLst>
+              <a:gd name="adj" fmla="val 9600"/>
+            </a:avLst>
+          </a:prstGeom>
+          <a:solidFill>
+            <a:schemeClr val="bg1"/>
+          </a:solidFill>
+          <a:ln w="9525">
+            <a:solidFill>
+              <a:schemeClr val="accent6">
+                <a:alpha val="30000"/>
+              </a:schemeClr>
+            </a:solidFill>
+            <a:prstDash val="solid"/>
+          </a:ln>
+        </p:spPr>
+      </p:sp>
+      <p:sp>
+        <p:nvSpPr>
+          <p:cNvPr id="39" name="Shape 31"/>
+          <p:cNvSpPr/>
+          <p:nvPr/>
+        </p:nvSpPr>
+        <p:spPr>
+          <a:xfrm>
+            <a:off x="4505858" y="4151376"/>
+            <a:ext cx="420624" cy="420624"/>
           </a:xfrm>
           <a:prstGeom prst="roundRect">
             <a:avLst>
@@ -5384,14 +5593,14 @@
             </a:avLst>
           </a:prstGeom>
           <a:solidFill>
-            <a:schemeClr val="accent3"/>
+            <a:schemeClr val="accent1"/>
           </a:solidFill>
           <a:ln/>
         </p:spPr>
       </p:sp>
       <p:pic>
         <p:nvPicPr>
-          <p:cNvPr id="46" name="Image 5" descr="preencoded.png">    </p:cNvPr>
+          <p:cNvPr id="40" name="Image 5" descr="preencoded.png">    </p:cNvPr>
           <p:cNvPicPr>
             <a:picLocks noChangeAspect="1"/>
           </p:cNvPicPr>
@@ -5405,8 +5614,8 @@
         </p:blipFill>
         <p:spPr>
           <a:xfrm>
-            <a:off x="7200717" y="5234757"/>
-            <a:ext cx="247254" cy="247254"/>
+            <a:off x="4606808" y="4252326"/>
+            <a:ext cx="218724" cy="218724"/>
           </a:xfrm>
           <a:prstGeom prst="rect">
             <a:avLst/>
@@ -5415,14 +5624,14 @@
       </p:pic>
       <p:sp>
         <p:nvSpPr>
-          <p:cNvPr id="47" name="Text 38"/>
-          <p:cNvSpPr txBox="1"/>
-          <p:nvPr/>
-        </p:nvSpPr>
-        <p:spPr>
-          <a:xfrm>
-            <a:off x="7726680" y="5093208"/>
-            <a:ext cx="3916375" cy="292608"/>
+          <p:cNvPr id="41" name="Text 32"/>
+          <p:cNvSpPr txBox="1"/>
+          <p:nvPr/>
+        </p:nvSpPr>
+        <p:spPr>
+          <a:xfrm>
+            <a:off x="5072786" y="4105656"/>
+            <a:ext cx="2631338" cy="292608"/>
           </a:xfrm>
           <a:prstGeom prst="rect">
             <a:avLst/>
@@ -5443,7 +5652,7 @@
                   <a:schemeClr val="tx1"/>
                 </a:solidFill>
               </a:rPr>
-              <a:t>Pilotdan oldin: server Oʻzbekistonda</a:t>
+              <a:t>Amaliyot</a:t>
             </a:r>
             <a:endParaRPr lang="en-US" sz="1350" dirty="0"/>
           </a:p>
@@ -5451,37 +5660,301 @@
       </p:sp>
       <p:sp>
         <p:nvSpPr>
-          <p:cNvPr id="48" name="Text 39"/>
-          <p:cNvSpPr txBox="1"/>
-          <p:nvPr/>
-        </p:nvSpPr>
-        <p:spPr>
-          <a:xfrm>
-            <a:off x="7726680" y="5385816"/>
-            <a:ext cx="3916375" cy="457200"/>
-          </a:xfrm>
-          <a:prstGeom prst="rect">
-            <a:avLst/>
-          </a:prstGeom>
-          <a:noFill/>
-          <a:ln/>
-        </p:spPr>
-        <p:txBody>
-          <a:bodyPr wrap="square" lIns="0" tIns="0" rIns="0" bIns="0" rtlCol="0" anchor="t"/>
-          <a:lstStyle/>
-          <a:p>
-            <a:pPr indent="0" marL="0">
-              <a:buNone/>
-            </a:pPr>
-            <a:r>
-              <a:rPr lang="en-US" sz="1100" dirty="0">
+          <p:cNvPr id="42" name="Text 33"/>
+          <p:cNvSpPr txBox="1"/>
+          <p:nvPr/>
+        </p:nvSpPr>
+        <p:spPr>
+          <a:xfrm>
+            <a:off x="5072786" y="4407408"/>
+            <a:ext cx="2631338" cy="640080"/>
+          </a:xfrm>
+          <a:prstGeom prst="rect">
+            <a:avLst/>
+          </a:prstGeom>
+          <a:noFill/>
+          <a:ln/>
+        </p:spPr>
+        <p:txBody>
+          <a:bodyPr wrap="square" lIns="0" tIns="0" rIns="0" bIns="0" rtlCol="0" anchor="t"/>
+          <a:lstStyle/>
+          <a:p>
+            <a:pPr indent="0" marL="0">
+              <a:buNone/>
+            </a:pPr>
+            <a:r>
+              <a:rPr lang="en-US" sz="1050" dirty="0">
                 <a:solidFill>
                   <a:schemeClr val="accent6"/>
                 </a:solidFill>
               </a:rPr>
-              <a:t>«Shaxsga doir maʼlumotlar toʻgʻrisida»gi qonun, 27¹-modda</a:t>
-            </a:r>
-            <a:endParaRPr lang="en-US" sz="1100" dirty="0"/>
+              <a:t>Yoʻllanmadan keyin spirometriya bajarilishi, baholash vaqti, shifokor fikri</a:t>
+            </a:r>
+            <a:endParaRPr lang="en-US" sz="1050" dirty="0"/>
+          </a:p>
+        </p:txBody>
+      </p:sp>
+      <p:sp>
+        <p:nvSpPr>
+          <p:cNvPr id="43" name="Shape 34"/>
+          <p:cNvSpPr/>
+          <p:nvPr/>
+        </p:nvSpPr>
+        <p:spPr>
+          <a:xfrm>
+            <a:off x="8097317" y="3950208"/>
+            <a:ext cx="3545738" cy="1143000"/>
+          </a:xfrm>
+          <a:prstGeom prst="roundRect">
+            <a:avLst>
+              <a:gd name="adj" fmla="val 9600"/>
+            </a:avLst>
+          </a:prstGeom>
+          <a:solidFill>
+            <a:schemeClr val="bg1"/>
+          </a:solidFill>
+          <a:ln w="9525">
+            <a:solidFill>
+              <a:schemeClr val="accent6">
+                <a:alpha val="30000"/>
+              </a:schemeClr>
+            </a:solidFill>
+            <a:prstDash val="solid"/>
+          </a:ln>
+        </p:spPr>
+      </p:sp>
+      <p:sp>
+        <p:nvSpPr>
+          <p:cNvPr id="44" name="Shape 35"/>
+          <p:cNvSpPr/>
+          <p:nvPr/>
+        </p:nvSpPr>
+        <p:spPr>
+          <a:xfrm>
+            <a:off x="8280197" y="4151376"/>
+            <a:ext cx="420624" cy="420624"/>
+          </a:xfrm>
+          <a:prstGeom prst="roundRect">
+            <a:avLst>
+              <a:gd name="adj" fmla="val 24000"/>
+            </a:avLst>
+          </a:prstGeom>
+          <a:solidFill>
+            <a:schemeClr val="accent1"/>
+          </a:solidFill>
+          <a:ln/>
+        </p:spPr>
+      </p:sp>
+      <p:pic>
+        <p:nvPicPr>
+          <p:cNvPr id="45" name="Image 6" descr="preencoded.png">    </p:cNvPr>
+          <p:cNvPicPr>
+            <a:picLocks noChangeAspect="1"/>
+          </p:cNvPicPr>
+          <p:nvPr/>
+        </p:nvPicPr>
+        <p:blipFill>
+          <a:blip r:embed="rId7"/>
+          <a:stretch>
+            <a:fillRect/>
+          </a:stretch>
+        </p:blipFill>
+        <p:spPr>
+          <a:xfrm>
+            <a:off x="8381147" y="4252326"/>
+            <a:ext cx="218724" cy="218724"/>
+          </a:xfrm>
+          <a:prstGeom prst="rect">
+            <a:avLst/>
+          </a:prstGeom>
+        </p:spPr>
+      </p:pic>
+      <p:sp>
+        <p:nvSpPr>
+          <p:cNvPr id="46" name="Text 36"/>
+          <p:cNvSpPr txBox="1"/>
+          <p:nvPr/>
+        </p:nvSpPr>
+        <p:spPr>
+          <a:xfrm>
+            <a:off x="8847125" y="4105656"/>
+            <a:ext cx="2631338" cy="292608"/>
+          </a:xfrm>
+          <a:prstGeom prst="rect">
+            <a:avLst/>
+          </a:prstGeom>
+          <a:noFill/>
+          <a:ln/>
+        </p:spPr>
+        <p:txBody>
+          <a:bodyPr wrap="square" lIns="0" tIns="0" rIns="0" bIns="0" rtlCol="0" anchor="t"/>
+          <a:lstStyle/>
+          <a:p>
+            <a:pPr indent="0" marL="0">
+              <a:buNone/>
+            </a:pPr>
+            <a:r>
+              <a:rPr lang="en-US" sz="1350" b="1" dirty="0">
+                <a:solidFill>
+                  <a:schemeClr val="tx1"/>
+                </a:solidFill>
+              </a:rPr>
+              <a:t>Xavfsizlik</a:t>
+            </a:r>
+            <a:endParaRPr lang="en-US" sz="1350" dirty="0"/>
+          </a:p>
+        </p:txBody>
+      </p:sp>
+      <p:sp>
+        <p:nvSpPr>
+          <p:cNvPr id="47" name="Text 37"/>
+          <p:cNvSpPr txBox="1"/>
+          <p:nvPr/>
+        </p:nvSpPr>
+        <p:spPr>
+          <a:xfrm>
+            <a:off x="8847125" y="4407408"/>
+            <a:ext cx="2631338" cy="640080"/>
+          </a:xfrm>
+          <a:prstGeom prst="rect">
+            <a:avLst/>
+          </a:prstGeom>
+          <a:noFill/>
+          <a:ln/>
+        </p:spPr>
+        <p:txBody>
+          <a:bodyPr wrap="square" lIns="0" tIns="0" rIns="0" bIns="0" rtlCol="0" anchor="t"/>
+          <a:lstStyle/>
+          <a:p>
+            <a:pPr indent="0" marL="0">
+              <a:buNone/>
+            </a:pPr>
+            <a:r>
+              <a:rPr lang="en-US" sz="1050" dirty="0">
+                <a:solidFill>
+                  <a:schemeClr val="accent6"/>
+                </a:solidFill>
+              </a:rPr>
+              <a:t>Oʻtkazib yuborilgan holatlar va ortiqcha yoʻllanmalar</a:t>
+            </a:r>
+            <a:endParaRPr lang="en-US" sz="1050" dirty="0"/>
+          </a:p>
+        </p:txBody>
+      </p:sp>
+      <p:sp>
+        <p:nvSpPr>
+          <p:cNvPr id="48" name="Shape 38"/>
+          <p:cNvSpPr/>
+          <p:nvPr/>
+        </p:nvSpPr>
+        <p:spPr>
+          <a:xfrm>
+            <a:off x="548640" y="5321808"/>
+            <a:ext cx="11094415" cy="777240"/>
+          </a:xfrm>
+          <a:prstGeom prst="roundRect">
+            <a:avLst>
+              <a:gd name="adj" fmla="val 14118"/>
+            </a:avLst>
+          </a:prstGeom>
+          <a:solidFill>
+            <a:schemeClr val="accent1">
+              <a:alpha val="10000"/>
+            </a:schemeClr>
+          </a:solidFill>
+          <a:ln/>
+        </p:spPr>
+      </p:sp>
+      <p:sp>
+        <p:nvSpPr>
+          <p:cNvPr id="49" name="Shape 39"/>
+          <p:cNvSpPr/>
+          <p:nvPr/>
+        </p:nvSpPr>
+        <p:spPr>
+          <a:xfrm>
+            <a:off x="731520" y="5486400"/>
+            <a:ext cx="438912" cy="438912"/>
+          </a:xfrm>
+          <a:prstGeom prst="roundRect">
+            <a:avLst>
+              <a:gd name="adj" fmla="val 24000"/>
+            </a:avLst>
+          </a:prstGeom>
+          <a:solidFill>
+            <a:schemeClr val="accent1"/>
+          </a:solidFill>
+          <a:ln/>
+        </p:spPr>
+      </p:sp>
+      <p:pic>
+        <p:nvPicPr>
+          <p:cNvPr id="50" name="Image 7" descr="preencoded.png">    </p:cNvPr>
+          <p:cNvPicPr>
+            <a:picLocks noChangeAspect="1"/>
+          </p:cNvPicPr>
+          <p:nvPr/>
+        </p:nvPicPr>
+        <p:blipFill>
+          <a:blip r:embed="rId8"/>
+          <a:stretch>
+            <a:fillRect/>
+          </a:stretch>
+        </p:blipFill>
+        <p:spPr>
+          <a:xfrm>
+            <a:off x="836859" y="5591739"/>
+            <a:ext cx="228234" cy="228234"/>
+          </a:xfrm>
+          <a:prstGeom prst="rect">
+            <a:avLst/>
+          </a:prstGeom>
+        </p:spPr>
+      </p:pic>
+      <p:sp>
+        <p:nvSpPr>
+          <p:cNvPr id="51" name="Text 40"/>
+          <p:cNvSpPr txBox="1"/>
+          <p:nvPr/>
+        </p:nvSpPr>
+        <p:spPr>
+          <a:xfrm>
+            <a:off x="1353312" y="5321808"/>
+            <a:ext cx="10134295" cy="777240"/>
+          </a:xfrm>
+          <a:prstGeom prst="rect">
+            <a:avLst/>
+          </a:prstGeom>
+          <a:noFill/>
+          <a:ln/>
+        </p:spPr>
+        <p:txBody>
+          <a:bodyPr wrap="square" lIns="0" tIns="0" rIns="0" bIns="0" rtlCol="0" anchor="ctr"/>
+          <a:lstStyle/>
+          <a:p>
+            <a:pPr indent="0" marL="0">
+              <a:buNone/>
+            </a:pPr>
+            <a:r>
+              <a:rPr lang="en-US" sz="1200" b="1" dirty="0">
+                <a:solidFill>
+                  <a:schemeClr val="accent1"/>
+                </a:solidFill>
+              </a:rPr>
+              <a:t>Qayta tahlil tayyor: </a:t>
+            </a:r>
+            <a:pPr indent="0" marL="0">
+              <a:buNone/>
+            </a:pPr>
+            <a:r>
+              <a:rPr lang="en-US" sz="1200" dirty="0">
+                <a:solidFill>
+                  <a:schemeClr val="tx1"/>
+                </a:solidFill>
+              </a:rPr>
+              <a:t>har baholash javoblari va model versiyasi bilan saqlanadi — yangi ogʻirliklar oʻsha bemorlarda darhol solishtiriladi. Hozirgi ogʻirliklar ochiq «vaqtinchalik» deb belgilangan.</a:t>
+            </a:r>
+            <a:endParaRPr lang="en-US" sz="1200" dirty="0"/>
           </a:p>
         </p:txBody>
       </p:sp>
@@ -5535,6 +6008,9 @@
   <p:clrMapOvr>
     <a:masterClrMapping/>
   </p:clrMapOvr>
+  <p:transition spd="med">
+    <p:fade/>
+  </p:transition>
 </p:sld>
 </file>
 
@@ -5584,6 +6060,1498 @@
             <a:r>
               <a:rPr lang="en-US" sz="1100" b="1" spc="200" kern="0" dirty="0">
                 <a:solidFill>
+                  <a:schemeClr val="accent1"/>
+                </a:solidFill>
+              </a:rPr>
+              <a:t>MAʼLUMOTLAR BAZASI VA XAVFSIZLIK</a:t>
+            </a:r>
+            <a:endParaRPr lang="en-US" sz="1100" dirty="0"/>
+          </a:p>
+        </p:txBody>
+      </p:sp>
+      <p:sp>
+        <p:nvSpPr>
+          <p:cNvPr id="3" name="Text 1"/>
+          <p:cNvSpPr/>
+          <p:nvPr>
+            <p:ph idx="102" type="title" hasCustomPrompt="1"/>
+          </p:nvPr>
+        </p:nvSpPr>
+        <p:spPr>
+          <a:xfrm>
+            <a:off x="548640" y="658368"/>
+            <a:ext cx="11094415" cy="640080"/>
+          </a:xfrm>
+          <a:prstGeom prst="rect">
+            <a:avLst/>
+          </a:prstGeom>
+          <a:noFill/>
+          <a:ln/>
+        </p:spPr>
+        <p:txBody>
+          <a:bodyPr wrap="square" lIns="0" tIns="0" rIns="0" bIns="0" rtlCol="0" anchor="t"/>
+          <a:lstStyle/>
+          <a:p>
+            <a:pPr algn="l" indent="0" marL="0">
+              <a:buNone/>
+            </a:pPr>
+            <a:r>
+              <a:rPr lang="en-US" sz="2800" b="1" dirty="0">
+                <a:solidFill>
+                  <a:schemeClr val="tx1"/>
+                </a:solidFill>
+              </a:rPr>
+              <a:t>Maʼlumotlar qanday saqlanadi</a:t>
+            </a:r>
+            <a:endParaRPr lang="en-US" sz="2800" dirty="0"/>
+          </a:p>
+        </p:txBody>
+      </p:sp>
+      <p:sp>
+        <p:nvSpPr>
+          <p:cNvPr id="5" name="tbl-patients"/>
+          <p:cNvSpPr/>
+          <p:nvPr/>
+        </p:nvSpPr>
+        <p:spPr>
+          <a:xfrm>
+            <a:off x="548640" y="1554480"/>
+            <a:ext cx="6172200" cy="1097280"/>
+          </a:xfrm>
+          <a:prstGeom prst="roundRect">
+            <a:avLst>
+              <a:gd name="adj" fmla="val 10000"/>
+            </a:avLst>
+          </a:prstGeom>
+          <a:solidFill>
+            <a:schemeClr val="accent1"/>
+          </a:solidFill>
+          <a:ln/>
+        </p:spPr>
+      </p:sp>
+      <p:sp>
+        <p:nvSpPr>
+          <p:cNvPr id="6" name="Shape 3"/>
+          <p:cNvSpPr/>
+          <p:nvPr/>
+        </p:nvSpPr>
+        <p:spPr>
+          <a:xfrm>
+            <a:off x="749808" y="1810512"/>
+            <a:ext cx="566928" cy="566928"/>
+          </a:xfrm>
+          <a:prstGeom prst="roundRect">
+            <a:avLst>
+              <a:gd name="adj" fmla="val 24000"/>
+            </a:avLst>
+          </a:prstGeom>
+          <a:solidFill>
+            <a:schemeClr val="bg1"/>
+          </a:solidFill>
+          <a:ln/>
+        </p:spPr>
+      </p:sp>
+      <p:pic>
+        <p:nvPicPr>
+          <p:cNvPr id="7" name="Image 0" descr="preencoded.png">    </p:cNvPr>
+          <p:cNvPicPr>
+            <a:picLocks noChangeAspect="1"/>
+          </p:cNvPicPr>
+          <p:nvPr/>
+        </p:nvPicPr>
+        <p:blipFill>
+          <a:blip r:embed="rId1"/>
+          <a:stretch>
+            <a:fillRect/>
+          </a:stretch>
+        </p:blipFill>
+        <p:spPr>
+          <a:xfrm>
+            <a:off x="885871" y="1946575"/>
+            <a:ext cx="294803" cy="294803"/>
+          </a:xfrm>
+          <a:prstGeom prst="rect">
+            <a:avLst/>
+          </a:prstGeom>
+        </p:spPr>
+      </p:pic>
+      <p:sp>
+        <p:nvSpPr>
+          <p:cNvPr id="8" name="Text 4"/>
+          <p:cNvSpPr txBox="1"/>
+          <p:nvPr/>
+        </p:nvSpPr>
+        <p:spPr>
+          <a:xfrm>
+            <a:off x="1508760" y="1664208"/>
+            <a:ext cx="5029200" cy="292608"/>
+          </a:xfrm>
+          <a:prstGeom prst="rect">
+            <a:avLst/>
+          </a:prstGeom>
+          <a:noFill/>
+          <a:ln/>
+        </p:spPr>
+        <p:txBody>
+          <a:bodyPr wrap="square" lIns="0" tIns="0" rIns="0" bIns="0" rtlCol="0" anchor="t"/>
+          <a:lstStyle/>
+          <a:p>
+            <a:pPr indent="0" marL="0">
+              <a:buNone/>
+            </a:pPr>
+            <a:r>
+              <a:rPr lang="en-US" sz="1500" b="1" dirty="0">
+                <a:solidFill>
+                  <a:schemeClr val="bg1"/>
+                </a:solidFill>
+                <a:latin typeface="Courier New" pitchFamily="34" charset="0"/>
+                <a:ea typeface="Courier New" pitchFamily="34" charset="-122"/>
+                <a:cs typeface="Courier New" pitchFamily="34" charset="-120"/>
+              </a:rPr>
+              <a:t>patients</a:t>
+            </a:r>
+            <a:endParaRPr lang="en-US" sz="1500" dirty="0"/>
+          </a:p>
+        </p:txBody>
+      </p:sp>
+      <p:sp>
+        <p:nvSpPr>
+          <p:cNvPr id="9" name="Text 5"/>
+          <p:cNvSpPr txBox="1"/>
+          <p:nvPr/>
+        </p:nvSpPr>
+        <p:spPr>
+          <a:xfrm>
+            <a:off x="1508760" y="1965960"/>
+            <a:ext cx="5029200" cy="594360"/>
+          </a:xfrm>
+          <a:prstGeom prst="rect">
+            <a:avLst/>
+          </a:prstGeom>
+          <a:noFill/>
+          <a:ln/>
+        </p:spPr>
+        <p:txBody>
+          <a:bodyPr wrap="square" lIns="0" tIns="0" rIns="0" bIns="0" rtlCol="0" anchor="t"/>
+          <a:lstStyle/>
+          <a:p>
+            <a:pPr indent="0" marL="0">
+              <a:buNone/>
+            </a:pPr>
+            <a:r>
+              <a:rPr lang="en-US" sz="1100" dirty="0">
+                <a:solidFill>
+                  <a:schemeClr val="bg1"/>
+                </a:solidFill>
+              </a:rPr>
+              <a:t>Shaxsiy maʼlumot faqat shu yerda: F.I.Sh., tugʻilgan sana, telefon · psevdonim NN-XXXX-XXXX · tadqiqotga rozilik</a:t>
+            </a:r>
+            <a:endParaRPr lang="en-US" sz="1100" dirty="0"/>
+          </a:p>
+        </p:txBody>
+      </p:sp>
+      <p:sp>
+        <p:nvSpPr>
+          <p:cNvPr id="10" name="Shape 6"/>
+          <p:cNvSpPr/>
+          <p:nvPr/>
+        </p:nvSpPr>
+        <p:spPr>
+          <a:xfrm>
+            <a:off x="1516380" y="2651760"/>
+            <a:ext cx="0" cy="411480"/>
+          </a:xfrm>
+          <a:prstGeom prst="line">
+            <a:avLst/>
+          </a:prstGeom>
+          <a:noFill/>
+          <a:ln w="19050">
+            <a:solidFill>
+              <a:schemeClr val="accent1"/>
+            </a:solidFill>
+            <a:prstDash val="solid"/>
+          </a:ln>
+        </p:spPr>
+      </p:sp>
+      <p:sp>
+        <p:nvSpPr>
+          <p:cNvPr id="11" name="tbl-assessments"/>
+          <p:cNvSpPr/>
+          <p:nvPr/>
+        </p:nvSpPr>
+        <p:spPr>
+          <a:xfrm>
+            <a:off x="548640" y="3063240"/>
+            <a:ext cx="1935480" cy="1097280"/>
+          </a:xfrm>
+          <a:prstGeom prst="roundRect">
+            <a:avLst>
+              <a:gd name="adj" fmla="val 10000"/>
+            </a:avLst>
+          </a:prstGeom>
+          <a:solidFill>
+            <a:schemeClr val="accent1">
+              <a:alpha val="12000"/>
+            </a:schemeClr>
+          </a:solidFill>
+          <a:ln/>
+        </p:spPr>
+      </p:sp>
+      <p:sp>
+        <p:nvSpPr>
+          <p:cNvPr id="12" name="Text 8"/>
+          <p:cNvSpPr txBox="1"/>
+          <p:nvPr/>
+        </p:nvSpPr>
+        <p:spPr>
+          <a:xfrm>
+            <a:off x="685800" y="3182112"/>
+            <a:ext cx="1661160" cy="274320"/>
+          </a:xfrm>
+          <a:prstGeom prst="rect">
+            <a:avLst/>
+          </a:prstGeom>
+          <a:noFill/>
+          <a:ln/>
+        </p:spPr>
+        <p:txBody>
+          <a:bodyPr wrap="square" lIns="0" tIns="0" rIns="0" bIns="0" rtlCol="0" anchor="t"/>
+          <a:lstStyle/>
+          <a:p>
+            <a:pPr indent="0" marL="0">
+              <a:buNone/>
+            </a:pPr>
+            <a:r>
+              <a:rPr lang="en-US" sz="1150" b="1" dirty="0">
+                <a:solidFill>
+                  <a:schemeClr val="accent1"/>
+                </a:solidFill>
+                <a:latin typeface="Courier New" pitchFamily="34" charset="0"/>
+                <a:ea typeface="Courier New" pitchFamily="34" charset="-122"/>
+                <a:cs typeface="Courier New" pitchFamily="34" charset="-120"/>
+              </a:rPr>
+              <a:t>assessments</a:t>
+            </a:r>
+            <a:endParaRPr lang="en-US" sz="1150" dirty="0"/>
+          </a:p>
+        </p:txBody>
+      </p:sp>
+      <p:sp>
+        <p:nvSpPr>
+          <p:cNvPr id="13" name="Text 9"/>
+          <p:cNvSpPr txBox="1"/>
+          <p:nvPr/>
+        </p:nvSpPr>
+        <p:spPr>
+          <a:xfrm>
+            <a:off x="685800" y="3493008"/>
+            <a:ext cx="1661160" cy="594360"/>
+          </a:xfrm>
+          <a:prstGeom prst="rect">
+            <a:avLst/>
+          </a:prstGeom>
+          <a:noFill/>
+          <a:ln/>
+        </p:spPr>
+        <p:txBody>
+          <a:bodyPr wrap="square" lIns="0" tIns="0" rIns="0" bIns="0" rtlCol="0" anchor="t"/>
+          <a:lstStyle/>
+          <a:p>
+            <a:pPr indent="0" marL="0">
+              <a:buNone/>
+            </a:pPr>
+            <a:r>
+              <a:rPr lang="en-US" sz="1100" dirty="0">
+                <a:solidFill>
+                  <a:schemeClr val="tx1"/>
+                </a:solidFill>
+              </a:rPr>
+              <a:t>javoblar, ball, model versiyasi</a:t>
+            </a:r>
+            <a:endParaRPr lang="en-US" sz="1100" dirty="0"/>
+          </a:p>
+        </p:txBody>
+      </p:sp>
+      <p:sp>
+        <p:nvSpPr>
+          <p:cNvPr id="14" name="Shape 10"/>
+          <p:cNvSpPr/>
+          <p:nvPr/>
+        </p:nvSpPr>
+        <p:spPr>
+          <a:xfrm>
+            <a:off x="3634740" y="2651760"/>
+            <a:ext cx="0" cy="411480"/>
+          </a:xfrm>
+          <a:prstGeom prst="line">
+            <a:avLst/>
+          </a:prstGeom>
+          <a:noFill/>
+          <a:ln w="19050">
+            <a:solidFill>
+              <a:schemeClr val="accent1"/>
+            </a:solidFill>
+            <a:prstDash val="solid"/>
+          </a:ln>
+        </p:spPr>
+      </p:sp>
+      <p:sp>
+        <p:nvSpPr>
+          <p:cNvPr id="15" name="tbl-spirometry_results"/>
+          <p:cNvSpPr/>
+          <p:nvPr/>
+        </p:nvSpPr>
+        <p:spPr>
+          <a:xfrm>
+            <a:off x="2667000" y="3063240"/>
+            <a:ext cx="1935480" cy="1097280"/>
+          </a:xfrm>
+          <a:prstGeom prst="roundRect">
+            <a:avLst>
+              <a:gd name="adj" fmla="val 10000"/>
+            </a:avLst>
+          </a:prstGeom>
+          <a:solidFill>
+            <a:schemeClr val="accent1">
+              <a:alpha val="12000"/>
+            </a:schemeClr>
+          </a:solidFill>
+          <a:ln/>
+        </p:spPr>
+      </p:sp>
+      <p:sp>
+        <p:nvSpPr>
+          <p:cNvPr id="16" name="Text 12"/>
+          <p:cNvSpPr txBox="1"/>
+          <p:nvPr/>
+        </p:nvSpPr>
+        <p:spPr>
+          <a:xfrm>
+            <a:off x="2804160" y="3182112"/>
+            <a:ext cx="1661160" cy="274320"/>
+          </a:xfrm>
+          <a:prstGeom prst="rect">
+            <a:avLst/>
+          </a:prstGeom>
+          <a:noFill/>
+          <a:ln/>
+        </p:spPr>
+        <p:txBody>
+          <a:bodyPr wrap="square" lIns="0" tIns="0" rIns="0" bIns="0" rtlCol="0" anchor="t"/>
+          <a:lstStyle/>
+          <a:p>
+            <a:pPr indent="0" marL="0">
+              <a:buNone/>
+            </a:pPr>
+            <a:r>
+              <a:rPr lang="en-US" sz="1150" b="1" dirty="0">
+                <a:solidFill>
+                  <a:schemeClr val="accent1"/>
+                </a:solidFill>
+                <a:latin typeface="Courier New" pitchFamily="34" charset="0"/>
+                <a:ea typeface="Courier New" pitchFamily="34" charset="-122"/>
+                <a:cs typeface="Courier New" pitchFamily="34" charset="-120"/>
+              </a:rPr>
+              <a:t>spirometry_results</a:t>
+            </a:r>
+            <a:endParaRPr lang="en-US" sz="1150" dirty="0"/>
+          </a:p>
+        </p:txBody>
+      </p:sp>
+      <p:sp>
+        <p:nvSpPr>
+          <p:cNvPr id="17" name="Text 13"/>
+          <p:cNvSpPr txBox="1"/>
+          <p:nvPr/>
+        </p:nvSpPr>
+        <p:spPr>
+          <a:xfrm>
+            <a:off x="2804160" y="3493008"/>
+            <a:ext cx="1661160" cy="594360"/>
+          </a:xfrm>
+          <a:prstGeom prst="rect">
+            <a:avLst/>
+          </a:prstGeom>
+          <a:noFill/>
+          <a:ln/>
+        </p:spPr>
+        <p:txBody>
+          <a:bodyPr wrap="square" lIns="0" tIns="0" rIns="0" bIns="0" rtlCol="0" anchor="t"/>
+          <a:lstStyle/>
+          <a:p>
+            <a:pPr indent="0" marL="0">
+              <a:buNone/>
+            </a:pPr>
+            <a:r>
+              <a:rPr lang="en-US" sz="1100" dirty="0">
+                <a:solidFill>
+                  <a:schemeClr val="tx1"/>
+                </a:solidFill>
+              </a:rPr>
+              <a:t>qiymatlar, GLI-2012, talqin</a:t>
+            </a:r>
+            <a:endParaRPr lang="en-US" sz="1100" dirty="0"/>
+          </a:p>
+        </p:txBody>
+      </p:sp>
+      <p:sp>
+        <p:nvSpPr>
+          <p:cNvPr id="18" name="Shape 14"/>
+          <p:cNvSpPr/>
+          <p:nvPr/>
+        </p:nvSpPr>
+        <p:spPr>
+          <a:xfrm>
+            <a:off x="5753100" y="2651760"/>
+            <a:ext cx="0" cy="411480"/>
+          </a:xfrm>
+          <a:prstGeom prst="line">
+            <a:avLst/>
+          </a:prstGeom>
+          <a:noFill/>
+          <a:ln w="19050">
+            <a:solidFill>
+              <a:schemeClr val="accent1"/>
+            </a:solidFill>
+            <a:prstDash val="solid"/>
+          </a:ln>
+        </p:spPr>
+      </p:sp>
+      <p:sp>
+        <p:nvSpPr>
+          <p:cNvPr id="19" name="tbl-referrals"/>
+          <p:cNvSpPr/>
+          <p:nvPr/>
+        </p:nvSpPr>
+        <p:spPr>
+          <a:xfrm>
+            <a:off x="4785360" y="3063240"/>
+            <a:ext cx="1935480" cy="1097280"/>
+          </a:xfrm>
+          <a:prstGeom prst="roundRect">
+            <a:avLst>
+              <a:gd name="adj" fmla="val 10000"/>
+            </a:avLst>
+          </a:prstGeom>
+          <a:solidFill>
+            <a:schemeClr val="accent1">
+              <a:alpha val="12000"/>
+            </a:schemeClr>
+          </a:solidFill>
+          <a:ln/>
+        </p:spPr>
+      </p:sp>
+      <p:sp>
+        <p:nvSpPr>
+          <p:cNvPr id="20" name="Text 16"/>
+          <p:cNvSpPr txBox="1"/>
+          <p:nvPr/>
+        </p:nvSpPr>
+        <p:spPr>
+          <a:xfrm>
+            <a:off x="4922520" y="3182112"/>
+            <a:ext cx="1661160" cy="274320"/>
+          </a:xfrm>
+          <a:prstGeom prst="rect">
+            <a:avLst/>
+          </a:prstGeom>
+          <a:noFill/>
+          <a:ln/>
+        </p:spPr>
+        <p:txBody>
+          <a:bodyPr wrap="square" lIns="0" tIns="0" rIns="0" bIns="0" rtlCol="0" anchor="t"/>
+          <a:lstStyle/>
+          <a:p>
+            <a:pPr indent="0" marL="0">
+              <a:buNone/>
+            </a:pPr>
+            <a:r>
+              <a:rPr lang="en-US" sz="1150" b="1" dirty="0">
+                <a:solidFill>
+                  <a:schemeClr val="accent1"/>
+                </a:solidFill>
+                <a:latin typeface="Courier New" pitchFamily="34" charset="0"/>
+                <a:ea typeface="Courier New" pitchFamily="34" charset="-122"/>
+                <a:cs typeface="Courier New" pitchFamily="34" charset="-120"/>
+              </a:rPr>
+              <a:t>referrals</a:t>
+            </a:r>
+            <a:endParaRPr lang="en-US" sz="1150" dirty="0"/>
+          </a:p>
+        </p:txBody>
+      </p:sp>
+      <p:sp>
+        <p:nvSpPr>
+          <p:cNvPr id="21" name="Text 17"/>
+          <p:cNvSpPr txBox="1"/>
+          <p:nvPr/>
+        </p:nvSpPr>
+        <p:spPr>
+          <a:xfrm>
+            <a:off x="4922520" y="3493008"/>
+            <a:ext cx="1661160" cy="594360"/>
+          </a:xfrm>
+          <a:prstGeom prst="rect">
+            <a:avLst/>
+          </a:prstGeom>
+          <a:noFill/>
+          <a:ln/>
+        </p:spPr>
+        <p:txBody>
+          <a:bodyPr wrap="square" lIns="0" tIns="0" rIns="0" bIns="0" rtlCol="0" anchor="t"/>
+          <a:lstStyle/>
+          <a:p>
+            <a:pPr indent="0" marL="0">
+              <a:buNone/>
+            </a:pPr>
+            <a:r>
+              <a:rPr lang="en-US" sz="1100" dirty="0">
+                <a:solidFill>
+                  <a:schemeClr val="tx1"/>
+                </a:solidFill>
+              </a:rPr>
+              <a:t>yoʻllanma va uning holati</a:t>
+            </a:r>
+            <a:endParaRPr lang="en-US" sz="1100" dirty="0"/>
+          </a:p>
+        </p:txBody>
+      </p:sp>
+      <p:sp>
+        <p:nvSpPr>
+          <p:cNvPr id="22" name="Text 18"/>
+          <p:cNvSpPr txBox="1"/>
+          <p:nvPr/>
+        </p:nvSpPr>
+        <p:spPr>
+          <a:xfrm>
+            <a:off x="548640" y="4224528"/>
+            <a:ext cx="6172200" cy="256032"/>
+          </a:xfrm>
+          <a:prstGeom prst="rect">
+            <a:avLst/>
+          </a:prstGeom>
+          <a:noFill/>
+          <a:ln/>
+        </p:spPr>
+        <p:txBody>
+          <a:bodyPr wrap="square" lIns="0" tIns="0" rIns="0" bIns="0" rtlCol="0" anchor="t"/>
+          <a:lstStyle/>
+          <a:p>
+            <a:pPr indent="0" marL="0">
+              <a:buNone/>
+            </a:pPr>
+            <a:r>
+              <a:rPr lang="en-US" sz="1000" i="1" dirty="0">
+                <a:solidFill>
+                  <a:schemeClr val="accent6"/>
+                </a:solidFill>
+              </a:rPr>
+              <a:t>Klinik maʼlumot bemorga faqat ichki ID orqali bogʻlanadi</a:t>
+            </a:r>
+            <a:endParaRPr lang="en-US" sz="1000" dirty="0"/>
+          </a:p>
+        </p:txBody>
+      </p:sp>
+      <p:sp>
+        <p:nvSpPr>
+          <p:cNvPr id="23" name="tbl-users"/>
+          <p:cNvSpPr/>
+          <p:nvPr/>
+        </p:nvSpPr>
+        <p:spPr>
+          <a:xfrm>
+            <a:off x="548640" y="4617720"/>
+            <a:ext cx="2994660" cy="1051560"/>
+          </a:xfrm>
+          <a:prstGeom prst="roundRect">
+            <a:avLst>
+              <a:gd name="adj" fmla="val 10435"/>
+            </a:avLst>
+          </a:prstGeom>
+          <a:solidFill>
+            <a:schemeClr val="bg2"/>
+          </a:solidFill>
+          <a:ln/>
+        </p:spPr>
+      </p:sp>
+      <p:sp>
+        <p:nvSpPr>
+          <p:cNvPr id="24" name="Text 20"/>
+          <p:cNvSpPr txBox="1"/>
+          <p:nvPr/>
+        </p:nvSpPr>
+        <p:spPr>
+          <a:xfrm>
+            <a:off x="713232" y="4736592"/>
+            <a:ext cx="2665476" cy="274320"/>
+          </a:xfrm>
+          <a:prstGeom prst="rect">
+            <a:avLst/>
+          </a:prstGeom>
+          <a:noFill/>
+          <a:ln/>
+        </p:spPr>
+        <p:txBody>
+          <a:bodyPr wrap="square" lIns="0" tIns="0" rIns="0" bIns="0" rtlCol="0" anchor="t"/>
+          <a:lstStyle/>
+          <a:p>
+            <a:pPr indent="0" marL="0">
+              <a:buNone/>
+            </a:pPr>
+            <a:r>
+              <a:rPr lang="en-US" sz="1150" b="1" dirty="0">
+                <a:solidFill>
+                  <a:schemeClr val="tx1"/>
+                </a:solidFill>
+                <a:latin typeface="Courier New" pitchFamily="34" charset="0"/>
+                <a:ea typeface="Courier New" pitchFamily="34" charset="-122"/>
+                <a:cs typeface="Courier New" pitchFamily="34" charset="-120"/>
+              </a:rPr>
+              <a:t>users</a:t>
+            </a:r>
+            <a:endParaRPr lang="en-US" sz="1150" dirty="0"/>
+          </a:p>
+        </p:txBody>
+      </p:sp>
+      <p:sp>
+        <p:nvSpPr>
+          <p:cNvPr id="25" name="Text 21"/>
+          <p:cNvSpPr txBox="1"/>
+          <p:nvPr/>
+        </p:nvSpPr>
+        <p:spPr>
+          <a:xfrm>
+            <a:off x="713232" y="5047488"/>
+            <a:ext cx="2665476" cy="548640"/>
+          </a:xfrm>
+          <a:prstGeom prst="rect">
+            <a:avLst/>
+          </a:prstGeom>
+          <a:noFill/>
+          <a:ln/>
+        </p:spPr>
+        <p:txBody>
+          <a:bodyPr wrap="square" lIns="0" tIns="0" rIns="0" bIns="0" rtlCol="0" anchor="t"/>
+          <a:lstStyle/>
+          <a:p>
+            <a:pPr indent="0" marL="0">
+              <a:buNone/>
+            </a:pPr>
+            <a:r>
+              <a:rPr lang="en-US" sz="1100" dirty="0">
+                <a:solidFill>
+                  <a:schemeClr val="accent6"/>
+                </a:solidFill>
+              </a:rPr>
+              <a:t>rollar: shifokor, admin, tadqiqotchi</a:t>
+            </a:r>
+            <a:endParaRPr lang="en-US" sz="1100" dirty="0"/>
+          </a:p>
+          <a:p>
+            <a:pPr indent="0" marL="0">
+              <a:buNone/>
+            </a:pPr>
+            <a:r>
+              <a:rPr lang="en-US" sz="1100" dirty="0">
+                <a:solidFill>
+                  <a:schemeClr val="accent6"/>
+                </a:solidFill>
+              </a:rPr>
+              <a:t>parol — scrypt xeshi</a:t>
+            </a:r>
+            <a:endParaRPr lang="en-US" sz="1100" dirty="0"/>
+          </a:p>
+        </p:txBody>
+      </p:sp>
+      <p:sp>
+        <p:nvSpPr>
+          <p:cNvPr id="26" name="tbl-audit_events"/>
+          <p:cNvSpPr/>
+          <p:nvPr/>
+        </p:nvSpPr>
+        <p:spPr>
+          <a:xfrm>
+            <a:off x="3726180" y="4617720"/>
+            <a:ext cx="2994660" cy="1051560"/>
+          </a:xfrm>
+          <a:prstGeom prst="roundRect">
+            <a:avLst>
+              <a:gd name="adj" fmla="val 10435"/>
+            </a:avLst>
+          </a:prstGeom>
+          <a:solidFill>
+            <a:schemeClr val="bg2"/>
+          </a:solidFill>
+          <a:ln/>
+        </p:spPr>
+      </p:sp>
+      <p:sp>
+        <p:nvSpPr>
+          <p:cNvPr id="27" name="Text 23"/>
+          <p:cNvSpPr txBox="1"/>
+          <p:nvPr/>
+        </p:nvSpPr>
+        <p:spPr>
+          <a:xfrm>
+            <a:off x="3890772" y="4736592"/>
+            <a:ext cx="2665476" cy="274320"/>
+          </a:xfrm>
+          <a:prstGeom prst="rect">
+            <a:avLst/>
+          </a:prstGeom>
+          <a:noFill/>
+          <a:ln/>
+        </p:spPr>
+        <p:txBody>
+          <a:bodyPr wrap="square" lIns="0" tIns="0" rIns="0" bIns="0" rtlCol="0" anchor="t"/>
+          <a:lstStyle/>
+          <a:p>
+            <a:pPr indent="0" marL="0">
+              <a:buNone/>
+            </a:pPr>
+            <a:r>
+              <a:rPr lang="en-US" sz="1150" b="1" dirty="0">
+                <a:solidFill>
+                  <a:schemeClr val="tx1"/>
+                </a:solidFill>
+                <a:latin typeface="Courier New" pitchFamily="34" charset="0"/>
+                <a:ea typeface="Courier New" pitchFamily="34" charset="-122"/>
+                <a:cs typeface="Courier New" pitchFamily="34" charset="-120"/>
+              </a:rPr>
+              <a:t>audit_events</a:t>
+            </a:r>
+            <a:endParaRPr lang="en-US" sz="1150" dirty="0"/>
+          </a:p>
+        </p:txBody>
+      </p:sp>
+      <p:sp>
+        <p:nvSpPr>
+          <p:cNvPr id="28" name="Text 24"/>
+          <p:cNvSpPr txBox="1"/>
+          <p:nvPr/>
+        </p:nvSpPr>
+        <p:spPr>
+          <a:xfrm>
+            <a:off x="3890772" y="5047488"/>
+            <a:ext cx="2665476" cy="548640"/>
+          </a:xfrm>
+          <a:prstGeom prst="rect">
+            <a:avLst/>
+          </a:prstGeom>
+          <a:noFill/>
+          <a:ln/>
+        </p:spPr>
+        <p:txBody>
+          <a:bodyPr wrap="square" lIns="0" tIns="0" rIns="0" bIns="0" rtlCol="0" anchor="t"/>
+          <a:lstStyle/>
+          <a:p>
+            <a:pPr indent="0" marL="0">
+              <a:buNone/>
+            </a:pPr>
+            <a:r>
+              <a:rPr lang="en-US" sz="1100" dirty="0">
+                <a:solidFill>
+                  <a:schemeClr val="accent6"/>
+                </a:solidFill>
+              </a:rPr>
+              <a:t>kim, qachon, qaysi maydon — qiymatsiz</a:t>
+            </a:r>
+            <a:endParaRPr lang="en-US" sz="1100" dirty="0"/>
+          </a:p>
+        </p:txBody>
+      </p:sp>
+      <p:sp>
+        <p:nvSpPr>
+          <p:cNvPr id="29" name="Shape 25"/>
+          <p:cNvSpPr/>
+          <p:nvPr/>
+        </p:nvSpPr>
+        <p:spPr>
+          <a:xfrm>
+            <a:off x="7086600" y="1572768"/>
+            <a:ext cx="475488" cy="475488"/>
+          </a:xfrm>
+          <a:prstGeom prst="roundRect">
+            <a:avLst>
+              <a:gd name="adj" fmla="val 24000"/>
+            </a:avLst>
+          </a:prstGeom>
+          <a:solidFill>
+            <a:schemeClr val="accent1"/>
+          </a:solidFill>
+          <a:ln/>
+        </p:spPr>
+      </p:sp>
+      <p:pic>
+        <p:nvPicPr>
+          <p:cNvPr id="30" name="Image 1" descr="preencoded.png">    </p:cNvPr>
+          <p:cNvPicPr>
+            <a:picLocks noChangeAspect="1"/>
+          </p:cNvPicPr>
+          <p:nvPr/>
+        </p:nvPicPr>
+        <p:blipFill>
+          <a:blip r:embed="rId2"/>
+          <a:stretch>
+            <a:fillRect/>
+          </a:stretch>
+        </p:blipFill>
+        <p:spPr>
+          <a:xfrm>
+            <a:off x="7200717" y="1686885"/>
+            <a:ext cx="247254" cy="247254"/>
+          </a:xfrm>
+          <a:prstGeom prst="rect">
+            <a:avLst/>
+          </a:prstGeom>
+        </p:spPr>
+      </p:pic>
+      <p:sp>
+        <p:nvSpPr>
+          <p:cNvPr id="31" name="Text 26"/>
+          <p:cNvSpPr txBox="1"/>
+          <p:nvPr/>
+        </p:nvSpPr>
+        <p:spPr>
+          <a:xfrm>
+            <a:off x="7726680" y="1545336"/>
+            <a:ext cx="3916375" cy="292608"/>
+          </a:xfrm>
+          <a:prstGeom prst="rect">
+            <a:avLst/>
+          </a:prstGeom>
+          <a:noFill/>
+          <a:ln/>
+        </p:spPr>
+        <p:txBody>
+          <a:bodyPr wrap="square" lIns="0" tIns="0" rIns="0" bIns="0" rtlCol="0" anchor="t"/>
+          <a:lstStyle/>
+          <a:p>
+            <a:pPr indent="0" marL="0">
+              <a:buNone/>
+            </a:pPr>
+            <a:r>
+              <a:rPr lang="en-US" sz="1350" b="1" dirty="0">
+                <a:solidFill>
+                  <a:schemeClr val="tx1"/>
+                </a:solidFill>
+              </a:rPr>
+              <a:t>SQLite + Docker volume</a:t>
+            </a:r>
+            <a:endParaRPr lang="en-US" sz="1350" dirty="0"/>
+          </a:p>
+        </p:txBody>
+      </p:sp>
+      <p:sp>
+        <p:nvSpPr>
+          <p:cNvPr id="32" name="Text 27"/>
+          <p:cNvSpPr txBox="1"/>
+          <p:nvPr/>
+        </p:nvSpPr>
+        <p:spPr>
+          <a:xfrm>
+            <a:off x="7726680" y="1837944"/>
+            <a:ext cx="3916375" cy="457200"/>
+          </a:xfrm>
+          <a:prstGeom prst="rect">
+            <a:avLst/>
+          </a:prstGeom>
+          <a:noFill/>
+          <a:ln/>
+        </p:spPr>
+        <p:txBody>
+          <a:bodyPr wrap="square" lIns="0" tIns="0" rIns="0" bIns="0" rtlCol="0" anchor="t"/>
+          <a:lstStyle/>
+          <a:p>
+            <a:pPr indent="0" marL="0">
+              <a:buNone/>
+            </a:pPr>
+            <a:r>
+              <a:rPr lang="en-US" sz="1100" dirty="0">
+                <a:solidFill>
+                  <a:schemeClr val="accent6"/>
+                </a:solidFill>
+              </a:rPr>
+              <a:t>~40–200 MB xotira; PostgreSQL bazasiga koʻchish tayyor</a:t>
+            </a:r>
+            <a:endParaRPr lang="en-US" sz="1100" dirty="0"/>
+          </a:p>
+        </p:txBody>
+      </p:sp>
+      <p:sp>
+        <p:nvSpPr>
+          <p:cNvPr id="33" name="Shape 28"/>
+          <p:cNvSpPr/>
+          <p:nvPr/>
+        </p:nvSpPr>
+        <p:spPr>
+          <a:xfrm>
+            <a:off x="7086600" y="2459736"/>
+            <a:ext cx="475488" cy="475488"/>
+          </a:xfrm>
+          <a:prstGeom prst="roundRect">
+            <a:avLst>
+              <a:gd name="adj" fmla="val 24000"/>
+            </a:avLst>
+          </a:prstGeom>
+          <a:solidFill>
+            <a:schemeClr val="accent1"/>
+          </a:solidFill>
+          <a:ln/>
+        </p:spPr>
+      </p:sp>
+      <p:pic>
+        <p:nvPicPr>
+          <p:cNvPr id="34" name="Image 2" descr="preencoded.png">    </p:cNvPr>
+          <p:cNvPicPr>
+            <a:picLocks noChangeAspect="1"/>
+          </p:cNvPicPr>
+          <p:nvPr/>
+        </p:nvPicPr>
+        <p:blipFill>
+          <a:blip r:embed="rId3"/>
+          <a:stretch>
+            <a:fillRect/>
+          </a:stretch>
+        </p:blipFill>
+        <p:spPr>
+          <a:xfrm>
+            <a:off x="7200717" y="2573853"/>
+            <a:ext cx="247254" cy="247254"/>
+          </a:xfrm>
+          <a:prstGeom prst="rect">
+            <a:avLst/>
+          </a:prstGeom>
+        </p:spPr>
+      </p:pic>
+      <p:sp>
+        <p:nvSpPr>
+          <p:cNvPr id="35" name="Text 29"/>
+          <p:cNvSpPr txBox="1"/>
+          <p:nvPr/>
+        </p:nvSpPr>
+        <p:spPr>
+          <a:xfrm>
+            <a:off x="7726680" y="2432304"/>
+            <a:ext cx="3916375" cy="292608"/>
+          </a:xfrm>
+          <a:prstGeom prst="rect">
+            <a:avLst/>
+          </a:prstGeom>
+          <a:noFill/>
+          <a:ln/>
+        </p:spPr>
+        <p:txBody>
+          <a:bodyPr wrap="square" lIns="0" tIns="0" rIns="0" bIns="0" rtlCol="0" anchor="t"/>
+          <a:lstStyle/>
+          <a:p>
+            <a:pPr indent="0" marL="0">
+              <a:buNone/>
+            </a:pPr>
+            <a:r>
+              <a:rPr lang="en-US" sz="1350" b="1" dirty="0">
+                <a:solidFill>
+                  <a:schemeClr val="tx1"/>
+                </a:solidFill>
+              </a:rPr>
+              <a:t>Har kuni 02:30 zaxira nusxa</a:t>
+            </a:r>
+            <a:endParaRPr lang="en-US" sz="1350" dirty="0"/>
+          </a:p>
+        </p:txBody>
+      </p:sp>
+      <p:sp>
+        <p:nvSpPr>
+          <p:cNvPr id="36" name="Text 30"/>
+          <p:cNvSpPr txBox="1"/>
+          <p:nvPr/>
+        </p:nvSpPr>
+        <p:spPr>
+          <a:xfrm>
+            <a:off x="7726680" y="2724912"/>
+            <a:ext cx="3916375" cy="457200"/>
+          </a:xfrm>
+          <a:prstGeom prst="rect">
+            <a:avLst/>
+          </a:prstGeom>
+          <a:noFill/>
+          <a:ln/>
+        </p:spPr>
+        <p:txBody>
+          <a:bodyPr wrap="square" lIns="0" tIns="0" rIns="0" bIns="0" rtlCol="0" anchor="t"/>
+          <a:lstStyle/>
+          <a:p>
+            <a:pPr indent="0" marL="0">
+              <a:buNone/>
+            </a:pPr>
+            <a:r>
+              <a:rPr lang="en-US" sz="1100" dirty="0">
+                <a:solidFill>
+                  <a:schemeClr val="accent6"/>
+                </a:solidFill>
+              </a:rPr>
+              <a:t>Oxirgi 14 nusxa saqlanadi</a:t>
+            </a:r>
+            <a:endParaRPr lang="en-US" sz="1100" dirty="0"/>
+          </a:p>
+        </p:txBody>
+      </p:sp>
+      <p:sp>
+        <p:nvSpPr>
+          <p:cNvPr id="37" name="Shape 31"/>
+          <p:cNvSpPr/>
+          <p:nvPr/>
+        </p:nvSpPr>
+        <p:spPr>
+          <a:xfrm>
+            <a:off x="7086600" y="3346704"/>
+            <a:ext cx="475488" cy="475488"/>
+          </a:xfrm>
+          <a:prstGeom prst="roundRect">
+            <a:avLst>
+              <a:gd name="adj" fmla="val 24000"/>
+            </a:avLst>
+          </a:prstGeom>
+          <a:solidFill>
+            <a:schemeClr val="accent1"/>
+          </a:solidFill>
+          <a:ln/>
+        </p:spPr>
+      </p:sp>
+      <p:pic>
+        <p:nvPicPr>
+          <p:cNvPr id="38" name="Image 3" descr="preencoded.png">    </p:cNvPr>
+          <p:cNvPicPr>
+            <a:picLocks noChangeAspect="1"/>
+          </p:cNvPicPr>
+          <p:nvPr/>
+        </p:nvPicPr>
+        <p:blipFill>
+          <a:blip r:embed="rId4"/>
+          <a:stretch>
+            <a:fillRect/>
+          </a:stretch>
+        </p:blipFill>
+        <p:spPr>
+          <a:xfrm>
+            <a:off x="7200717" y="3460821"/>
+            <a:ext cx="247254" cy="247254"/>
+          </a:xfrm>
+          <a:prstGeom prst="rect">
+            <a:avLst/>
+          </a:prstGeom>
+        </p:spPr>
+      </p:pic>
+      <p:sp>
+        <p:nvSpPr>
+          <p:cNvPr id="39" name="Text 32"/>
+          <p:cNvSpPr txBox="1"/>
+          <p:nvPr/>
+        </p:nvSpPr>
+        <p:spPr>
+          <a:xfrm>
+            <a:off x="7726680" y="3319272"/>
+            <a:ext cx="3916375" cy="292608"/>
+          </a:xfrm>
+          <a:prstGeom prst="rect">
+            <a:avLst/>
+          </a:prstGeom>
+          <a:noFill/>
+          <a:ln/>
+        </p:spPr>
+        <p:txBody>
+          <a:bodyPr wrap="square" lIns="0" tIns="0" rIns="0" bIns="0" rtlCol="0" anchor="t"/>
+          <a:lstStyle/>
+          <a:p>
+            <a:pPr indent="0" marL="0">
+              <a:buNone/>
+            </a:pPr>
+            <a:r>
+              <a:rPr lang="en-US" sz="1350" b="1" dirty="0">
+                <a:solidFill>
+                  <a:schemeClr val="tx1"/>
+                </a:solidFill>
+              </a:rPr>
+              <a:t>Tadqiqot — faqat rozilik bilan</a:t>
+            </a:r>
+            <a:endParaRPr lang="en-US" sz="1350" dirty="0"/>
+          </a:p>
+        </p:txBody>
+      </p:sp>
+      <p:sp>
+        <p:nvSpPr>
+          <p:cNvPr id="40" name="Text 33"/>
+          <p:cNvSpPr txBox="1"/>
+          <p:nvPr/>
+        </p:nvSpPr>
+        <p:spPr>
+          <a:xfrm>
+            <a:off x="7726680" y="3611880"/>
+            <a:ext cx="3916375" cy="457200"/>
+          </a:xfrm>
+          <a:prstGeom prst="rect">
+            <a:avLst/>
+          </a:prstGeom>
+          <a:noFill/>
+          <a:ln/>
+        </p:spPr>
+        <p:txBody>
+          <a:bodyPr wrap="square" lIns="0" tIns="0" rIns="0" bIns="0" rtlCol="0" anchor="t"/>
+          <a:lstStyle/>
+          <a:p>
+            <a:pPr indent="0" marL="0">
+              <a:buNone/>
+            </a:pPr>
+            <a:r>
+              <a:rPr lang="en-US" sz="1100" dirty="0">
+                <a:solidFill>
+                  <a:schemeClr val="accent6"/>
+                </a:solidFill>
+              </a:rPr>
+              <a:t>Anonim eksport CSV / JSON: ism va telefonsiz</a:t>
+            </a:r>
+            <a:endParaRPr lang="en-US" sz="1100" dirty="0"/>
+          </a:p>
+        </p:txBody>
+      </p:sp>
+      <p:sp>
+        <p:nvSpPr>
+          <p:cNvPr id="41" name="Shape 34"/>
+          <p:cNvSpPr/>
+          <p:nvPr/>
+        </p:nvSpPr>
+        <p:spPr>
+          <a:xfrm>
+            <a:off x="7086600" y="4233672"/>
+            <a:ext cx="475488" cy="475488"/>
+          </a:xfrm>
+          <a:prstGeom prst="roundRect">
+            <a:avLst>
+              <a:gd name="adj" fmla="val 24000"/>
+            </a:avLst>
+          </a:prstGeom>
+          <a:solidFill>
+            <a:schemeClr val="accent1"/>
+          </a:solidFill>
+          <a:ln/>
+        </p:spPr>
+      </p:sp>
+      <p:pic>
+        <p:nvPicPr>
+          <p:cNvPr id="42" name="Image 4" descr="preencoded.png">    </p:cNvPr>
+          <p:cNvPicPr>
+            <a:picLocks noChangeAspect="1"/>
+          </p:cNvPicPr>
+          <p:nvPr/>
+        </p:nvPicPr>
+        <p:blipFill>
+          <a:blip r:embed="rId5"/>
+          <a:stretch>
+            <a:fillRect/>
+          </a:stretch>
+        </p:blipFill>
+        <p:spPr>
+          <a:xfrm>
+            <a:off x="7200717" y="4347789"/>
+            <a:ext cx="247254" cy="247254"/>
+          </a:xfrm>
+          <a:prstGeom prst="rect">
+            <a:avLst/>
+          </a:prstGeom>
+        </p:spPr>
+      </p:pic>
+      <p:sp>
+        <p:nvSpPr>
+          <p:cNvPr id="43" name="Text 35"/>
+          <p:cNvSpPr txBox="1"/>
+          <p:nvPr/>
+        </p:nvSpPr>
+        <p:spPr>
+          <a:xfrm>
+            <a:off x="7726680" y="4206240"/>
+            <a:ext cx="3916375" cy="292608"/>
+          </a:xfrm>
+          <a:prstGeom prst="rect">
+            <a:avLst/>
+          </a:prstGeom>
+          <a:noFill/>
+          <a:ln/>
+        </p:spPr>
+        <p:txBody>
+          <a:bodyPr wrap="square" lIns="0" tIns="0" rIns="0" bIns="0" rtlCol="0" anchor="t"/>
+          <a:lstStyle/>
+          <a:p>
+            <a:pPr indent="0" marL="0">
+              <a:buNone/>
+            </a:pPr>
+            <a:r>
+              <a:rPr lang="en-US" sz="1350" b="1" dirty="0">
+                <a:solidFill>
+                  <a:schemeClr val="tx1"/>
+                </a:solidFill>
+              </a:rPr>
+              <a:t>HTTPS · rollar · audit</a:t>
+            </a:r>
+            <a:endParaRPr lang="en-US" sz="1350" dirty="0"/>
+          </a:p>
+        </p:txBody>
+      </p:sp>
+      <p:sp>
+        <p:nvSpPr>
+          <p:cNvPr id="44" name="Text 36"/>
+          <p:cNvSpPr txBox="1"/>
+          <p:nvPr/>
+        </p:nvSpPr>
+        <p:spPr>
+          <a:xfrm>
+            <a:off x="7726680" y="4498848"/>
+            <a:ext cx="3916375" cy="457200"/>
+          </a:xfrm>
+          <a:prstGeom prst="rect">
+            <a:avLst/>
+          </a:prstGeom>
+          <a:noFill/>
+          <a:ln/>
+        </p:spPr>
+        <p:txBody>
+          <a:bodyPr wrap="square" lIns="0" tIns="0" rIns="0" bIns="0" rtlCol="0" anchor="t"/>
+          <a:lstStyle/>
+          <a:p>
+            <a:pPr indent="0" marL="0">
+              <a:buNone/>
+            </a:pPr>
+            <a:r>
+              <a:rPr lang="en-US" sz="1100" dirty="0">
+                <a:solidFill>
+                  <a:schemeClr val="accent6"/>
+                </a:solidFill>
+              </a:rPr>
+              <a:t>Loglarda shaxsiy maʼlumot yoʻq</a:t>
+            </a:r>
+            <a:endParaRPr lang="en-US" sz="1100" dirty="0"/>
+          </a:p>
+        </p:txBody>
+      </p:sp>
+      <p:sp>
+        <p:nvSpPr>
+          <p:cNvPr id="45" name="Shape 37"/>
+          <p:cNvSpPr/>
+          <p:nvPr/>
+        </p:nvSpPr>
+        <p:spPr>
+          <a:xfrm>
+            <a:off x="7086600" y="5120640"/>
+            <a:ext cx="475488" cy="475488"/>
+          </a:xfrm>
+          <a:prstGeom prst="roundRect">
+            <a:avLst>
+              <a:gd name="adj" fmla="val 24000"/>
+            </a:avLst>
+          </a:prstGeom>
+          <a:solidFill>
+            <a:schemeClr val="accent3"/>
+          </a:solidFill>
+          <a:ln/>
+        </p:spPr>
+      </p:sp>
+      <p:pic>
+        <p:nvPicPr>
+          <p:cNvPr id="46" name="Image 5" descr="preencoded.png">    </p:cNvPr>
+          <p:cNvPicPr>
+            <a:picLocks noChangeAspect="1"/>
+          </p:cNvPicPr>
+          <p:nvPr/>
+        </p:nvPicPr>
+        <p:blipFill>
+          <a:blip r:embed="rId6"/>
+          <a:stretch>
+            <a:fillRect/>
+          </a:stretch>
+        </p:blipFill>
+        <p:spPr>
+          <a:xfrm>
+            <a:off x="7200717" y="5234757"/>
+            <a:ext cx="247254" cy="247254"/>
+          </a:xfrm>
+          <a:prstGeom prst="rect">
+            <a:avLst/>
+          </a:prstGeom>
+        </p:spPr>
+      </p:pic>
+      <p:sp>
+        <p:nvSpPr>
+          <p:cNvPr id="47" name="Text 38"/>
+          <p:cNvSpPr txBox="1"/>
+          <p:nvPr/>
+        </p:nvSpPr>
+        <p:spPr>
+          <a:xfrm>
+            <a:off x="7726680" y="5093208"/>
+            <a:ext cx="3916375" cy="292608"/>
+          </a:xfrm>
+          <a:prstGeom prst="rect">
+            <a:avLst/>
+          </a:prstGeom>
+          <a:noFill/>
+          <a:ln/>
+        </p:spPr>
+        <p:txBody>
+          <a:bodyPr wrap="square" lIns="0" tIns="0" rIns="0" bIns="0" rtlCol="0" anchor="t"/>
+          <a:lstStyle/>
+          <a:p>
+            <a:pPr indent="0" marL="0">
+              <a:buNone/>
+            </a:pPr>
+            <a:r>
+              <a:rPr lang="en-US" sz="1350" b="1" dirty="0">
+                <a:solidFill>
+                  <a:schemeClr val="tx1"/>
+                </a:solidFill>
+              </a:rPr>
+              <a:t>Pilotdan oldin: server Oʻzbekistonda</a:t>
+            </a:r>
+            <a:endParaRPr lang="en-US" sz="1350" dirty="0"/>
+          </a:p>
+        </p:txBody>
+      </p:sp>
+      <p:sp>
+        <p:nvSpPr>
+          <p:cNvPr id="48" name="Text 39"/>
+          <p:cNvSpPr txBox="1"/>
+          <p:nvPr/>
+        </p:nvSpPr>
+        <p:spPr>
+          <a:xfrm>
+            <a:off x="7726680" y="5385816"/>
+            <a:ext cx="3916375" cy="457200"/>
+          </a:xfrm>
+          <a:prstGeom prst="rect">
+            <a:avLst/>
+          </a:prstGeom>
+          <a:noFill/>
+          <a:ln/>
+        </p:spPr>
+        <p:txBody>
+          <a:bodyPr wrap="square" lIns="0" tIns="0" rIns="0" bIns="0" rtlCol="0" anchor="t"/>
+          <a:lstStyle/>
+          <a:p>
+            <a:pPr indent="0" marL="0">
+              <a:buNone/>
+            </a:pPr>
+            <a:r>
+              <a:rPr lang="en-US" sz="1100" dirty="0">
+                <a:solidFill>
+                  <a:schemeClr val="accent6"/>
+                </a:solidFill>
+              </a:rPr>
+              <a:t>«Shaxsga doir maʼlumotlar toʻgʻrisida»gi qonun, 27¹-modda</a:t>
+            </a:r>
+            <a:endParaRPr lang="en-US" sz="1100" dirty="0"/>
+          </a:p>
+        </p:txBody>
+      </p:sp>
+      <p:sp>
+        <p:nvSpPr>
+          <p:cNvPr id="25" name="Slide Number Placeholder 0"/>
+          <p:cNvSpPr>
+            <a:spLocks noGrp="1"/>
+          </p:cNvSpPr>
+          <p:nvPr>
+            <p:ph type="sldNum" sz="quarter" idx="4294967295"/>
+          </p:nvPr>
+        </p:nvSpPr>
+        <p:spPr>
+          <a:xfrm>
+            <a:off x="11094415" y="6419088"/>
+            <a:ext cx="548640" cy="274320"/>
+          </a:xfrm>
+          <a:prstGeom prst="rect">
+            <a:avLst/>
+          </a:prstGeom>
+          <a:extLst>
+            <a:ext uri="{C572A759-6A51-4108-AA02-DFA0A04FC94B}">
+              <ma14:wrappingTextBoxFlag xmlns:ma14="http://schemas.microsoft.com/office/mac/drawingml/2011/main" val="0"/>
+            </a:ext>
+          </a:extLst>
+        </p:spPr>
+        <p:txBody>
+          <a:bodyPr/>
+          <a:lstStyle>
+            <a:lvl1pPr>
+              <a:defRPr sz="900">
+                <a:solidFill>
+                  <a:schemeClr val="accent6"/>
+                </a:solidFill>
+              </a:defRPr>
+            </a:lvl1pPr>
+          </a:lstStyle>
+          <a:p>
+            <a:pPr algn="r"/>
+            <a:fld id="{F7021451-1387-4CA6-816F-3879F97B5CBC}" type="slidenum">
+              <a:rPr b="0" lang="en-US"/>
+              <a:t>12</a:t>
+            </a:fld>
+            <a:endParaRPr lang="en-US"/>
+          </a:p>
+        </p:txBody>
+      </p:sp>
+    </p:spTree>
+  </p:cSld>
+  <p:clrMapOvr>
+    <a:masterClrMapping/>
+  </p:clrMapOvr>
+  <p:transition spd="med">
+    <p:fade/>
+  </p:transition>
+</p:sld>
+</file>
+
+<file path=ppt/slides/slide13.xml><?xml version="1.0" encoding="utf-8"?>
+<p:sld xmlns:a="http://schemas.openxmlformats.org/drawingml/2006/main" xmlns:r="http://schemas.openxmlformats.org/officeDocument/2006/relationships" xmlns:p="http://schemas.openxmlformats.org/presentationml/2006/main">
+  <p:cSld name="Slide 13">
+    <p:spTree>
+      <p:nvGrpSpPr>
+        <p:cNvPr id="1" name=""/>
+        <p:cNvGrpSpPr/>
+        <p:nvPr/>
+      </p:nvGrpSpPr>
+      <p:grpSpPr>
+        <a:xfrm>
+          <a:off x="0" y="0"/>
+          <a:ext cx="0" cy="0"/>
+          <a:chOff x="0" y="0"/>
+          <a:chExt cx="0" cy="0"/>
+        </a:xfrm>
+      </p:grpSpPr>
+      <p:sp>
+        <p:nvSpPr>
+          <p:cNvPr id="2" name="Text 1"/>
+          <p:cNvSpPr/>
+          <p:nvPr>
+            <p:ph idx="101" type="body" hasCustomPrompt="1"/>
+          </p:nvPr>
+        </p:nvSpPr>
+        <p:spPr>
+          <a:xfrm>
+            <a:off x="548640" y="384048"/>
+            <a:ext cx="8229600" cy="274320"/>
+          </a:xfrm>
+          <a:prstGeom prst="rect">
+            <a:avLst/>
+          </a:prstGeom>
+          <a:noFill/>
+          <a:ln/>
+        </p:spPr>
+        <p:txBody>
+          <a:bodyPr wrap="square" lIns="0" tIns="0" rIns="0" bIns="0" rtlCol="0"/>
+          <a:lstStyle/>
+          <a:p>
+            <a:pPr indent="0" marL="0">
+              <a:buNone/>
+            </a:pPr>
+            <a:r>
+              <a:rPr lang="en-US" sz="1100" b="1" spc="200" kern="0" dirty="0">
+                <a:solidFill>
                   <a:schemeClr val="accent5"/>
                 </a:solidFill>
               </a:rPr>
@@ -6518,8 +8486,8 @@
         </p:nvSpPr>
         <p:spPr>
           <a:xfrm>
-            <a:off x="548640" y="5669280"/>
-            <a:ext cx="6400800" cy="457200"/>
+            <a:off x="548640" y="5532120"/>
+            <a:ext cx="5760720" cy="548640"/>
           </a:xfrm>
           <a:prstGeom prst="rect">
             <a:avLst/>
@@ -6548,37 +8516,119 @@
       </p:sp>
       <p:sp>
         <p:nvSpPr>
-          <p:cNvPr id="35" name="Text 23"/>
-          <p:cNvSpPr txBox="1"/>
-          <p:nvPr/>
-        </p:nvSpPr>
-        <p:spPr>
-          <a:xfrm>
-            <a:off x="7985455" y="5669280"/>
-            <a:ext cx="3657600" cy="457200"/>
-          </a:xfrm>
-          <a:prstGeom prst="rect">
-            <a:avLst/>
-          </a:prstGeom>
-          <a:noFill/>
-          <a:ln/>
-        </p:spPr>
-        <p:txBody>
-          <a:bodyPr wrap="square" lIns="0" tIns="0" rIns="0" bIns="0" rtlCol="0" anchor="ctr"/>
+          <p:cNvPr id="35" name="qr-frame"/>
+          <p:cNvSpPr/>
+          <p:nvPr/>
+        </p:nvSpPr>
+        <p:spPr>
+          <a:xfrm>
+            <a:off x="10564063" y="5285232"/>
+            <a:ext cx="1078992" cy="1078992"/>
+          </a:xfrm>
+          <a:prstGeom prst="roundRect">
+            <a:avLst>
+              <a:gd name="adj" fmla="val 8475"/>
+            </a:avLst>
+          </a:prstGeom>
+          <a:solidFill>
+            <a:schemeClr val="bg1"/>
+          </a:solidFill>
+          <a:ln/>
+        </p:spPr>
+      </p:sp>
+      <p:pic>
+        <p:nvPicPr>
+          <p:cNvPr id="36" name="Image 9" descr="QR-kod: nafas.plagiatx.uz">    </p:cNvPr>
+          <p:cNvPicPr>
+            <a:picLocks noChangeAspect="1"/>
+          </p:cNvPicPr>
+          <p:nvPr/>
+        </p:nvPicPr>
+        <p:blipFill>
+          <a:blip r:embed="rId10"/>
+          <a:stretch>
+            <a:fillRect/>
+          </a:stretch>
+        </p:blipFill>
+        <p:spPr>
+          <a:xfrm>
+            <a:off x="10628071" y="5349240"/>
+            <a:ext cx="950976" cy="950976"/>
+          </a:xfrm>
+          <a:prstGeom prst="rect">
+            <a:avLst/>
+          </a:prstGeom>
+        </p:spPr>
+      </p:pic>
+      <p:sp>
+        <p:nvSpPr>
+          <p:cNvPr id="37" name="Text 24"/>
+          <p:cNvSpPr txBox="1"/>
+          <p:nvPr/>
+        </p:nvSpPr>
+        <p:spPr>
+          <a:xfrm>
+            <a:off x="6677863" y="5468112"/>
+            <a:ext cx="3703320" cy="292608"/>
+          </a:xfrm>
+          <a:prstGeom prst="rect">
+            <a:avLst/>
+          </a:prstGeom>
+          <a:noFill/>
+          <a:ln/>
+        </p:spPr>
+        <p:txBody>
+          <a:bodyPr wrap="square" lIns="0" tIns="0" rIns="0" bIns="0" rtlCol="0" anchor="t"/>
           <a:lstStyle/>
           <a:p>
             <a:pPr algn="r" indent="0" marL="0">
               <a:buNone/>
             </a:pPr>
             <a:r>
-              <a:rPr lang="en-US" sz="1600" b="1" dirty="0">
+              <a:rPr lang="en-US" sz="1250" dirty="0">
+                <a:solidFill>
+                  <a:schemeClr val="bg2"/>
+                </a:solidFill>
+              </a:rPr>
+              <a:t>Demoni telefoningizda oching</a:t>
+            </a:r>
+            <a:endParaRPr lang="en-US" sz="1250" dirty="0"/>
+          </a:p>
+        </p:txBody>
+      </p:sp>
+      <p:sp>
+        <p:nvSpPr>
+          <p:cNvPr id="38" name="Text 25"/>
+          <p:cNvSpPr txBox="1"/>
+          <p:nvPr/>
+        </p:nvSpPr>
+        <p:spPr>
+          <a:xfrm>
+            <a:off x="6677863" y="5760720"/>
+            <a:ext cx="3703320" cy="411480"/>
+          </a:xfrm>
+          <a:prstGeom prst="rect">
+            <a:avLst/>
+          </a:prstGeom>
+          <a:noFill/>
+          <a:ln/>
+        </p:spPr>
+        <p:txBody>
+          <a:bodyPr wrap="square" lIns="0" tIns="0" rIns="0" bIns="0" rtlCol="0" anchor="t"/>
+          <a:lstStyle/>
+          <a:p>
+            <a:pPr algn="r" indent="0" marL="0">
+              <a:buNone/>
+            </a:pPr>
+            <a:r>
+              <a:rPr lang="en-US" sz="1800" b="1" dirty="0">
                 <a:solidFill>
                   <a:schemeClr val="accent5"/>
                 </a:solidFill>
               </a:rPr>
               <a:t>nafas.plagiatx.uz</a:t>
             </a:r>
-            <a:endParaRPr lang="en-US" sz="1600" dirty="0"/>
+            <a:endParaRPr lang="en-US" sz="1800" dirty="0"/>
           </a:p>
         </p:txBody>
       </p:sp>
@@ -6621,7 +8671,7 @@
             <a:pPr algn="r"/>
             <a:fld id="{F7021451-1387-4CA6-816F-3879F97B5CBC}" type="slidenum">
               <a:rPr b="0" lang="en-US"/>
-              <a:t>12</a:t>
+              <a:t>13</a:t>
             </a:fld>
             <a:endParaRPr lang="en-US"/>
           </a:p>
@@ -6632,6 +8682,9 @@
   <p:clrMapOvr>
     <a:masterClrMapping/>
   </p:clrMapOvr>
+  <p:transition spd="med">
+    <p:fade/>
+  </p:transition>
 </p:sld>
 </file>
 
@@ -6736,12 +8789,12 @@
         </p:nvSpPr>
         <p:spPr>
           <a:xfrm>
-            <a:off x="548640" y="1554480"/>
-            <a:ext cx="3545738" cy="2011680"/>
+            <a:off x="548640" y="1481328"/>
+            <a:ext cx="4069080" cy="841248"/>
           </a:xfrm>
           <a:prstGeom prst="roundRect">
             <a:avLst>
-              <a:gd name="adj" fmla="val 5455"/>
+              <a:gd name="adj" fmla="val 13043"/>
             </a:avLst>
           </a:prstGeom>
           <a:solidFill>
@@ -6758,31 +8811,31 @@
         </p:nvSpPr>
         <p:spPr>
           <a:xfrm>
-            <a:off x="822960" y="1755648"/>
-            <a:ext cx="2997098" cy="777240"/>
-          </a:xfrm>
-          <a:prstGeom prst="rect">
-            <a:avLst/>
-          </a:prstGeom>
-          <a:noFill/>
-          <a:ln/>
-        </p:spPr>
-        <p:txBody>
-          <a:bodyPr wrap="square" lIns="0" tIns="0" rIns="0" bIns="0" rtlCol="0" anchor="t"/>
-          <a:lstStyle/>
-          <a:p>
-            <a:pPr indent="0" marL="0">
-              <a:buNone/>
-            </a:pPr>
-            <a:r>
-              <a:rPr lang="en-US" sz="4400" b="1" dirty="0">
+            <a:off x="777240" y="1481328"/>
+            <a:ext cx="1783080" cy="841248"/>
+          </a:xfrm>
+          <a:prstGeom prst="rect">
+            <a:avLst/>
+          </a:prstGeom>
+          <a:noFill/>
+          <a:ln/>
+        </p:spPr>
+        <p:txBody>
+          <a:bodyPr wrap="square" lIns="0" tIns="0" rIns="0" bIns="0" rtlCol="0" anchor="ctr"/>
+          <a:lstStyle/>
+          <a:p>
+            <a:pPr indent="0" marL="0">
+              <a:buNone/>
+            </a:pPr>
+            <a:r>
+              <a:rPr lang="en-US" sz="2800" b="1" dirty="0">
                 <a:solidFill>
                   <a:schemeClr val="accent5"/>
                 </a:solidFill>
               </a:rPr>
               <a:t>3-oʻrin</a:t>
             </a:r>
-            <a:endParaRPr lang="en-US" sz="4400" dirty="0"/>
+            <a:endParaRPr lang="en-US" sz="2800" dirty="0"/>
           </a:p>
         </p:txBody>
       </p:sp>
@@ -6794,84 +8847,68 @@
         </p:nvSpPr>
         <p:spPr>
           <a:xfrm>
-            <a:off x="822960" y="2560320"/>
-            <a:ext cx="2997098" cy="640080"/>
-          </a:xfrm>
-          <a:prstGeom prst="rect">
-            <a:avLst/>
-          </a:prstGeom>
-          <a:noFill/>
-          <a:ln/>
-        </p:spPr>
-        <p:txBody>
-          <a:bodyPr wrap="square" lIns="0" tIns="0" rIns="0" bIns="0" rtlCol="0" anchor="t"/>
-          <a:lstStyle/>
-          <a:p>
-            <a:pPr indent="0" marL="0">
-              <a:buNone/>
-            </a:pPr>
-            <a:r>
-              <a:rPr lang="en-US" sz="1300" dirty="0">
+            <a:off x="2560320" y="1481328"/>
+            <a:ext cx="1920240" cy="841248"/>
+          </a:xfrm>
+          <a:prstGeom prst="rect">
+            <a:avLst/>
+          </a:prstGeom>
+          <a:noFill/>
+          <a:ln/>
+        </p:spPr>
+        <p:txBody>
+          <a:bodyPr wrap="square" lIns="0" tIns="0" rIns="0" bIns="0" rtlCol="0" anchor="ctr"/>
+          <a:lstStyle/>
+          <a:p>
+            <a:pPr indent="0" marL="0">
+              <a:spcAft>
+                <a:spcPts val="200"/>
+              </a:spcAft>
+              <a:buNone/>
+            </a:pPr>
+            <a:r>
+              <a:rPr lang="en-US" sz="1050" dirty="0">
                 <a:solidFill>
                   <a:schemeClr val="bg1"/>
                 </a:solidFill>
               </a:rPr>
               <a:t>oʻlim sabablari orasida dunyoda; 3,4 mln oʻlim (2023)</a:t>
             </a:r>
-            <a:endParaRPr lang="en-US" sz="1300" dirty="0"/>
-          </a:p>
-        </p:txBody>
-      </p:sp>
-      <p:sp>
-        <p:nvSpPr>
-          <p:cNvPr id="8" name="Text 5"/>
-          <p:cNvSpPr txBox="1"/>
-          <p:nvPr/>
-        </p:nvSpPr>
-        <p:spPr>
-          <a:xfrm>
-            <a:off x="822960" y="3200400"/>
-            <a:ext cx="2997098" cy="237744"/>
-          </a:xfrm>
-          <a:prstGeom prst="rect">
-            <a:avLst/>
-          </a:prstGeom>
-          <a:noFill/>
-          <a:ln/>
-        </p:spPr>
-        <p:txBody>
-          <a:bodyPr wrap="square" lIns="0" tIns="0" rIns="0" bIns="0" rtlCol="0" anchor="t"/>
-          <a:lstStyle/>
-          <a:p>
-            <a:pPr indent="0" marL="0">
-              <a:buNone/>
-            </a:pPr>
-            <a:r>
-              <a:rPr lang="en-US" sz="900" dirty="0">
+            <a:endParaRPr lang="en-US" sz="1050" dirty="0"/>
+          </a:p>
+          <a:p>
+            <a:pPr indent="0" marL="0">
+              <a:spcAft>
+                <a:spcPts val="200"/>
+              </a:spcAft>
+              <a:buNone/>
+            </a:pPr>
+            <a:r>
+              <a:rPr lang="en-US" sz="850" dirty="0">
                 <a:solidFill>
                   <a:schemeClr val="accent5"/>
                 </a:solidFill>
               </a:rPr>
               <a:t>JSST, 2026</a:t>
             </a:r>
-            <a:endParaRPr lang="en-US" sz="900" dirty="0"/>
-          </a:p>
-        </p:txBody>
-      </p:sp>
-      <p:sp>
-        <p:nvSpPr>
-          <p:cNvPr id="9" name="stat2"/>
+            <a:endParaRPr lang="en-US" sz="1050" dirty="0"/>
+          </a:p>
+        </p:txBody>
+      </p:sp>
+      <p:sp>
+        <p:nvSpPr>
+          <p:cNvPr id="8" name="stat2"/>
           <p:cNvSpPr/>
           <p:nvPr/>
         </p:nvSpPr>
         <p:spPr>
           <a:xfrm>
-            <a:off x="4322978" y="1554480"/>
-            <a:ext cx="3545738" cy="2011680"/>
+            <a:off x="548640" y="2432304"/>
+            <a:ext cx="4069080" cy="841248"/>
           </a:xfrm>
           <a:prstGeom prst="roundRect">
             <a:avLst>
-              <a:gd name="adj" fmla="val 5455"/>
+              <a:gd name="adj" fmla="val 13043"/>
             </a:avLst>
           </a:prstGeom>
           <a:solidFill>
@@ -6882,126 +8919,110 @@
       </p:sp>
       <p:sp>
         <p:nvSpPr>
+          <p:cNvPr id="9" name="Text 6"/>
+          <p:cNvSpPr txBox="1"/>
+          <p:nvPr/>
+        </p:nvSpPr>
+        <p:spPr>
+          <a:xfrm>
+            <a:off x="777240" y="2432304"/>
+            <a:ext cx="1783080" cy="841248"/>
+          </a:xfrm>
+          <a:prstGeom prst="rect">
+            <a:avLst/>
+          </a:prstGeom>
+          <a:noFill/>
+          <a:ln/>
+        </p:spPr>
+        <p:txBody>
+          <a:bodyPr wrap="square" lIns="0" tIns="0" rIns="0" bIns="0" rtlCol="0" anchor="ctr"/>
+          <a:lstStyle/>
+          <a:p>
+            <a:pPr indent="0" marL="0">
+              <a:buNone/>
+            </a:pPr>
+            <a:r>
+              <a:rPr lang="en-US" sz="2800" b="1" dirty="0">
+                <a:solidFill>
+                  <a:schemeClr val="accent1"/>
+                </a:solidFill>
+              </a:rPr>
+              <a:t>392 mln</a:t>
+            </a:r>
+            <a:endParaRPr lang="en-US" sz="2800" dirty="0"/>
+          </a:p>
+        </p:txBody>
+      </p:sp>
+      <p:sp>
+        <p:nvSpPr>
           <p:cNvPr id="10" name="Text 7"/>
           <p:cNvSpPr txBox="1"/>
           <p:nvPr/>
         </p:nvSpPr>
         <p:spPr>
           <a:xfrm>
-            <a:off x="4597298" y="1755648"/>
-            <a:ext cx="2997098" cy="777240"/>
-          </a:xfrm>
-          <a:prstGeom prst="rect">
-            <a:avLst/>
-          </a:prstGeom>
-          <a:noFill/>
-          <a:ln/>
-        </p:spPr>
-        <p:txBody>
-          <a:bodyPr wrap="square" lIns="0" tIns="0" rIns="0" bIns="0" rtlCol="0" anchor="t"/>
-          <a:lstStyle/>
-          <a:p>
-            <a:pPr indent="0" marL="0">
-              <a:buNone/>
-            </a:pPr>
-            <a:r>
-              <a:rPr lang="en-US" sz="4400" b="1" dirty="0">
-                <a:solidFill>
-                  <a:schemeClr val="accent1"/>
-                </a:solidFill>
-              </a:rPr>
-              <a:t>392 mln</a:t>
-            </a:r>
-            <a:endParaRPr lang="en-US" sz="4400" dirty="0"/>
-          </a:p>
-        </p:txBody>
-      </p:sp>
-      <p:sp>
-        <p:nvSpPr>
-          <p:cNvPr id="11" name="Text 8"/>
-          <p:cNvSpPr txBox="1"/>
-          <p:nvPr/>
-        </p:nvSpPr>
-        <p:spPr>
-          <a:xfrm>
-            <a:off x="4597298" y="2560320"/>
-            <a:ext cx="2997098" cy="640080"/>
-          </a:xfrm>
-          <a:prstGeom prst="rect">
-            <a:avLst/>
-          </a:prstGeom>
-          <a:noFill/>
-          <a:ln/>
-        </p:spPr>
-        <p:txBody>
-          <a:bodyPr wrap="square" lIns="0" tIns="0" rIns="0" bIns="0" rtlCol="0" anchor="t"/>
-          <a:lstStyle/>
-          <a:p>
-            <a:pPr indent="0" marL="0">
-              <a:buNone/>
-            </a:pPr>
-            <a:r>
-              <a:rPr lang="en-US" sz="1300" dirty="0">
+            <a:off x="2560320" y="2432304"/>
+            <a:ext cx="1920240" cy="841248"/>
+          </a:xfrm>
+          <a:prstGeom prst="rect">
+            <a:avLst/>
+          </a:prstGeom>
+          <a:noFill/>
+          <a:ln/>
+        </p:spPr>
+        <p:txBody>
+          <a:bodyPr wrap="square" lIns="0" tIns="0" rIns="0" bIns="0" rtlCol="0" anchor="ctr"/>
+          <a:lstStyle/>
+          <a:p>
+            <a:pPr indent="0" marL="0">
+              <a:spcAft>
+                <a:spcPts val="200"/>
+              </a:spcAft>
+              <a:buNone/>
+            </a:pPr>
+            <a:r>
+              <a:rPr lang="en-US" sz="1050" dirty="0">
                 <a:solidFill>
                   <a:schemeClr val="tx1"/>
                 </a:solidFill>
               </a:rPr>
               <a:t>30–79 yoshda OSOK (10,3%); 80% — kam va oʻrta daromadli davlatlarda</a:t>
             </a:r>
-            <a:endParaRPr lang="en-US" sz="1300" dirty="0"/>
-          </a:p>
-        </p:txBody>
-      </p:sp>
-      <p:sp>
-        <p:nvSpPr>
-          <p:cNvPr id="12" name="Text 9"/>
-          <p:cNvSpPr txBox="1"/>
-          <p:nvPr/>
-        </p:nvSpPr>
-        <p:spPr>
-          <a:xfrm>
-            <a:off x="4597298" y="3200400"/>
-            <a:ext cx="2997098" cy="237744"/>
-          </a:xfrm>
-          <a:prstGeom prst="rect">
-            <a:avLst/>
-          </a:prstGeom>
-          <a:noFill/>
-          <a:ln/>
-        </p:spPr>
-        <p:txBody>
-          <a:bodyPr wrap="square" lIns="0" tIns="0" rIns="0" bIns="0" rtlCol="0" anchor="t"/>
-          <a:lstStyle/>
-          <a:p>
-            <a:pPr indent="0" marL="0">
-              <a:buNone/>
-            </a:pPr>
-            <a:r>
-              <a:rPr lang="en-US" sz="900" dirty="0">
+            <a:endParaRPr lang="en-US" sz="1050" dirty="0"/>
+          </a:p>
+          <a:p>
+            <a:pPr indent="0" marL="0">
+              <a:spcAft>
+                <a:spcPts val="200"/>
+              </a:spcAft>
+              <a:buNone/>
+            </a:pPr>
+            <a:r>
+              <a:rPr lang="en-US" sz="850" dirty="0">
                 <a:solidFill>
                   <a:schemeClr val="accent6"/>
                 </a:solidFill>
               </a:rPr>
               <a:t>Adeloye va b., Lancet Respir Med, 2022</a:t>
             </a:r>
-            <a:endParaRPr lang="en-US" sz="900" dirty="0"/>
-          </a:p>
-        </p:txBody>
-      </p:sp>
-      <p:sp>
-        <p:nvSpPr>
-          <p:cNvPr id="13" name="stat3"/>
+            <a:endParaRPr lang="en-US" sz="1050" dirty="0"/>
+          </a:p>
+        </p:txBody>
+      </p:sp>
+      <p:sp>
+        <p:nvSpPr>
+          <p:cNvPr id="11" name="stat3"/>
           <p:cNvSpPr/>
           <p:nvPr/>
         </p:nvSpPr>
         <p:spPr>
           <a:xfrm>
-            <a:off x="8097317" y="1554480"/>
-            <a:ext cx="3545738" cy="2011680"/>
+            <a:off x="548640" y="3383280"/>
+            <a:ext cx="4069080" cy="841248"/>
           </a:xfrm>
           <a:prstGeom prst="roundRect">
             <a:avLst>
-              <a:gd name="adj" fmla="val 5455"/>
+              <a:gd name="adj" fmla="val 13043"/>
             </a:avLst>
           </a:prstGeom>
           <a:solidFill>
@@ -7012,162 +9033,110 @@
       </p:sp>
       <p:sp>
         <p:nvSpPr>
-          <p:cNvPr id="14" name="Text 11"/>
-          <p:cNvSpPr txBox="1"/>
-          <p:nvPr/>
-        </p:nvSpPr>
-        <p:spPr>
-          <a:xfrm>
-            <a:off x="8371637" y="1755648"/>
-            <a:ext cx="2997098" cy="777240"/>
-          </a:xfrm>
-          <a:prstGeom prst="rect">
-            <a:avLst/>
-          </a:prstGeom>
-          <a:noFill/>
-          <a:ln/>
-        </p:spPr>
-        <p:txBody>
-          <a:bodyPr wrap="square" lIns="0" tIns="0" rIns="0" bIns="0" rtlCol="0" anchor="t"/>
-          <a:lstStyle/>
-          <a:p>
-            <a:pPr indent="0" marL="0">
-              <a:buNone/>
-            </a:pPr>
-            <a:r>
-              <a:rPr lang="en-US" sz="4400" b="1" dirty="0">
+          <p:cNvPr id="12" name="Text 9"/>
+          <p:cNvSpPr txBox="1"/>
+          <p:nvPr/>
+        </p:nvSpPr>
+        <p:spPr>
+          <a:xfrm>
+            <a:off x="777240" y="3383280"/>
+            <a:ext cx="1783080" cy="841248"/>
+          </a:xfrm>
+          <a:prstGeom prst="rect">
+            <a:avLst/>
+          </a:prstGeom>
+          <a:noFill/>
+          <a:ln/>
+        </p:spPr>
+        <p:txBody>
+          <a:bodyPr wrap="square" lIns="0" tIns="0" rIns="0" bIns="0" rtlCol="0" anchor="ctr"/>
+          <a:lstStyle/>
+          <a:p>
+            <a:pPr indent="0" marL="0">
+              <a:buNone/>
+            </a:pPr>
+            <a:r>
+              <a:rPr lang="en-US" sz="2800" b="1" dirty="0">
                 <a:solidFill>
                   <a:schemeClr val="accent1"/>
                 </a:solidFill>
               </a:rPr>
               <a:t>50–98%</a:t>
             </a:r>
-            <a:endParaRPr lang="en-US" sz="4400" dirty="0"/>
-          </a:p>
-        </p:txBody>
-      </p:sp>
-      <p:sp>
-        <p:nvSpPr>
-          <p:cNvPr id="15" name="Text 12"/>
-          <p:cNvSpPr txBox="1"/>
-          <p:nvPr/>
-        </p:nvSpPr>
-        <p:spPr>
-          <a:xfrm>
-            <a:off x="8371637" y="2560320"/>
-            <a:ext cx="2997098" cy="640080"/>
-          </a:xfrm>
-          <a:prstGeom prst="rect">
-            <a:avLst/>
-          </a:prstGeom>
-          <a:noFill/>
-          <a:ln/>
-        </p:spPr>
-        <p:txBody>
-          <a:bodyPr wrap="square" lIns="0" tIns="0" rIns="0" bIns="0" rtlCol="0" anchor="t"/>
-          <a:lstStyle/>
-          <a:p>
-            <a:pPr indent="0" marL="0">
-              <a:buNone/>
-            </a:pPr>
-            <a:r>
-              <a:rPr lang="en-US" sz="1300" dirty="0">
+            <a:endParaRPr lang="en-US" sz="2800" dirty="0"/>
+          </a:p>
+        </p:txBody>
+      </p:sp>
+      <p:sp>
+        <p:nvSpPr>
+          <p:cNvPr id="13" name="Text 10"/>
+          <p:cNvSpPr txBox="1"/>
+          <p:nvPr/>
+        </p:nvSpPr>
+        <p:spPr>
+          <a:xfrm>
+            <a:off x="2560320" y="3383280"/>
+            <a:ext cx="1920240" cy="841248"/>
+          </a:xfrm>
+          <a:prstGeom prst="rect">
+            <a:avLst/>
+          </a:prstGeom>
+          <a:noFill/>
+          <a:ln/>
+        </p:spPr>
+        <p:txBody>
+          <a:bodyPr wrap="square" lIns="0" tIns="0" rIns="0" bIns="0" rtlCol="0" anchor="ctr"/>
+          <a:lstStyle/>
+          <a:p>
+            <a:pPr indent="0" marL="0">
+              <a:spcAft>
+                <a:spcPts val="200"/>
+              </a:spcAft>
+              <a:buNone/>
+            </a:pPr>
+            <a:r>
+              <a:rPr lang="en-US" sz="1050" dirty="0">
                 <a:solidFill>
                   <a:schemeClr val="tx1"/>
                 </a:solidFill>
               </a:rPr>
               <a:t>OSOK holatlari tashxissiz qoladi</a:t>
             </a:r>
-            <a:endParaRPr lang="en-US" sz="1300" dirty="0"/>
-          </a:p>
-        </p:txBody>
-      </p:sp>
-      <p:sp>
-        <p:nvSpPr>
-          <p:cNvPr id="16" name="Text 13"/>
-          <p:cNvSpPr txBox="1"/>
-          <p:nvPr/>
-        </p:nvSpPr>
-        <p:spPr>
-          <a:xfrm>
-            <a:off x="8371637" y="3200400"/>
-            <a:ext cx="2997098" cy="237744"/>
-          </a:xfrm>
-          <a:prstGeom prst="rect">
-            <a:avLst/>
-          </a:prstGeom>
-          <a:noFill/>
-          <a:ln/>
-        </p:spPr>
-        <p:txBody>
-          <a:bodyPr wrap="square" lIns="0" tIns="0" rIns="0" bIns="0" rtlCol="0" anchor="t"/>
-          <a:lstStyle/>
-          <a:p>
-            <a:pPr indent="0" marL="0">
-              <a:buNone/>
-            </a:pPr>
-            <a:r>
-              <a:rPr lang="en-US" sz="900" dirty="0">
+            <a:endParaRPr lang="en-US" sz="1050" dirty="0"/>
+          </a:p>
+          <a:p>
+            <a:pPr indent="0" marL="0">
+              <a:spcAft>
+                <a:spcPts val="200"/>
+              </a:spcAft>
+              <a:buNone/>
+            </a:pPr>
+            <a:r>
+              <a:rPr lang="en-US" sz="850" dirty="0">
                 <a:solidFill>
                   <a:schemeClr val="accent6"/>
                 </a:solidFill>
               </a:rPr>
               <a:t>Lamprecht va b., Chest, 2015 (BOLD)</a:t>
             </a:r>
-            <a:endParaRPr lang="en-US" sz="900" dirty="0"/>
-          </a:p>
-        </p:txBody>
-      </p:sp>
-      <p:sp>
-        <p:nvSpPr>
-          <p:cNvPr id="17" name="Text 14"/>
-          <p:cNvSpPr txBox="1"/>
-          <p:nvPr/>
-        </p:nvSpPr>
-        <p:spPr>
-          <a:xfrm>
-            <a:off x="548640" y="3794760"/>
-            <a:ext cx="5486400" cy="292608"/>
-          </a:xfrm>
-          <a:prstGeom prst="rect">
-            <a:avLst/>
-          </a:prstGeom>
-          <a:noFill/>
-          <a:ln/>
-        </p:spPr>
-        <p:txBody>
-          <a:bodyPr wrap="square" lIns="0" tIns="0" rIns="0" bIns="0" rtlCol="0" anchor="t"/>
-          <a:lstStyle/>
-          <a:p>
-            <a:pPr indent="0" marL="0">
-              <a:buNone/>
-            </a:pPr>
-            <a:r>
-              <a:rPr lang="en-US" sz="1400" b="1" dirty="0">
-                <a:solidFill>
-                  <a:schemeClr val="tx1"/>
-                </a:solidFill>
-              </a:rPr>
-              <a:t>Birlamchi boʻgʻinda 4 toʻsiq</a:t>
-            </a:r>
-            <a:endParaRPr lang="en-US" sz="1400" dirty="0"/>
-          </a:p>
-        </p:txBody>
-      </p:sp>
-      <p:sp>
-        <p:nvSpPr>
-          <p:cNvPr id="18" name="Shape 15"/>
+            <a:endParaRPr lang="en-US" sz="1050" dirty="0"/>
+          </a:p>
+        </p:txBody>
+      </p:sp>
+      <p:sp>
+        <p:nvSpPr>
+          <p:cNvPr id="14" name="chart-card"/>
           <p:cNvSpPr/>
           <p:nvPr/>
         </p:nvSpPr>
         <p:spPr>
           <a:xfrm>
-            <a:off x="548640" y="4160520"/>
-            <a:ext cx="2636444" cy="1051560"/>
+            <a:off x="4846320" y="1481328"/>
+            <a:ext cx="6796735" cy="2743200"/>
           </a:xfrm>
           <a:prstGeom prst="roundRect">
             <a:avLst>
-              <a:gd name="adj" fmla="val 10435"/>
+              <a:gd name="adj" fmla="val 4000"/>
             </a:avLst>
           </a:prstGeom>
           <a:solidFill>
@@ -7185,136 +9154,142 @@
       </p:sp>
       <p:sp>
         <p:nvSpPr>
-          <p:cNvPr id="19" name="Shape 16"/>
+          <p:cNvPr id="15" name="Text 12"/>
+          <p:cNvSpPr txBox="1"/>
+          <p:nvPr/>
+        </p:nvSpPr>
+        <p:spPr>
+          <a:xfrm>
+            <a:off x="5074920" y="1609344"/>
+            <a:ext cx="6339535" cy="292608"/>
+          </a:xfrm>
+          <a:prstGeom prst="rect">
+            <a:avLst/>
+          </a:prstGeom>
+          <a:noFill/>
+          <a:ln/>
+        </p:spPr>
+        <p:txBody>
+          <a:bodyPr wrap="square" lIns="0" tIns="0" rIns="0" bIns="0" rtlCol="0" anchor="t"/>
+          <a:lstStyle/>
+          <a:p>
+            <a:pPr indent="0" marL="0">
+              <a:buNone/>
+            </a:pPr>
+            <a:r>
+              <a:rPr lang="en-US" sz="1350" b="1" dirty="0">
+                <a:solidFill>
+                  <a:schemeClr val="tx1"/>
+                </a:solidFill>
+              </a:rPr>
+              <a:t>Yashirin OSOK: spirometriya 3–9 barobar koʻp holat topdi</a:t>
+            </a:r>
+            <a:endParaRPr lang="en-US" sz="1350" dirty="0"/>
+          </a:p>
+        </p:txBody>
+      </p:sp>
+      <p:sp>
+        <p:nvSpPr>
+          <p:cNvPr id="16" name="Text 13"/>
+          <p:cNvSpPr txBox="1"/>
+          <p:nvPr/>
+        </p:nvSpPr>
+        <p:spPr>
+          <a:xfrm>
+            <a:off x="5074920" y="1892808"/>
+            <a:ext cx="6339535" cy="219456"/>
+          </a:xfrm>
+          <a:prstGeom prst="rect">
+            <a:avLst/>
+          </a:prstGeom>
+          <a:noFill/>
+          <a:ln/>
+        </p:spPr>
+        <p:txBody>
+          <a:bodyPr wrap="square" lIns="0" tIns="0" rIns="0" bIns="0" rtlCol="0" anchor="t"/>
+          <a:lstStyle/>
+          <a:p>
+            <a:pPr indent="0" marL="0">
+              <a:buNone/>
+            </a:pPr>
+            <a:r>
+              <a:rPr lang="en-US" sz="950" dirty="0">
+                <a:solidFill>
+                  <a:schemeClr val="accent6"/>
+                </a:solidFill>
+              </a:rPr>
+              <a:t>1000 kishiga · CORE tadqiqoti (Kiyev, Olmaota, Boku), BMC Pulm Med, 2018</a:t>
+            </a:r>
+            <a:endParaRPr lang="en-US" sz="950" dirty="0"/>
+          </a:p>
+        </p:txBody>
+      </p:sp>
+      <p:graphicFrame>
+        <p:nvGraphicFramePr>
+          <p:cNvPr id="17" name="core-chart" descr=""/>
+          <p:cNvGraphicFramePr/>
+          <p:nvPr/>
+        </p:nvGraphicFramePr>
+        <p:xfrm>
+          <a:off x="4937760" y="2121408"/>
+          <a:ext cx="6613855" cy="2029968"/>
+        </p:xfrm>
+        <a:graphic xmlns:a="http://schemas.openxmlformats.org/drawingml/2006/main">
+          <a:graphicData uri="http://schemas.openxmlformats.org/drawingml/2006/chart">
+            <c:chart xmlns:c="http://schemas.openxmlformats.org/drawingml/2006/chart" r:id="rId1"/>
+          </a:graphicData>
+        </a:graphic>
+      </p:graphicFrame>
+      <p:sp>
+        <p:nvSpPr>
+          <p:cNvPr id="18" name="Text 14"/>
+          <p:cNvSpPr txBox="1"/>
+          <p:nvPr/>
+        </p:nvSpPr>
+        <p:spPr>
+          <a:xfrm>
+            <a:off x="548640" y="4370832"/>
+            <a:ext cx="5486400" cy="256032"/>
+          </a:xfrm>
+          <a:prstGeom prst="rect">
+            <a:avLst/>
+          </a:prstGeom>
+          <a:noFill/>
+          <a:ln/>
+        </p:spPr>
+        <p:txBody>
+          <a:bodyPr wrap="square" lIns="0" tIns="0" rIns="0" bIns="0" rtlCol="0" anchor="t"/>
+          <a:lstStyle/>
+          <a:p>
+            <a:pPr indent="0" marL="0">
+              <a:buNone/>
+            </a:pPr>
+            <a:r>
+              <a:rPr lang="en-US" sz="1300" b="1" dirty="0">
+                <a:solidFill>
+                  <a:schemeClr val="tx1"/>
+                </a:solidFill>
+              </a:rPr>
+              <a:t>Birlamchi boʻgʻinda 4 toʻsiq</a:t>
+            </a:r>
+            <a:endParaRPr lang="en-US" sz="1300" dirty="0"/>
+          </a:p>
+        </p:txBody>
+      </p:sp>
+      <p:sp>
+        <p:nvSpPr>
+          <p:cNvPr id="19" name="Shape 15"/>
           <p:cNvSpPr/>
           <p:nvPr/>
         </p:nvSpPr>
         <p:spPr>
           <a:xfrm>
-            <a:off x="731520" y="4315968"/>
-            <a:ext cx="420624" cy="420624"/>
+            <a:off x="548640" y="4681728"/>
+            <a:ext cx="2636444" cy="868680"/>
           </a:xfrm>
           <a:prstGeom prst="roundRect">
             <a:avLst>
-              <a:gd name="adj" fmla="val 24000"/>
-            </a:avLst>
-          </a:prstGeom>
-          <a:solidFill>
-            <a:schemeClr val="accent1"/>
-          </a:solidFill>
-          <a:ln/>
-        </p:spPr>
-      </p:sp>
-      <p:pic>
-        <p:nvPicPr>
-          <p:cNvPr id="20" name="Image 0" descr="preencoded.png">    </p:cNvPr>
-          <p:cNvPicPr>
-            <a:picLocks noChangeAspect="1"/>
-          </p:cNvPicPr>
-          <p:nvPr/>
-        </p:nvPicPr>
-        <p:blipFill>
-          <a:blip r:embed="rId1"/>
-          <a:stretch>
-            <a:fillRect/>
-          </a:stretch>
-        </p:blipFill>
-        <p:spPr>
-          <a:xfrm>
-            <a:off x="832470" y="4416918"/>
-            <a:ext cx="218724" cy="218724"/>
-          </a:xfrm>
-          <a:prstGeom prst="rect">
-            <a:avLst/>
-          </a:prstGeom>
-        </p:spPr>
-      </p:pic>
-      <p:sp>
-        <p:nvSpPr>
-          <p:cNvPr id="21" name="Text 17"/>
-          <p:cNvSpPr txBox="1"/>
-          <p:nvPr/>
-        </p:nvSpPr>
-        <p:spPr>
-          <a:xfrm>
-            <a:off x="1280160" y="4297680"/>
-            <a:ext cx="1767764" cy="274320"/>
-          </a:xfrm>
-          <a:prstGeom prst="rect">
-            <a:avLst/>
-          </a:prstGeom>
-          <a:noFill/>
-          <a:ln/>
-        </p:spPr>
-        <p:txBody>
-          <a:bodyPr wrap="square" lIns="0" tIns="0" rIns="0" bIns="0" rtlCol="0" anchor="t"/>
-          <a:lstStyle/>
-          <a:p>
-            <a:pPr indent="0" marL="0">
-              <a:buNone/>
-            </a:pPr>
-            <a:r>
-              <a:rPr lang="en-US" sz="1300" b="1" dirty="0">
-                <a:solidFill>
-                  <a:schemeClr val="tx1"/>
-                </a:solidFill>
-              </a:rPr>
-              <a:t>Spirometr kam</a:t>
-            </a:r>
-            <a:endParaRPr lang="en-US" sz="1300" dirty="0"/>
-          </a:p>
-        </p:txBody>
-      </p:sp>
-      <p:sp>
-        <p:nvSpPr>
-          <p:cNvPr id="22" name="Text 18"/>
-          <p:cNvSpPr txBox="1"/>
-          <p:nvPr/>
-        </p:nvSpPr>
-        <p:spPr>
-          <a:xfrm>
-            <a:off x="1280160" y="4572000"/>
-            <a:ext cx="1767764" cy="548640"/>
-          </a:xfrm>
-          <a:prstGeom prst="rect">
-            <a:avLst/>
-          </a:prstGeom>
-          <a:noFill/>
-          <a:ln/>
-        </p:spPr>
-        <p:txBody>
-          <a:bodyPr wrap="square" lIns="0" tIns="0" rIns="0" bIns="0" rtlCol="0" anchor="t"/>
-          <a:lstStyle/>
-          <a:p>
-            <a:pPr indent="0" marL="0">
-              <a:buNone/>
-            </a:pPr>
-            <a:r>
-              <a:rPr lang="en-US" sz="1050" dirty="0">
-                <a:solidFill>
-                  <a:schemeClr val="accent6"/>
-                </a:solidFill>
-              </a:rPr>
-              <a:t>Poliklinika va QVPda qurilma yoʻq yoki band</a:t>
-            </a:r>
-            <a:endParaRPr lang="en-US" sz="1050" dirty="0"/>
-          </a:p>
-        </p:txBody>
-      </p:sp>
-      <p:sp>
-        <p:nvSpPr>
-          <p:cNvPr id="23" name="Shape 19"/>
-          <p:cNvSpPr/>
-          <p:nvPr/>
-        </p:nvSpPr>
-        <p:spPr>
-          <a:xfrm>
-            <a:off x="3367964" y="4160520"/>
-            <a:ext cx="2636444" cy="1051560"/>
-          </a:xfrm>
-          <a:prstGeom prst="roundRect">
-            <a:avLst>
-              <a:gd name="adj" fmla="val 10435"/>
+              <a:gd name="adj" fmla="val 12632"/>
             </a:avLst>
           </a:prstGeom>
           <a:solidFill>
@@ -7332,14 +9307,14 @@
       </p:sp>
       <p:sp>
         <p:nvSpPr>
-          <p:cNvPr id="24" name="Shape 20"/>
+          <p:cNvPr id="20" name="Shape 16"/>
           <p:cNvSpPr/>
           <p:nvPr/>
         </p:nvSpPr>
         <p:spPr>
           <a:xfrm>
-            <a:off x="3550844" y="4315968"/>
-            <a:ext cx="420624" cy="420624"/>
+            <a:off x="713232" y="4864608"/>
+            <a:ext cx="402336" cy="402336"/>
           </a:xfrm>
           <a:prstGeom prst="roundRect">
             <a:avLst>
@@ -7354,7 +9329,7 @@
       </p:sp>
       <p:pic>
         <p:nvPicPr>
-          <p:cNvPr id="25" name="Image 1" descr="preencoded.png">    </p:cNvPr>
+          <p:cNvPr id="21" name="Image 0" descr="preencoded.png">    </p:cNvPr>
           <p:cNvPicPr>
             <a:picLocks noChangeAspect="1"/>
           </p:cNvPicPr>
@@ -7368,8 +9343,8 @@
         </p:blipFill>
         <p:spPr>
           <a:xfrm>
-            <a:off x="3651794" y="4416918"/>
-            <a:ext cx="218724" cy="218724"/>
+            <a:off x="809793" y="4961169"/>
+            <a:ext cx="209215" cy="209215"/>
           </a:xfrm>
           <a:prstGeom prst="rect">
             <a:avLst/>
@@ -7378,90 +9353,90 @@
       </p:pic>
       <p:sp>
         <p:nvSpPr>
-          <p:cNvPr id="26" name="Text 21"/>
-          <p:cNvSpPr txBox="1"/>
-          <p:nvPr/>
-        </p:nvSpPr>
-        <p:spPr>
-          <a:xfrm>
-            <a:off x="4099484" y="4297680"/>
-            <a:ext cx="1767764" cy="274320"/>
-          </a:xfrm>
-          <a:prstGeom prst="rect">
-            <a:avLst/>
-          </a:prstGeom>
-          <a:noFill/>
-          <a:ln/>
-        </p:spPr>
-        <p:txBody>
-          <a:bodyPr wrap="square" lIns="0" tIns="0" rIns="0" bIns="0" rtlCol="0" anchor="t"/>
-          <a:lstStyle/>
-          <a:p>
-            <a:pPr indent="0" marL="0">
-              <a:buNone/>
-            </a:pPr>
-            <a:r>
-              <a:rPr lang="en-US" sz="1300" b="1" dirty="0">
+          <p:cNvPr id="22" name="Text 17"/>
+          <p:cNvSpPr txBox="1"/>
+          <p:nvPr/>
+        </p:nvSpPr>
+        <p:spPr>
+          <a:xfrm>
+            <a:off x="1243584" y="4791456"/>
+            <a:ext cx="1831772" cy="274320"/>
+          </a:xfrm>
+          <a:prstGeom prst="rect">
+            <a:avLst/>
+          </a:prstGeom>
+          <a:noFill/>
+          <a:ln/>
+        </p:spPr>
+        <p:txBody>
+          <a:bodyPr wrap="square" lIns="0" tIns="0" rIns="0" bIns="0" rtlCol="0" anchor="t"/>
+          <a:lstStyle/>
+          <a:p>
+            <a:pPr indent="0" marL="0">
+              <a:buNone/>
+            </a:pPr>
+            <a:r>
+              <a:rPr lang="en-US" sz="1250" b="1" dirty="0">
                 <a:solidFill>
                   <a:schemeClr val="tx1"/>
                 </a:solidFill>
               </a:rPr>
-              <a:t>Kadr tayyor emas</a:t>
-            </a:r>
-            <a:endParaRPr lang="en-US" sz="1300" dirty="0"/>
-          </a:p>
-        </p:txBody>
-      </p:sp>
-      <p:sp>
-        <p:nvSpPr>
-          <p:cNvPr id="27" name="Text 22"/>
-          <p:cNvSpPr txBox="1"/>
-          <p:nvPr/>
-        </p:nvSpPr>
-        <p:spPr>
-          <a:xfrm>
-            <a:off x="4099484" y="4572000"/>
-            <a:ext cx="1767764" cy="548640"/>
-          </a:xfrm>
-          <a:prstGeom prst="rect">
-            <a:avLst/>
-          </a:prstGeom>
-          <a:noFill/>
-          <a:ln/>
-        </p:spPr>
-        <p:txBody>
-          <a:bodyPr wrap="square" lIns="0" tIns="0" rIns="0" bIns="0" rtlCol="0" anchor="t"/>
-          <a:lstStyle/>
-          <a:p>
-            <a:pPr indent="0" marL="0">
-              <a:buNone/>
-            </a:pPr>
-            <a:r>
-              <a:rPr lang="en-US" sz="1050" dirty="0">
+              <a:t>Spirometr kam</a:t>
+            </a:r>
+            <a:endParaRPr lang="en-US" sz="1250" dirty="0"/>
+          </a:p>
+        </p:txBody>
+      </p:sp>
+      <p:sp>
+        <p:nvSpPr>
+          <p:cNvPr id="23" name="Text 18"/>
+          <p:cNvSpPr txBox="1"/>
+          <p:nvPr/>
+        </p:nvSpPr>
+        <p:spPr>
+          <a:xfrm>
+            <a:off x="1243584" y="5065776"/>
+            <a:ext cx="1831772" cy="457200"/>
+          </a:xfrm>
+          <a:prstGeom prst="rect">
+            <a:avLst/>
+          </a:prstGeom>
+          <a:noFill/>
+          <a:ln/>
+        </p:spPr>
+        <p:txBody>
+          <a:bodyPr wrap="square" lIns="0" tIns="0" rIns="0" bIns="0" rtlCol="0" anchor="t"/>
+          <a:lstStyle/>
+          <a:p>
+            <a:pPr indent="0" marL="0">
+              <a:buNone/>
+            </a:pPr>
+            <a:r>
+              <a:rPr lang="en-US" sz="1000" dirty="0">
                 <a:solidFill>
                   <a:schemeClr val="accent6"/>
                 </a:solidFill>
               </a:rPr>
-              <a:t>Oʻlchash va sifat nazorati koʻnikma talab qiladi</a:t>
-            </a:r>
-            <a:endParaRPr lang="en-US" sz="1050" dirty="0"/>
-          </a:p>
-        </p:txBody>
-      </p:sp>
-      <p:sp>
-        <p:nvSpPr>
-          <p:cNvPr id="28" name="Shape 23"/>
+              <a:t>Poliklinika va QVPda qurilma yoʻq yoki band</a:t>
+            </a:r>
+            <a:endParaRPr lang="en-US" sz="1000" dirty="0"/>
+          </a:p>
+        </p:txBody>
+      </p:sp>
+      <p:sp>
+        <p:nvSpPr>
+          <p:cNvPr id="24" name="Shape 19"/>
           <p:cNvSpPr/>
           <p:nvPr/>
         </p:nvSpPr>
         <p:spPr>
           <a:xfrm>
-            <a:off x="6187288" y="4160520"/>
-            <a:ext cx="2636444" cy="1051560"/>
+            <a:off x="3367964" y="4681728"/>
+            <a:ext cx="2636444" cy="868680"/>
           </a:xfrm>
           <a:prstGeom prst="roundRect">
             <a:avLst>
-              <a:gd name="adj" fmla="val 10435"/>
+              <a:gd name="adj" fmla="val 12632"/>
             </a:avLst>
           </a:prstGeom>
           <a:solidFill>
@@ -7479,14 +9454,14 @@
       </p:sp>
       <p:sp>
         <p:nvSpPr>
-          <p:cNvPr id="29" name="Shape 24"/>
+          <p:cNvPr id="25" name="Shape 20"/>
           <p:cNvSpPr/>
           <p:nvPr/>
         </p:nvSpPr>
         <p:spPr>
           <a:xfrm>
-            <a:off x="6370168" y="4315968"/>
-            <a:ext cx="420624" cy="420624"/>
+            <a:off x="3532556" y="4864608"/>
+            <a:ext cx="402336" cy="402336"/>
           </a:xfrm>
           <a:prstGeom prst="roundRect">
             <a:avLst>
@@ -7501,7 +9476,7 @@
       </p:sp>
       <p:pic>
         <p:nvPicPr>
-          <p:cNvPr id="30" name="Image 2" descr="preencoded.png">    </p:cNvPr>
+          <p:cNvPr id="26" name="Image 1" descr="preencoded.png">    </p:cNvPr>
           <p:cNvPicPr>
             <a:picLocks noChangeAspect="1"/>
           </p:cNvPicPr>
@@ -7515,8 +9490,8 @@
         </p:blipFill>
         <p:spPr>
           <a:xfrm>
-            <a:off x="6471117" y="4416918"/>
-            <a:ext cx="218724" cy="218724"/>
+            <a:off x="3629116" y="4961169"/>
+            <a:ext cx="209215" cy="209215"/>
           </a:xfrm>
           <a:prstGeom prst="rect">
             <a:avLst/>
@@ -7525,90 +9500,90 @@
       </p:pic>
       <p:sp>
         <p:nvSpPr>
-          <p:cNvPr id="31" name="Text 25"/>
-          <p:cNvSpPr txBox="1"/>
-          <p:nvPr/>
-        </p:nvSpPr>
-        <p:spPr>
-          <a:xfrm>
-            <a:off x="6918808" y="4297680"/>
-            <a:ext cx="1767764" cy="274320"/>
-          </a:xfrm>
-          <a:prstGeom prst="rect">
-            <a:avLst/>
-          </a:prstGeom>
-          <a:noFill/>
-          <a:ln/>
-        </p:spPr>
-        <p:txBody>
-          <a:bodyPr wrap="square" lIns="0" tIns="0" rIns="0" bIns="0" rtlCol="0" anchor="t"/>
-          <a:lstStyle/>
-          <a:p>
-            <a:pPr indent="0" marL="0">
-              <a:buNone/>
-            </a:pPr>
-            <a:r>
-              <a:rPr lang="en-US" sz="1300" b="1" dirty="0">
+          <p:cNvPr id="27" name="Text 21"/>
+          <p:cNvSpPr txBox="1"/>
+          <p:nvPr/>
+        </p:nvSpPr>
+        <p:spPr>
+          <a:xfrm>
+            <a:off x="4062908" y="4791456"/>
+            <a:ext cx="1831772" cy="274320"/>
+          </a:xfrm>
+          <a:prstGeom prst="rect">
+            <a:avLst/>
+          </a:prstGeom>
+          <a:noFill/>
+          <a:ln/>
+        </p:spPr>
+        <p:txBody>
+          <a:bodyPr wrap="square" lIns="0" tIns="0" rIns="0" bIns="0" rtlCol="0" anchor="t"/>
+          <a:lstStyle/>
+          <a:p>
+            <a:pPr indent="0" marL="0">
+              <a:buNone/>
+            </a:pPr>
+            <a:r>
+              <a:rPr lang="en-US" sz="1250" b="1" dirty="0">
                 <a:solidFill>
                   <a:schemeClr val="tx1"/>
                 </a:solidFill>
               </a:rPr>
-              <a:t>Xavf omillari keng</a:t>
-            </a:r>
-            <a:endParaRPr lang="en-US" sz="1300" dirty="0"/>
-          </a:p>
-        </p:txBody>
-      </p:sp>
-      <p:sp>
-        <p:nvSpPr>
-          <p:cNvPr id="32" name="Text 26"/>
-          <p:cNvSpPr txBox="1"/>
-          <p:nvPr/>
-        </p:nvSpPr>
-        <p:spPr>
-          <a:xfrm>
-            <a:off x="6918808" y="4572000"/>
-            <a:ext cx="1767764" cy="548640"/>
-          </a:xfrm>
-          <a:prstGeom prst="rect">
-            <a:avLst/>
-          </a:prstGeom>
-          <a:noFill/>
-          <a:ln/>
-        </p:spPr>
-        <p:txBody>
-          <a:bodyPr wrap="square" lIns="0" tIns="0" rIns="0" bIns="0" rtlCol="0" anchor="t"/>
-          <a:lstStyle/>
-          <a:p>
-            <a:pPr indent="0" marL="0">
-              <a:buNone/>
-            </a:pPr>
-            <a:r>
-              <a:rPr lang="en-US" sz="1050" dirty="0">
+              <a:t>Kadr tayyor emas</a:t>
+            </a:r>
+            <a:endParaRPr lang="en-US" sz="1250" dirty="0"/>
+          </a:p>
+        </p:txBody>
+      </p:sp>
+      <p:sp>
+        <p:nvSpPr>
+          <p:cNvPr id="28" name="Text 22"/>
+          <p:cNvSpPr txBox="1"/>
+          <p:nvPr/>
+        </p:nvSpPr>
+        <p:spPr>
+          <a:xfrm>
+            <a:off x="4062908" y="5065776"/>
+            <a:ext cx="1831772" cy="457200"/>
+          </a:xfrm>
+          <a:prstGeom prst="rect">
+            <a:avLst/>
+          </a:prstGeom>
+          <a:noFill/>
+          <a:ln/>
+        </p:spPr>
+        <p:txBody>
+          <a:bodyPr wrap="square" lIns="0" tIns="0" rIns="0" bIns="0" rtlCol="0" anchor="t"/>
+          <a:lstStyle/>
+          <a:p>
+            <a:pPr indent="0" marL="0">
+              <a:buNone/>
+            </a:pPr>
+            <a:r>
+              <a:rPr lang="en-US" sz="1000" dirty="0">
                 <a:solidFill>
                   <a:schemeClr val="accent6"/>
                 </a:solidFill>
               </a:rPr>
-              <a:t>Tamaki, tandir tutuni, paxta va qurilish changi</a:t>
-            </a:r>
-            <a:endParaRPr lang="en-US" sz="1050" dirty="0"/>
-          </a:p>
-        </p:txBody>
-      </p:sp>
-      <p:sp>
-        <p:nvSpPr>
-          <p:cNvPr id="33" name="Shape 27"/>
+              <a:t>Oʻlchash va sifat nazorati koʻnikma talab qiladi</a:t>
+            </a:r>
+            <a:endParaRPr lang="en-US" sz="1000" dirty="0"/>
+          </a:p>
+        </p:txBody>
+      </p:sp>
+      <p:sp>
+        <p:nvSpPr>
+          <p:cNvPr id="29" name="Shape 23"/>
           <p:cNvSpPr/>
           <p:nvPr/>
         </p:nvSpPr>
         <p:spPr>
           <a:xfrm>
-            <a:off x="9006611" y="4160520"/>
-            <a:ext cx="2636444" cy="1051560"/>
+            <a:off x="6187288" y="4681728"/>
+            <a:ext cx="2636444" cy="868680"/>
           </a:xfrm>
           <a:prstGeom prst="roundRect">
             <a:avLst>
-              <a:gd name="adj" fmla="val 10435"/>
+              <a:gd name="adj" fmla="val 12632"/>
             </a:avLst>
           </a:prstGeom>
           <a:solidFill>
@@ -7626,14 +9601,14 @@
       </p:sp>
       <p:sp>
         <p:nvSpPr>
-          <p:cNvPr id="34" name="Shape 28"/>
+          <p:cNvPr id="30" name="Shape 24"/>
           <p:cNvSpPr/>
           <p:nvPr/>
         </p:nvSpPr>
         <p:spPr>
           <a:xfrm>
-            <a:off x="9189491" y="4315968"/>
-            <a:ext cx="420624" cy="420624"/>
+            <a:off x="6351880" y="4864608"/>
+            <a:ext cx="402336" cy="402336"/>
           </a:xfrm>
           <a:prstGeom prst="roundRect">
             <a:avLst>
@@ -7648,7 +9623,7 @@
       </p:sp>
       <p:pic>
         <p:nvPicPr>
-          <p:cNvPr id="35" name="Image 3" descr="preencoded.png">    </p:cNvPr>
+          <p:cNvPr id="31" name="Image 2" descr="preencoded.png">    </p:cNvPr>
           <p:cNvPicPr>
             <a:picLocks noChangeAspect="1"/>
           </p:cNvPicPr>
@@ -7662,8 +9637,8 @@
         </p:blipFill>
         <p:spPr>
           <a:xfrm>
-            <a:off x="9290441" y="4416918"/>
-            <a:ext cx="218724" cy="218724"/>
+            <a:off x="6448440" y="4961169"/>
+            <a:ext cx="209215" cy="209215"/>
           </a:xfrm>
           <a:prstGeom prst="rect">
             <a:avLst/>
@@ -7672,110 +9647,115 @@
       </p:pic>
       <p:sp>
         <p:nvSpPr>
-          <p:cNvPr id="36" name="Text 29"/>
-          <p:cNvSpPr txBox="1"/>
-          <p:nvPr/>
-        </p:nvSpPr>
-        <p:spPr>
-          <a:xfrm>
-            <a:off x="9738131" y="4297680"/>
-            <a:ext cx="1767764" cy="274320"/>
-          </a:xfrm>
-          <a:prstGeom prst="rect">
-            <a:avLst/>
-          </a:prstGeom>
-          <a:noFill/>
-          <a:ln/>
-        </p:spPr>
-        <p:txBody>
-          <a:bodyPr wrap="square" lIns="0" tIns="0" rIns="0" bIns="0" rtlCol="0" anchor="t"/>
-          <a:lstStyle/>
-          <a:p>
-            <a:pPr indent="0" marL="0">
-              <a:buNone/>
-            </a:pPr>
-            <a:r>
-              <a:rPr lang="en-US" sz="1300" b="1" dirty="0">
+          <p:cNvPr id="32" name="Text 25"/>
+          <p:cNvSpPr txBox="1"/>
+          <p:nvPr/>
+        </p:nvSpPr>
+        <p:spPr>
+          <a:xfrm>
+            <a:off x="6882232" y="4791456"/>
+            <a:ext cx="1831772" cy="274320"/>
+          </a:xfrm>
+          <a:prstGeom prst="rect">
+            <a:avLst/>
+          </a:prstGeom>
+          <a:noFill/>
+          <a:ln/>
+        </p:spPr>
+        <p:txBody>
+          <a:bodyPr wrap="square" lIns="0" tIns="0" rIns="0" bIns="0" rtlCol="0" anchor="t"/>
+          <a:lstStyle/>
+          <a:p>
+            <a:pPr indent="0" marL="0">
+              <a:buNone/>
+            </a:pPr>
+            <a:r>
+              <a:rPr lang="en-US" sz="1250" b="1" dirty="0">
                 <a:solidFill>
                   <a:schemeClr val="tx1"/>
                 </a:solidFill>
               </a:rPr>
-              <a:t>Talqin murakkab</a:t>
-            </a:r>
-            <a:endParaRPr lang="en-US" sz="1300" dirty="0"/>
-          </a:p>
-        </p:txBody>
-      </p:sp>
-      <p:sp>
-        <p:nvSpPr>
-          <p:cNvPr id="37" name="Text 30"/>
-          <p:cNvSpPr txBox="1"/>
-          <p:nvPr/>
-        </p:nvSpPr>
-        <p:spPr>
-          <a:xfrm>
-            <a:off x="9738131" y="4572000"/>
-            <a:ext cx="1767764" cy="548640"/>
-          </a:xfrm>
-          <a:prstGeom prst="rect">
-            <a:avLst/>
-          </a:prstGeom>
-          <a:noFill/>
-          <a:ln/>
-        </p:spPr>
-        <p:txBody>
-          <a:bodyPr wrap="square" lIns="0" tIns="0" rIns="0" bIns="0" rtlCol="0" anchor="t"/>
-          <a:lstStyle/>
-          <a:p>
-            <a:pPr indent="0" marL="0">
-              <a:buNone/>
-            </a:pPr>
-            <a:r>
-              <a:rPr lang="en-US" sz="1050" dirty="0">
+              <a:t>Xavf omillari keng</a:t>
+            </a:r>
+            <a:endParaRPr lang="en-US" sz="1250" dirty="0"/>
+          </a:p>
+        </p:txBody>
+      </p:sp>
+      <p:sp>
+        <p:nvSpPr>
+          <p:cNvPr id="33" name="Text 26"/>
+          <p:cNvSpPr txBox="1"/>
+          <p:nvPr/>
+        </p:nvSpPr>
+        <p:spPr>
+          <a:xfrm>
+            <a:off x="6882232" y="5065776"/>
+            <a:ext cx="1831772" cy="457200"/>
+          </a:xfrm>
+          <a:prstGeom prst="rect">
+            <a:avLst/>
+          </a:prstGeom>
+          <a:noFill/>
+          <a:ln/>
+        </p:spPr>
+        <p:txBody>
+          <a:bodyPr wrap="square" lIns="0" tIns="0" rIns="0" bIns="0" rtlCol="0" anchor="t"/>
+          <a:lstStyle/>
+          <a:p>
+            <a:pPr indent="0" marL="0">
+              <a:buNone/>
+            </a:pPr>
+            <a:r>
+              <a:rPr lang="en-US" sz="1000" dirty="0">
                 <a:solidFill>
                   <a:schemeClr val="accent6"/>
                 </a:solidFill>
               </a:rPr>
-              <a:t>LLN va GOLD darajasida xato koʻp</a:t>
-            </a:r>
-            <a:endParaRPr lang="en-US" sz="1050" dirty="0"/>
-          </a:p>
-        </p:txBody>
-      </p:sp>
-      <p:sp>
-        <p:nvSpPr>
-          <p:cNvPr id="38" name="Shape 31"/>
+              <a:t>Tamaki, tandir tutuni, paxta va qurilish changi</a:t>
+            </a:r>
+            <a:endParaRPr lang="en-US" sz="1000" dirty="0"/>
+          </a:p>
+        </p:txBody>
+      </p:sp>
+      <p:sp>
+        <p:nvSpPr>
+          <p:cNvPr id="34" name="Shape 27"/>
           <p:cNvSpPr/>
           <p:nvPr/>
         </p:nvSpPr>
         <p:spPr>
           <a:xfrm>
-            <a:off x="548640" y="5440680"/>
-            <a:ext cx="11094415" cy="658368"/>
+            <a:off x="9006611" y="4681728"/>
+            <a:ext cx="2636444" cy="868680"/>
           </a:xfrm>
           <a:prstGeom prst="roundRect">
             <a:avLst>
-              <a:gd name="adj" fmla="val 16667"/>
+              <a:gd name="adj" fmla="val 12632"/>
             </a:avLst>
           </a:prstGeom>
           <a:solidFill>
-            <a:schemeClr val="accent1">
-              <a:alpha val="10000"/>
-            </a:schemeClr>
+            <a:schemeClr val="bg1"/>
           </a:solidFill>
-          <a:ln/>
-        </p:spPr>
-      </p:sp>
-      <p:sp>
-        <p:nvSpPr>
-          <p:cNvPr id="39" name="Shape 32"/>
+          <a:ln w="9525">
+            <a:solidFill>
+              <a:schemeClr val="accent6">
+                <a:alpha val="30000"/>
+              </a:schemeClr>
+            </a:solidFill>
+            <a:prstDash val="solid"/>
+          </a:ln>
+        </p:spPr>
+      </p:sp>
+      <p:sp>
+        <p:nvSpPr>
+          <p:cNvPr id="35" name="Shape 28"/>
           <p:cNvSpPr/>
           <p:nvPr/>
         </p:nvSpPr>
         <p:spPr>
           <a:xfrm>
-            <a:off x="713232" y="5559552"/>
-            <a:ext cx="420624" cy="420624"/>
+            <a:off x="9171203" y="4864608"/>
+            <a:ext cx="402336" cy="402336"/>
           </a:xfrm>
           <a:prstGeom prst="roundRect">
             <a:avLst>
@@ -7790,7 +9770,7 @@
       </p:sp>
       <p:pic>
         <p:nvPicPr>
-          <p:cNvPr id="40" name="Image 4" descr="preencoded.png">    </p:cNvPr>
+          <p:cNvPr id="36" name="Image 3" descr="preencoded.png">    </p:cNvPr>
           <p:cNvPicPr>
             <a:picLocks noChangeAspect="1"/>
           </p:cNvPicPr>
@@ -7804,8 +9784,8 @@
         </p:blipFill>
         <p:spPr>
           <a:xfrm>
-            <a:off x="814182" y="5660502"/>
-            <a:ext cx="218724" cy="218724"/>
+            <a:off x="9267764" y="4961169"/>
+            <a:ext cx="209215" cy="209215"/>
           </a:xfrm>
           <a:prstGeom prst="rect">
             <a:avLst/>
@@ -7814,14 +9794,156 @@
       </p:pic>
       <p:sp>
         <p:nvSpPr>
-          <p:cNvPr id="41" name="Text 33"/>
-          <p:cNvSpPr txBox="1"/>
-          <p:nvPr/>
-        </p:nvSpPr>
-        <p:spPr>
-          <a:xfrm>
-            <a:off x="1280160" y="5440680"/>
-            <a:ext cx="10180015" cy="658368"/>
+          <p:cNvPr id="37" name="Text 29"/>
+          <p:cNvSpPr txBox="1"/>
+          <p:nvPr/>
+        </p:nvSpPr>
+        <p:spPr>
+          <a:xfrm>
+            <a:off x="9701555" y="4791456"/>
+            <a:ext cx="1831772" cy="274320"/>
+          </a:xfrm>
+          <a:prstGeom prst="rect">
+            <a:avLst/>
+          </a:prstGeom>
+          <a:noFill/>
+          <a:ln/>
+        </p:spPr>
+        <p:txBody>
+          <a:bodyPr wrap="square" lIns="0" tIns="0" rIns="0" bIns="0" rtlCol="0" anchor="t"/>
+          <a:lstStyle/>
+          <a:p>
+            <a:pPr indent="0" marL="0">
+              <a:buNone/>
+            </a:pPr>
+            <a:r>
+              <a:rPr lang="en-US" sz="1250" b="1" dirty="0">
+                <a:solidFill>
+                  <a:schemeClr val="tx1"/>
+                </a:solidFill>
+              </a:rPr>
+              <a:t>Talqin murakkab</a:t>
+            </a:r>
+            <a:endParaRPr lang="en-US" sz="1250" dirty="0"/>
+          </a:p>
+        </p:txBody>
+      </p:sp>
+      <p:sp>
+        <p:nvSpPr>
+          <p:cNvPr id="38" name="Text 30"/>
+          <p:cNvSpPr txBox="1"/>
+          <p:nvPr/>
+        </p:nvSpPr>
+        <p:spPr>
+          <a:xfrm>
+            <a:off x="9701555" y="5065776"/>
+            <a:ext cx="1831772" cy="457200"/>
+          </a:xfrm>
+          <a:prstGeom prst="rect">
+            <a:avLst/>
+          </a:prstGeom>
+          <a:noFill/>
+          <a:ln/>
+        </p:spPr>
+        <p:txBody>
+          <a:bodyPr wrap="square" lIns="0" tIns="0" rIns="0" bIns="0" rtlCol="0" anchor="t"/>
+          <a:lstStyle/>
+          <a:p>
+            <a:pPr indent="0" marL="0">
+              <a:buNone/>
+            </a:pPr>
+            <a:r>
+              <a:rPr lang="en-US" sz="1000" dirty="0">
+                <a:solidFill>
+                  <a:schemeClr val="accent6"/>
+                </a:solidFill>
+              </a:rPr>
+              <a:t>LLN va GOLD darajasida xato koʻp</a:t>
+            </a:r>
+            <a:endParaRPr lang="en-US" sz="1000" dirty="0"/>
+          </a:p>
+        </p:txBody>
+      </p:sp>
+      <p:sp>
+        <p:nvSpPr>
+          <p:cNvPr id="39" name="Shape 31"/>
+          <p:cNvSpPr/>
+          <p:nvPr/>
+        </p:nvSpPr>
+        <p:spPr>
+          <a:xfrm>
+            <a:off x="548640" y="5687568"/>
+            <a:ext cx="11094415" cy="475488"/>
+          </a:xfrm>
+          <a:prstGeom prst="roundRect">
+            <a:avLst>
+              <a:gd name="adj" fmla="val 23077"/>
+            </a:avLst>
+          </a:prstGeom>
+          <a:solidFill>
+            <a:schemeClr val="accent1">
+              <a:alpha val="10000"/>
+            </a:schemeClr>
+          </a:solidFill>
+          <a:ln/>
+        </p:spPr>
+      </p:sp>
+      <p:sp>
+        <p:nvSpPr>
+          <p:cNvPr id="40" name="Shape 32"/>
+          <p:cNvSpPr/>
+          <p:nvPr/>
+        </p:nvSpPr>
+        <p:spPr>
+          <a:xfrm>
+            <a:off x="685800" y="5751576"/>
+            <a:ext cx="347472" cy="347472"/>
+          </a:xfrm>
+          <a:prstGeom prst="roundRect">
+            <a:avLst>
+              <a:gd name="adj" fmla="val 24000"/>
+            </a:avLst>
+          </a:prstGeom>
+          <a:solidFill>
+            <a:schemeClr val="accent1"/>
+          </a:solidFill>
+          <a:ln/>
+        </p:spPr>
+      </p:sp>
+      <p:pic>
+        <p:nvPicPr>
+          <p:cNvPr id="41" name="Image 4" descr="preencoded.png">    </p:cNvPr>
+          <p:cNvPicPr>
+            <a:picLocks noChangeAspect="1"/>
+          </p:cNvPicPr>
+          <p:nvPr/>
+        </p:nvPicPr>
+        <p:blipFill>
+          <a:blip r:embed="rId6"/>
+          <a:stretch>
+            <a:fillRect/>
+          </a:stretch>
+        </p:blipFill>
+        <p:spPr>
+          <a:xfrm>
+            <a:off x="769193" y="5834969"/>
+            <a:ext cx="180685" cy="180685"/>
+          </a:xfrm>
+          <a:prstGeom prst="rect">
+            <a:avLst/>
+          </a:prstGeom>
+        </p:spPr>
+      </p:pic>
+      <p:sp>
+        <p:nvSpPr>
+          <p:cNvPr id="42" name="Text 33"/>
+          <p:cNvSpPr txBox="1"/>
+          <p:nvPr/>
+        </p:nvSpPr>
+        <p:spPr>
+          <a:xfrm>
+            <a:off x="1188720" y="5687568"/>
+            <a:ext cx="10271455" cy="475488"/>
           </a:xfrm>
           <a:prstGeom prst="rect">
             <a:avLst/>
@@ -7837,7 +9959,7 @@
               <a:buNone/>
             </a:pPr>
             <a:r>
-              <a:rPr lang="en-US" sz="1300" b="1" dirty="0">
+              <a:rPr lang="en-US" sz="1250" b="1" dirty="0">
                 <a:solidFill>
                   <a:schemeClr val="accent1"/>
                 </a:solidFill>
@@ -7848,14 +9970,14 @@
               <a:buNone/>
             </a:pPr>
             <a:r>
-              <a:rPr lang="en-US" sz="1300" dirty="0">
+              <a:rPr lang="en-US" sz="1250" dirty="0">
                 <a:solidFill>
                   <a:schemeClr val="tx1"/>
                 </a:solidFill>
               </a:rPr>
-              <a:t>aholi miqyosidagi spirometrik tadqiqot topilmadi. Qoʻshni MDH davlatlarida (CORE): 3,2–6,7% — deyarli barchasi ilk bor aniqlangan.</a:t>
-            </a:r>
-            <a:endParaRPr lang="en-US" sz="1300" dirty="0"/>
+              <a:t>aholi miqyosidagi spirometrik tadqiqot topilmadi — pilotimiz birinchi mahalliy maʼlumotni beradi.</a:t>
+            </a:r>
+            <a:endParaRPr lang="en-US" sz="1250" dirty="0"/>
           </a:p>
         </p:txBody>
       </p:sp>
@@ -7909,6 +10031,9 @@
   <p:clrMapOvr>
     <a:masterClrMapping/>
   </p:clrMapOvr>
+  <p:transition spd="med">
+    <p:fade/>
+  </p:transition>
 </p:sld>
 </file>
 
@@ -9071,6 +11196,9 @@
   <p:clrMapOvr>
     <a:masterClrMapping/>
   </p:clrMapOvr>
+  <p:transition spd="med">
+    <p:fade/>
+  </p:transition>
 </p:sld>
 </file>
 
@@ -9981,6 +12109,9 @@
   <p:clrMapOvr>
     <a:masterClrMapping/>
   </p:clrMapOvr>
+  <p:transition spd="med">
+    <p:fade/>
+  </p:transition>
 </p:sld>
 </file>
 
@@ -11888,6 +14019,9 @@
   <p:clrMapOvr>
     <a:masterClrMapping/>
   </p:clrMapOvr>
+  <p:transition spd="med">
+    <p:fade/>
+  </p:transition>
 </p:sld>
 </file>
 
@@ -12565,6 +14699,9 @@
   <p:clrMapOvr>
     <a:masterClrMapping/>
   </p:clrMapOvr>
+  <p:transition spd="med">
+    <p:fade/>
+  </p:transition>
 </p:sld>
 </file>
 
@@ -13265,6 +15402,9 @@
   <p:clrMapOvr>
     <a:masterClrMapping/>
   </p:clrMapOvr>
+  <p:transition spd="med">
+    <p:fade/>
+  </p:transition>
 </p:sld>
 </file>
 
@@ -13902,6 +16042,9 @@
   <p:clrMapOvr>
     <a:masterClrMapping/>
   </p:clrMapOvr>
+  <p:transition spd="med">
+    <p:fade/>
+  </p:transition>
 </p:sld>
 </file>
 
@@ -14619,6 +16762,9 @@
   <p:clrMapOvr>
     <a:masterClrMapping/>
   </p:clrMapOvr>
+  <p:transition spd="med">
+    <p:fade/>
+  </p:transition>
 </p:sld>
 </file>
 
